--- a/AB_test.pptx
+++ b/AB_test.pptx
@@ -9,7 +9,10 @@
     <p:sldId id="257" r:id="rId3"/>
     <p:sldId id="258" r:id="rId4"/>
     <p:sldId id="260" r:id="rId5"/>
-    <p:sldId id="259" r:id="rId6"/>
+    <p:sldId id="263" r:id="rId6"/>
+    <p:sldId id="262" r:id="rId7"/>
+    <p:sldId id="261" r:id="rId8"/>
+    <p:sldId id="259" r:id="rId9"/>
   </p:sldIdLst>
   <p:sldSz cx="12192000" cy="6858000"/>
   <p:notesSz cx="6858000" cy="9144000"/>
@@ -108,6 +111,11 @@
       </a:defRPr>
     </a:lvl9pPr>
   </p:defaultTextStyle>
+  <p:extLst>
+    <p:ext uri="{EFAFB233-063F-42B5-8137-9DF3F51BA10A}">
+      <p15:sldGuideLst xmlns:p15="http://schemas.microsoft.com/office/powerpoint/2012/main"/>
+    </p:ext>
+  </p:extLst>
 </p:presentation>
 </file>
 
@@ -242,7 +250,7 @@
           <a:p>
             <a:fld id="{65688B3E-6BDF-447D-927C-7173740618A1}" type="datetimeFigureOut">
               <a:rPr lang="ru-RU" smtClean="0"/>
-              <a:t>20.02.2026</a:t>
+              <a:t>26.02.2026</a:t>
             </a:fld>
             <a:endParaRPr lang="ru-RU"/>
           </a:p>
@@ -412,7 +420,7 @@
           <a:p>
             <a:fld id="{65688B3E-6BDF-447D-927C-7173740618A1}" type="datetimeFigureOut">
               <a:rPr lang="ru-RU" smtClean="0"/>
-              <a:t>20.02.2026</a:t>
+              <a:t>26.02.2026</a:t>
             </a:fld>
             <a:endParaRPr lang="ru-RU"/>
           </a:p>
@@ -592,7 +600,7 @@
           <a:p>
             <a:fld id="{65688B3E-6BDF-447D-927C-7173740618A1}" type="datetimeFigureOut">
               <a:rPr lang="ru-RU" smtClean="0"/>
-              <a:t>20.02.2026</a:t>
+              <a:t>26.02.2026</a:t>
             </a:fld>
             <a:endParaRPr lang="ru-RU"/>
           </a:p>
@@ -762,7 +770,7 @@
           <a:p>
             <a:fld id="{65688B3E-6BDF-447D-927C-7173740618A1}" type="datetimeFigureOut">
               <a:rPr lang="ru-RU" smtClean="0"/>
-              <a:t>20.02.2026</a:t>
+              <a:t>26.02.2026</a:t>
             </a:fld>
             <a:endParaRPr lang="ru-RU"/>
           </a:p>
@@ -1008,7 +1016,7 @@
           <a:p>
             <a:fld id="{65688B3E-6BDF-447D-927C-7173740618A1}" type="datetimeFigureOut">
               <a:rPr lang="ru-RU" smtClean="0"/>
-              <a:t>20.02.2026</a:t>
+              <a:t>26.02.2026</a:t>
             </a:fld>
             <a:endParaRPr lang="ru-RU"/>
           </a:p>
@@ -1240,7 +1248,7 @@
           <a:p>
             <a:fld id="{65688B3E-6BDF-447D-927C-7173740618A1}" type="datetimeFigureOut">
               <a:rPr lang="ru-RU" smtClean="0"/>
-              <a:t>20.02.2026</a:t>
+              <a:t>26.02.2026</a:t>
             </a:fld>
             <a:endParaRPr lang="ru-RU"/>
           </a:p>
@@ -1607,7 +1615,7 @@
           <a:p>
             <a:fld id="{65688B3E-6BDF-447D-927C-7173740618A1}" type="datetimeFigureOut">
               <a:rPr lang="ru-RU" smtClean="0"/>
-              <a:t>20.02.2026</a:t>
+              <a:t>26.02.2026</a:t>
             </a:fld>
             <a:endParaRPr lang="ru-RU"/>
           </a:p>
@@ -1725,7 +1733,7 @@
           <a:p>
             <a:fld id="{65688B3E-6BDF-447D-927C-7173740618A1}" type="datetimeFigureOut">
               <a:rPr lang="ru-RU" smtClean="0"/>
-              <a:t>20.02.2026</a:t>
+              <a:t>26.02.2026</a:t>
             </a:fld>
             <a:endParaRPr lang="ru-RU"/>
           </a:p>
@@ -1820,7 +1828,7 @@
           <a:p>
             <a:fld id="{65688B3E-6BDF-447D-927C-7173740618A1}" type="datetimeFigureOut">
               <a:rPr lang="ru-RU" smtClean="0"/>
-              <a:t>20.02.2026</a:t>
+              <a:t>26.02.2026</a:t>
             </a:fld>
             <a:endParaRPr lang="ru-RU"/>
           </a:p>
@@ -2097,7 +2105,7 @@
           <a:p>
             <a:fld id="{65688B3E-6BDF-447D-927C-7173740618A1}" type="datetimeFigureOut">
               <a:rPr lang="ru-RU" smtClean="0"/>
-              <a:t>20.02.2026</a:t>
+              <a:t>26.02.2026</a:t>
             </a:fld>
             <a:endParaRPr lang="ru-RU"/>
           </a:p>
@@ -2350,7 +2358,7 @@
           <a:p>
             <a:fld id="{65688B3E-6BDF-447D-927C-7173740618A1}" type="datetimeFigureOut">
               <a:rPr lang="ru-RU" smtClean="0"/>
-              <a:t>20.02.2026</a:t>
+              <a:t>26.02.2026</a:t>
             </a:fld>
             <a:endParaRPr lang="ru-RU"/>
           </a:p>
@@ -2563,7 +2571,7 @@
           <a:p>
             <a:fld id="{65688B3E-6BDF-447D-927C-7173740618A1}" type="datetimeFigureOut">
               <a:rPr lang="ru-RU" smtClean="0"/>
-              <a:t>20.02.2026</a:t>
+              <a:t>26.02.2026</a:t>
             </a:fld>
             <a:endParaRPr lang="ru-RU"/>
           </a:p>
@@ -2980,8 +2988,8 @@
         </p:nvSpPr>
         <p:spPr>
           <a:xfrm>
-            <a:off x="656823" y="231821"/>
-            <a:ext cx="10483401" cy="2537138"/>
+            <a:off x="656823" y="231822"/>
+            <a:ext cx="10483401" cy="1887924"/>
           </a:xfrm>
         </p:spPr>
         <p:txBody>
@@ -3632,7 +3640,7 @@
         </p:nvSpPr>
         <p:spPr>
           <a:xfrm>
-            <a:off x="838200" y="5561214"/>
+            <a:off x="1287087" y="5469774"/>
             <a:ext cx="4082935" cy="1204393"/>
           </a:xfrm>
         </p:spPr>
@@ -3647,20 +3655,38 @@
             </a:pPr>
             <a:r>
               <a:rPr lang="en-US" sz="1600" b="1" dirty="0" smtClean="0"/>
-              <a:t>Desktop</a:t>
-            </a:r>
-          </a:p>
-          <a:p>
-            <a:pPr marL="0" indent="0">
-              <a:buNone/>
-            </a:pPr>
+              <a:t>Desktop (</a:t>
+            </a:r>
+            <a:r>
+              <a:rPr lang="ru-RU" sz="1600" b="1" dirty="0" smtClean="0">
+                <a:solidFill>
+                  <a:srgbClr val="FF9999"/>
+                </a:solidFill>
+              </a:rPr>
+              <a:t>розовые столбцы</a:t>
+            </a:r>
+            <a:r>
+              <a:rPr lang="ru-RU" sz="1600" b="1" dirty="0" smtClean="0"/>
+              <a:t>)</a:t>
+            </a:r>
+            <a:br>
+              <a:rPr lang="ru-RU" sz="1600" b="1" dirty="0" smtClean="0"/>
+            </a:br>
             <a:r>
               <a:rPr lang="ru-RU" sz="1600" b="1" dirty="0" smtClean="0">
                 <a:solidFill>
                   <a:schemeClr val="accent6"/>
                 </a:solidFill>
               </a:rPr>
-              <a:t>Рост:</a:t>
+              <a:t>Рост</a:t>
+            </a:r>
+            <a:r>
+              <a:rPr lang="ru-RU" sz="1600" b="1" dirty="0" smtClean="0">
+                <a:solidFill>
+                  <a:schemeClr val="accent6"/>
+                </a:solidFill>
+              </a:rPr>
+              <a:t>:</a:t>
             </a:r>
             <a:r>
               <a:rPr lang="ru-RU" sz="1600" dirty="0" smtClean="0"/>
@@ -3686,18 +3712,24 @@
               <a:rPr lang="ru-RU" sz="1600" dirty="0" smtClean="0"/>
               <a:t>-реклама.</a:t>
             </a:r>
-          </a:p>
-          <a:p>
-            <a:pPr marL="0" indent="0">
-              <a:buNone/>
-            </a:pPr>
+            <a:br>
+              <a:rPr lang="ru-RU" sz="1600" dirty="0" smtClean="0"/>
+            </a:br>
             <a:r>
               <a:rPr lang="ru-RU" sz="1600" b="1" dirty="0" smtClean="0">
                 <a:solidFill>
                   <a:srgbClr val="FF0000"/>
                 </a:solidFill>
               </a:rPr>
-              <a:t>Падение:</a:t>
+              <a:t>Падение</a:t>
+            </a:r>
+            <a:r>
+              <a:rPr lang="ru-RU" sz="1600" b="1" dirty="0" smtClean="0">
+                <a:solidFill>
+                  <a:srgbClr val="FF0000"/>
+                </a:solidFill>
+              </a:rPr>
+              <a:t>:</a:t>
             </a:r>
             <a:r>
               <a:rPr lang="ru-RU" sz="1600" dirty="0" smtClean="0"/>
@@ -3764,7 +3796,689 @@
         </p:nvSpPr>
         <p:spPr>
           <a:xfrm>
-            <a:off x="9293629" y="2905473"/>
+            <a:off x="9252065" y="2574956"/>
+            <a:ext cx="2060171" cy="1866032"/>
+          </a:xfrm>
+          <a:prstGeom prst="rect">
+            <a:avLst/>
+          </a:prstGeom>
+        </p:spPr>
+        <p:txBody>
+          <a:bodyPr vert="horz" lIns="91440" tIns="45720" rIns="91440" bIns="45720" rtlCol="0">
+            <a:normAutofit lnSpcReduction="10000"/>
+          </a:bodyPr>
+          <a:lstStyle>
+            <a:lvl1pPr marL="228600" indent="-228600" algn="l" defTabSz="914400" rtl="0" eaLnBrk="1" latinLnBrk="0" hangingPunct="1">
+              <a:lnSpc>
+                <a:spcPct val="90000"/>
+              </a:lnSpc>
+              <a:spcBef>
+                <a:spcPts val="1000"/>
+              </a:spcBef>
+              <a:buFont typeface="Arial" panose="020B0604020202020204" pitchFamily="34" charset="0"/>
+              <a:buChar char="•"/>
+              <a:defRPr sz="2800" kern="1200">
+                <a:solidFill>
+                  <a:schemeClr val="tx1"/>
+                </a:solidFill>
+                <a:latin typeface="+mn-lt"/>
+                <a:ea typeface="+mn-ea"/>
+                <a:cs typeface="+mn-cs"/>
+              </a:defRPr>
+            </a:lvl1pPr>
+            <a:lvl2pPr marL="685800" indent="-228600" algn="l" defTabSz="914400" rtl="0" eaLnBrk="1" latinLnBrk="0" hangingPunct="1">
+              <a:lnSpc>
+                <a:spcPct val="90000"/>
+              </a:lnSpc>
+              <a:spcBef>
+                <a:spcPts val="500"/>
+              </a:spcBef>
+              <a:buFont typeface="Arial" panose="020B0604020202020204" pitchFamily="34" charset="0"/>
+              <a:buChar char="•"/>
+              <a:defRPr sz="2400" kern="1200">
+                <a:solidFill>
+                  <a:schemeClr val="tx1"/>
+                </a:solidFill>
+                <a:latin typeface="+mn-lt"/>
+                <a:ea typeface="+mn-ea"/>
+                <a:cs typeface="+mn-cs"/>
+              </a:defRPr>
+            </a:lvl2pPr>
+            <a:lvl3pPr marL="1143000" indent="-228600" algn="l" defTabSz="914400" rtl="0" eaLnBrk="1" latinLnBrk="0" hangingPunct="1">
+              <a:lnSpc>
+                <a:spcPct val="90000"/>
+              </a:lnSpc>
+              <a:spcBef>
+                <a:spcPts val="500"/>
+              </a:spcBef>
+              <a:buFont typeface="Arial" panose="020B0604020202020204" pitchFamily="34" charset="0"/>
+              <a:buChar char="•"/>
+              <a:defRPr sz="2000" kern="1200">
+                <a:solidFill>
+                  <a:schemeClr val="tx1"/>
+                </a:solidFill>
+                <a:latin typeface="+mn-lt"/>
+                <a:ea typeface="+mn-ea"/>
+                <a:cs typeface="+mn-cs"/>
+              </a:defRPr>
+            </a:lvl3pPr>
+            <a:lvl4pPr marL="1600200" indent="-228600" algn="l" defTabSz="914400" rtl="0" eaLnBrk="1" latinLnBrk="0" hangingPunct="1">
+              <a:lnSpc>
+                <a:spcPct val="90000"/>
+              </a:lnSpc>
+              <a:spcBef>
+                <a:spcPts val="500"/>
+              </a:spcBef>
+              <a:buFont typeface="Arial" panose="020B0604020202020204" pitchFamily="34" charset="0"/>
+              <a:buChar char="•"/>
+              <a:defRPr sz="1800" kern="1200">
+                <a:solidFill>
+                  <a:schemeClr val="tx1"/>
+                </a:solidFill>
+                <a:latin typeface="+mn-lt"/>
+                <a:ea typeface="+mn-ea"/>
+                <a:cs typeface="+mn-cs"/>
+              </a:defRPr>
+            </a:lvl4pPr>
+            <a:lvl5pPr marL="2057400" indent="-228600" algn="l" defTabSz="914400" rtl="0" eaLnBrk="1" latinLnBrk="0" hangingPunct="1">
+              <a:lnSpc>
+                <a:spcPct val="90000"/>
+              </a:lnSpc>
+              <a:spcBef>
+                <a:spcPts val="500"/>
+              </a:spcBef>
+              <a:buFont typeface="Arial" panose="020B0604020202020204" pitchFamily="34" charset="0"/>
+              <a:buChar char="•"/>
+              <a:defRPr sz="1800" kern="1200">
+                <a:solidFill>
+                  <a:schemeClr val="tx1"/>
+                </a:solidFill>
+                <a:latin typeface="+mn-lt"/>
+                <a:ea typeface="+mn-ea"/>
+                <a:cs typeface="+mn-cs"/>
+              </a:defRPr>
+            </a:lvl5pPr>
+            <a:lvl6pPr marL="2514600" indent="-228600" algn="l" defTabSz="914400" rtl="0" eaLnBrk="1" latinLnBrk="0" hangingPunct="1">
+              <a:lnSpc>
+                <a:spcPct val="90000"/>
+              </a:lnSpc>
+              <a:spcBef>
+                <a:spcPts val="500"/>
+              </a:spcBef>
+              <a:buFont typeface="Arial" panose="020B0604020202020204" pitchFamily="34" charset="0"/>
+              <a:buChar char="•"/>
+              <a:defRPr sz="1800" kern="1200">
+                <a:solidFill>
+                  <a:schemeClr val="tx1"/>
+                </a:solidFill>
+                <a:latin typeface="+mn-lt"/>
+                <a:ea typeface="+mn-ea"/>
+                <a:cs typeface="+mn-cs"/>
+              </a:defRPr>
+            </a:lvl6pPr>
+            <a:lvl7pPr marL="2971800" indent="-228600" algn="l" defTabSz="914400" rtl="0" eaLnBrk="1" latinLnBrk="0" hangingPunct="1">
+              <a:lnSpc>
+                <a:spcPct val="90000"/>
+              </a:lnSpc>
+              <a:spcBef>
+                <a:spcPts val="500"/>
+              </a:spcBef>
+              <a:buFont typeface="Arial" panose="020B0604020202020204" pitchFamily="34" charset="0"/>
+              <a:buChar char="•"/>
+              <a:defRPr sz="1800" kern="1200">
+                <a:solidFill>
+                  <a:schemeClr val="tx1"/>
+                </a:solidFill>
+                <a:latin typeface="+mn-lt"/>
+                <a:ea typeface="+mn-ea"/>
+                <a:cs typeface="+mn-cs"/>
+              </a:defRPr>
+            </a:lvl7pPr>
+            <a:lvl8pPr marL="3429000" indent="-228600" algn="l" defTabSz="914400" rtl="0" eaLnBrk="1" latinLnBrk="0" hangingPunct="1">
+              <a:lnSpc>
+                <a:spcPct val="90000"/>
+              </a:lnSpc>
+              <a:spcBef>
+                <a:spcPts val="500"/>
+              </a:spcBef>
+              <a:buFont typeface="Arial" panose="020B0604020202020204" pitchFamily="34" charset="0"/>
+              <a:buChar char="•"/>
+              <a:defRPr sz="1800" kern="1200">
+                <a:solidFill>
+                  <a:schemeClr val="tx1"/>
+                </a:solidFill>
+                <a:latin typeface="+mn-lt"/>
+                <a:ea typeface="+mn-ea"/>
+                <a:cs typeface="+mn-cs"/>
+              </a:defRPr>
+            </a:lvl8pPr>
+            <a:lvl9pPr marL="3886200" indent="-228600" algn="l" defTabSz="914400" rtl="0" eaLnBrk="1" latinLnBrk="0" hangingPunct="1">
+              <a:lnSpc>
+                <a:spcPct val="90000"/>
+              </a:lnSpc>
+              <a:spcBef>
+                <a:spcPts val="500"/>
+              </a:spcBef>
+              <a:buFont typeface="Arial" panose="020B0604020202020204" pitchFamily="34" charset="0"/>
+              <a:buChar char="•"/>
+              <a:defRPr sz="1800" kern="1200">
+                <a:solidFill>
+                  <a:schemeClr val="tx1"/>
+                </a:solidFill>
+                <a:latin typeface="+mn-lt"/>
+                <a:ea typeface="+mn-ea"/>
+                <a:cs typeface="+mn-cs"/>
+              </a:defRPr>
+            </a:lvl9pPr>
+          </a:lstStyle>
+          <a:p>
+            <a:pPr marL="0" indent="0">
+              <a:buFont typeface="Arial" panose="020B0604020202020204" pitchFamily="34" charset="0"/>
+              <a:buNone/>
+            </a:pPr>
+            <a:endParaRPr lang="ru-RU" sz="1800" dirty="0"/>
+          </a:p>
+          <a:p>
+            <a:pPr marL="0" indent="0">
+              <a:buFont typeface="Arial" panose="020B0604020202020204" pitchFamily="34" charset="0"/>
+              <a:buNone/>
+            </a:pPr>
+            <a:r>
+              <a:rPr lang="ru-RU" sz="1800" dirty="0" smtClean="0"/>
+              <a:t>Каждый столбец отображает как изменилась метрика в группе В по отношению к группе А</a:t>
+            </a:r>
+            <a:endParaRPr lang="ru-RU" sz="1800" dirty="0"/>
+          </a:p>
+        </p:txBody>
+      </p:sp>
+      <p:sp>
+        <p:nvSpPr>
+          <p:cNvPr id="10" name="Объект 4"/>
+          <p:cNvSpPr txBox="1">
+            <a:spLocks/>
+          </p:cNvSpPr>
+          <p:nvPr/>
+        </p:nvSpPr>
+        <p:spPr>
+          <a:xfrm>
+            <a:off x="5594465" y="5461464"/>
+            <a:ext cx="3699164" cy="1204393"/>
+          </a:xfrm>
+          <a:prstGeom prst="rect">
+            <a:avLst/>
+          </a:prstGeom>
+        </p:spPr>
+        <p:txBody>
+          <a:bodyPr vert="horz" lIns="91440" tIns="45720" rIns="91440" bIns="45720" rtlCol="0">
+            <a:noAutofit/>
+          </a:bodyPr>
+          <a:lstStyle>
+            <a:lvl1pPr marL="228600" indent="-228600" algn="l" defTabSz="914400" rtl="0" eaLnBrk="1" latinLnBrk="0" hangingPunct="1">
+              <a:lnSpc>
+                <a:spcPct val="90000"/>
+              </a:lnSpc>
+              <a:spcBef>
+                <a:spcPts val="1000"/>
+              </a:spcBef>
+              <a:buFont typeface="Arial" panose="020B0604020202020204" pitchFamily="34" charset="0"/>
+              <a:buChar char="•"/>
+              <a:defRPr sz="2800" kern="1200">
+                <a:solidFill>
+                  <a:schemeClr val="tx1"/>
+                </a:solidFill>
+                <a:latin typeface="+mn-lt"/>
+                <a:ea typeface="+mn-ea"/>
+                <a:cs typeface="+mn-cs"/>
+              </a:defRPr>
+            </a:lvl1pPr>
+            <a:lvl2pPr marL="685800" indent="-228600" algn="l" defTabSz="914400" rtl="0" eaLnBrk="1" latinLnBrk="0" hangingPunct="1">
+              <a:lnSpc>
+                <a:spcPct val="90000"/>
+              </a:lnSpc>
+              <a:spcBef>
+                <a:spcPts val="500"/>
+              </a:spcBef>
+              <a:buFont typeface="Arial" panose="020B0604020202020204" pitchFamily="34" charset="0"/>
+              <a:buChar char="•"/>
+              <a:defRPr sz="2400" kern="1200">
+                <a:solidFill>
+                  <a:schemeClr val="tx1"/>
+                </a:solidFill>
+                <a:latin typeface="+mn-lt"/>
+                <a:ea typeface="+mn-ea"/>
+                <a:cs typeface="+mn-cs"/>
+              </a:defRPr>
+            </a:lvl2pPr>
+            <a:lvl3pPr marL="1143000" indent="-228600" algn="l" defTabSz="914400" rtl="0" eaLnBrk="1" latinLnBrk="0" hangingPunct="1">
+              <a:lnSpc>
+                <a:spcPct val="90000"/>
+              </a:lnSpc>
+              <a:spcBef>
+                <a:spcPts val="500"/>
+              </a:spcBef>
+              <a:buFont typeface="Arial" panose="020B0604020202020204" pitchFamily="34" charset="0"/>
+              <a:buChar char="•"/>
+              <a:defRPr sz="2000" kern="1200">
+                <a:solidFill>
+                  <a:schemeClr val="tx1"/>
+                </a:solidFill>
+                <a:latin typeface="+mn-lt"/>
+                <a:ea typeface="+mn-ea"/>
+                <a:cs typeface="+mn-cs"/>
+              </a:defRPr>
+            </a:lvl3pPr>
+            <a:lvl4pPr marL="1600200" indent="-228600" algn="l" defTabSz="914400" rtl="0" eaLnBrk="1" latinLnBrk="0" hangingPunct="1">
+              <a:lnSpc>
+                <a:spcPct val="90000"/>
+              </a:lnSpc>
+              <a:spcBef>
+                <a:spcPts val="500"/>
+              </a:spcBef>
+              <a:buFont typeface="Arial" panose="020B0604020202020204" pitchFamily="34" charset="0"/>
+              <a:buChar char="•"/>
+              <a:defRPr sz="1800" kern="1200">
+                <a:solidFill>
+                  <a:schemeClr val="tx1"/>
+                </a:solidFill>
+                <a:latin typeface="+mn-lt"/>
+                <a:ea typeface="+mn-ea"/>
+                <a:cs typeface="+mn-cs"/>
+              </a:defRPr>
+            </a:lvl4pPr>
+            <a:lvl5pPr marL="2057400" indent="-228600" algn="l" defTabSz="914400" rtl="0" eaLnBrk="1" latinLnBrk="0" hangingPunct="1">
+              <a:lnSpc>
+                <a:spcPct val="90000"/>
+              </a:lnSpc>
+              <a:spcBef>
+                <a:spcPts val="500"/>
+              </a:spcBef>
+              <a:buFont typeface="Arial" panose="020B0604020202020204" pitchFamily="34" charset="0"/>
+              <a:buChar char="•"/>
+              <a:defRPr sz="1800" kern="1200">
+                <a:solidFill>
+                  <a:schemeClr val="tx1"/>
+                </a:solidFill>
+                <a:latin typeface="+mn-lt"/>
+                <a:ea typeface="+mn-ea"/>
+                <a:cs typeface="+mn-cs"/>
+              </a:defRPr>
+            </a:lvl5pPr>
+            <a:lvl6pPr marL="2514600" indent="-228600" algn="l" defTabSz="914400" rtl="0" eaLnBrk="1" latinLnBrk="0" hangingPunct="1">
+              <a:lnSpc>
+                <a:spcPct val="90000"/>
+              </a:lnSpc>
+              <a:spcBef>
+                <a:spcPts val="500"/>
+              </a:spcBef>
+              <a:buFont typeface="Arial" panose="020B0604020202020204" pitchFamily="34" charset="0"/>
+              <a:buChar char="•"/>
+              <a:defRPr sz="1800" kern="1200">
+                <a:solidFill>
+                  <a:schemeClr val="tx1"/>
+                </a:solidFill>
+                <a:latin typeface="+mn-lt"/>
+                <a:ea typeface="+mn-ea"/>
+                <a:cs typeface="+mn-cs"/>
+              </a:defRPr>
+            </a:lvl6pPr>
+            <a:lvl7pPr marL="2971800" indent="-228600" algn="l" defTabSz="914400" rtl="0" eaLnBrk="1" latinLnBrk="0" hangingPunct="1">
+              <a:lnSpc>
+                <a:spcPct val="90000"/>
+              </a:lnSpc>
+              <a:spcBef>
+                <a:spcPts val="500"/>
+              </a:spcBef>
+              <a:buFont typeface="Arial" panose="020B0604020202020204" pitchFamily="34" charset="0"/>
+              <a:buChar char="•"/>
+              <a:defRPr sz="1800" kern="1200">
+                <a:solidFill>
+                  <a:schemeClr val="tx1"/>
+                </a:solidFill>
+                <a:latin typeface="+mn-lt"/>
+                <a:ea typeface="+mn-ea"/>
+                <a:cs typeface="+mn-cs"/>
+              </a:defRPr>
+            </a:lvl7pPr>
+            <a:lvl8pPr marL="3429000" indent="-228600" algn="l" defTabSz="914400" rtl="0" eaLnBrk="1" latinLnBrk="0" hangingPunct="1">
+              <a:lnSpc>
+                <a:spcPct val="90000"/>
+              </a:lnSpc>
+              <a:spcBef>
+                <a:spcPts val="500"/>
+              </a:spcBef>
+              <a:buFont typeface="Arial" panose="020B0604020202020204" pitchFamily="34" charset="0"/>
+              <a:buChar char="•"/>
+              <a:defRPr sz="1800" kern="1200">
+                <a:solidFill>
+                  <a:schemeClr val="tx1"/>
+                </a:solidFill>
+                <a:latin typeface="+mn-lt"/>
+                <a:ea typeface="+mn-ea"/>
+                <a:cs typeface="+mn-cs"/>
+              </a:defRPr>
+            </a:lvl8pPr>
+            <a:lvl9pPr marL="3886200" indent="-228600" algn="l" defTabSz="914400" rtl="0" eaLnBrk="1" latinLnBrk="0" hangingPunct="1">
+              <a:lnSpc>
+                <a:spcPct val="90000"/>
+              </a:lnSpc>
+              <a:spcBef>
+                <a:spcPts val="500"/>
+              </a:spcBef>
+              <a:buFont typeface="Arial" panose="020B0604020202020204" pitchFamily="34" charset="0"/>
+              <a:buChar char="•"/>
+              <a:defRPr sz="1800" kern="1200">
+                <a:solidFill>
+                  <a:schemeClr val="tx1"/>
+                </a:solidFill>
+                <a:latin typeface="+mn-lt"/>
+                <a:ea typeface="+mn-ea"/>
+                <a:cs typeface="+mn-cs"/>
+              </a:defRPr>
+            </a:lvl9pPr>
+          </a:lstStyle>
+          <a:p>
+            <a:pPr marL="0" indent="0">
+              <a:buFont typeface="Arial" panose="020B0604020202020204" pitchFamily="34" charset="0"/>
+              <a:buNone/>
+            </a:pPr>
+            <a:r>
+              <a:rPr lang="en-US" sz="1600" b="1" dirty="0" smtClean="0"/>
+              <a:t>Mobile</a:t>
+            </a:r>
+            <a:r>
+              <a:rPr lang="ru-RU" sz="1600" b="1" dirty="0" smtClean="0"/>
+              <a:t> (</a:t>
+            </a:r>
+            <a:r>
+              <a:rPr lang="ru-RU" sz="1600" b="1" dirty="0" smtClean="0">
+                <a:solidFill>
+                  <a:srgbClr val="00CCFF"/>
+                </a:solidFill>
+              </a:rPr>
+              <a:t>голубые столбцы</a:t>
+            </a:r>
+            <a:r>
+              <a:rPr lang="ru-RU" sz="1600" b="1" dirty="0" smtClean="0"/>
+              <a:t>)</a:t>
+            </a:r>
+            <a:br>
+              <a:rPr lang="ru-RU" sz="1600" b="1" dirty="0" smtClean="0"/>
+            </a:br>
+            <a:r>
+              <a:rPr lang="ru-RU" sz="1600" b="1" dirty="0" smtClean="0">
+                <a:solidFill>
+                  <a:schemeClr val="accent6"/>
+                </a:solidFill>
+              </a:rPr>
+              <a:t>Рост</a:t>
+            </a:r>
+            <a:r>
+              <a:rPr lang="ru-RU" sz="1600" b="1" dirty="0" smtClean="0">
+                <a:solidFill>
+                  <a:schemeClr val="accent6"/>
+                </a:solidFill>
+              </a:rPr>
+              <a:t>:</a:t>
+            </a:r>
+            <a:r>
+              <a:rPr lang="ru-RU" sz="1600" dirty="0" smtClean="0"/>
+              <a:t> </a:t>
+            </a:r>
+            <a:r>
+              <a:rPr lang="en-US" sz="1600" b="1" dirty="0" smtClean="0"/>
+              <a:t>Revenue, RPM</a:t>
+            </a:r>
+            <a:r>
+              <a:rPr lang="ru-RU" sz="1600" dirty="0" smtClean="0"/>
+              <a:t>,</a:t>
+            </a:r>
+            <a:r>
+              <a:rPr lang="en-US" sz="1600" dirty="0" smtClean="0"/>
+              <a:t> </a:t>
+            </a:r>
+            <a:r>
+              <a:rPr lang="en-US" sz="1600" b="1" dirty="0" smtClean="0"/>
+              <a:t>RPS,</a:t>
+            </a:r>
+            <a:r>
+              <a:rPr lang="ru-RU" sz="1600" dirty="0" smtClean="0"/>
+              <a:t> </a:t>
+            </a:r>
+            <a:r>
+              <a:rPr lang="en-US" sz="1600" b="1" dirty="0" smtClean="0"/>
+              <a:t>CTR</a:t>
+            </a:r>
+            <a:r>
+              <a:rPr lang="ru-RU" sz="1600" dirty="0" smtClean="0"/>
+              <a:t>-реклама.</a:t>
+            </a:r>
+            <a:br>
+              <a:rPr lang="ru-RU" sz="1600" dirty="0" smtClean="0"/>
+            </a:br>
+            <a:r>
+              <a:rPr lang="ru-RU" sz="1600" b="1" dirty="0" smtClean="0">
+                <a:solidFill>
+                  <a:srgbClr val="FF0000"/>
+                </a:solidFill>
+              </a:rPr>
+              <a:t>Падение</a:t>
+            </a:r>
+            <a:r>
+              <a:rPr lang="ru-RU" sz="1600" b="1" dirty="0" smtClean="0">
+                <a:solidFill>
+                  <a:srgbClr val="FF0000"/>
+                </a:solidFill>
+              </a:rPr>
+              <a:t>:</a:t>
+            </a:r>
+            <a:r>
+              <a:rPr lang="en-US" sz="1600" b="1" dirty="0" smtClean="0"/>
+              <a:t> CTR</a:t>
+            </a:r>
+            <a:r>
+              <a:rPr lang="ru-RU" sz="1600" b="1" dirty="0" smtClean="0"/>
+              <a:t>-</a:t>
+            </a:r>
+            <a:r>
+              <a:rPr lang="ru-RU" sz="1600" dirty="0" smtClean="0"/>
+              <a:t>органика.</a:t>
+            </a:r>
+            <a:br>
+              <a:rPr lang="ru-RU" sz="1600" dirty="0" smtClean="0"/>
+            </a:br>
+            <a:endParaRPr lang="ru-RU" sz="1600" dirty="0"/>
+          </a:p>
+        </p:txBody>
+      </p:sp>
+    </p:spTree>
+    <p:extLst>
+      <p:ext uri="{BB962C8B-B14F-4D97-AF65-F5344CB8AC3E}">
+        <p14:creationId xmlns:p14="http://schemas.microsoft.com/office/powerpoint/2010/main" val="2771018751"/>
+      </p:ext>
+    </p:extLst>
+  </p:cSld>
+  <p:clrMapOvr>
+    <a:masterClrMapping/>
+  </p:clrMapOvr>
+  <p:timing>
+    <p:tnLst>
+      <p:par>
+        <p:cTn id="1" dur="indefinite" restart="never" nodeType="tmRoot"/>
+      </p:par>
+    </p:tnLst>
+  </p:timing>
+</p:sld>
+</file>
+
+<file path=ppt/slides/slide4.xml><?xml version="1.0" encoding="utf-8"?>
+<p:sld xmlns:a="http://schemas.openxmlformats.org/drawingml/2006/main" xmlns:r="http://schemas.openxmlformats.org/officeDocument/2006/relationships" xmlns:p="http://schemas.openxmlformats.org/presentationml/2006/main">
+  <p:cSld>
+    <p:spTree>
+      <p:nvGrpSpPr>
+        <p:cNvPr id="1" name=""/>
+        <p:cNvGrpSpPr/>
+        <p:nvPr/>
+      </p:nvGrpSpPr>
+      <p:grpSpPr>
+        <a:xfrm>
+          <a:off x="0" y="0"/>
+          <a:ext cx="0" cy="0"/>
+          <a:chOff x="0" y="0"/>
+          <a:chExt cx="0" cy="0"/>
+        </a:xfrm>
+      </p:grpSpPr>
+      <p:sp>
+        <p:nvSpPr>
+          <p:cNvPr id="2" name="Заголовок 1"/>
+          <p:cNvSpPr>
+            <a:spLocks noGrp="1"/>
+          </p:cNvSpPr>
+          <p:nvPr>
+            <p:ph type="title"/>
+          </p:nvPr>
+        </p:nvSpPr>
+        <p:spPr>
+          <a:xfrm>
+            <a:off x="838200" y="365125"/>
+            <a:ext cx="10515600" cy="1161361"/>
+          </a:xfrm>
+        </p:spPr>
+        <p:txBody>
+          <a:bodyPr>
+            <a:normAutofit/>
+          </a:bodyPr>
+          <a:lstStyle/>
+          <a:p>
+            <a:r>
+              <a:rPr lang="ru-RU" sz="4000" b="1" dirty="0" smtClean="0"/>
+              <a:t>Обоснование полученных результатов</a:t>
+            </a:r>
+            <a:endParaRPr lang="ru-RU" sz="4000" b="1" dirty="0"/>
+          </a:p>
+        </p:txBody>
+      </p:sp>
+      <p:sp>
+        <p:nvSpPr>
+          <p:cNvPr id="5" name="Объект 4"/>
+          <p:cNvSpPr>
+            <a:spLocks noGrp="1"/>
+          </p:cNvSpPr>
+          <p:nvPr>
+            <p:ph idx="1"/>
+          </p:nvPr>
+        </p:nvSpPr>
+        <p:spPr>
+          <a:xfrm>
+            <a:off x="989217" y="5461462"/>
+            <a:ext cx="9651074" cy="1304145"/>
+          </a:xfrm>
+        </p:spPr>
+        <p:txBody>
+          <a:bodyPr>
+            <a:normAutofit fontScale="92500" lnSpcReduction="20000"/>
+          </a:bodyPr>
+          <a:lstStyle/>
+          <a:p>
+            <a:pPr marL="0" indent="0" algn="just">
+              <a:buNone/>
+            </a:pPr>
+            <a:r>
+              <a:rPr lang="ru-RU" sz="1700" b="1" dirty="0" smtClean="0"/>
+              <a:t>Важно</a:t>
+            </a:r>
+            <a:r>
+              <a:rPr lang="ru-RU" sz="1700" dirty="0" smtClean="0"/>
+              <a:t>: количество </a:t>
+            </a:r>
+            <a:r>
+              <a:rPr lang="ru-RU" sz="1700" dirty="0" smtClean="0"/>
+              <a:t>сессий практически не изменилось (пользователи возвращаются), но снизилось общее количество загруженных страниц и резко упало количество страниц, где пользователь видел нашу ленту.</a:t>
+            </a:r>
+          </a:p>
+          <a:p>
+            <a:pPr marL="0" indent="0">
+              <a:buNone/>
+            </a:pPr>
+            <a:r>
+              <a:rPr lang="ru-RU" sz="1700" b="1" dirty="0" smtClean="0"/>
+              <a:t>Вывод</a:t>
+            </a:r>
+            <a:r>
+              <a:rPr lang="ru-RU" sz="1700" dirty="0" smtClean="0"/>
+              <a:t>: </a:t>
+            </a:r>
+            <a:br>
+              <a:rPr lang="ru-RU" sz="1700" dirty="0" smtClean="0"/>
+            </a:br>
+            <a:r>
+              <a:rPr lang="ru-RU" sz="1700" dirty="0" smtClean="0"/>
+              <a:t> - пользователи стали чаще кликать на рекламный контент и не возвращаться обратно на сайт. </a:t>
+            </a:r>
+            <a:r>
+              <a:rPr lang="ru-RU" sz="1700" dirty="0" smtClean="0"/>
+              <a:t>Это </a:t>
+            </a:r>
+            <a:r>
+              <a:rPr lang="ru-RU" sz="1700" dirty="0" smtClean="0"/>
+              <a:t>подтверждается снижением глубины просмотра.</a:t>
+            </a:r>
+            <a:r>
+              <a:rPr lang="ru-RU" sz="1700" dirty="0"/>
+              <a:t> </a:t>
+            </a:r>
+            <a:r>
+              <a:rPr lang="ru-RU" sz="1700" dirty="0" smtClean="0"/>
+              <a:t/>
+            </a:r>
+            <a:br>
+              <a:rPr lang="ru-RU" sz="1700" dirty="0" smtClean="0"/>
+            </a:br>
+            <a:r>
+              <a:rPr lang="ru-RU" sz="1700" dirty="0"/>
+              <a:t> </a:t>
+            </a:r>
+            <a:r>
+              <a:rPr lang="ru-RU" sz="1700" dirty="0" smtClean="0"/>
+              <a:t>-</a:t>
+            </a:r>
+            <a:r>
+              <a:rPr lang="ru-RU" sz="1700" dirty="0" smtClean="0"/>
+              <a:t> </a:t>
+            </a:r>
+            <a:r>
+              <a:rPr lang="ru-RU" sz="1700" dirty="0" smtClean="0"/>
+              <a:t>снижение </a:t>
+            </a:r>
+            <a:r>
+              <a:rPr lang="en-US" sz="1700" dirty="0" smtClean="0"/>
+              <a:t>CPC</a:t>
+            </a:r>
+            <a:r>
+              <a:rPr lang="ru-RU" sz="1700" dirty="0" smtClean="0"/>
+              <a:t> на </a:t>
+            </a:r>
+            <a:r>
+              <a:rPr lang="en-US" sz="1700" dirty="0" smtClean="0"/>
+              <a:t>Desktop</a:t>
+            </a:r>
+            <a:r>
+              <a:rPr lang="ru-RU" sz="1700" dirty="0" smtClean="0"/>
+              <a:t> усугубило результат и привело к падению прибыли </a:t>
+            </a:r>
+          </a:p>
+        </p:txBody>
+      </p:sp>
+      <p:sp>
+        <p:nvSpPr>
+          <p:cNvPr id="9" name="Объект 4"/>
+          <p:cNvSpPr txBox="1">
+            <a:spLocks/>
+          </p:cNvSpPr>
+          <p:nvPr/>
+        </p:nvSpPr>
+        <p:spPr>
+          <a:xfrm>
+            <a:off x="9293629" y="2872453"/>
             <a:ext cx="2177935" cy="1242578"/>
           </a:xfrm>
           <a:prstGeom prst="rect">
@@ -3952,9 +4666,133 @@
           </a:p>
         </p:txBody>
       </p:sp>
+      <p:pic>
+        <p:nvPicPr>
+          <p:cNvPr id="3" name="Рисунок 2"/>
+          <p:cNvPicPr>
+            <a:picLocks noChangeAspect="1"/>
+          </p:cNvPicPr>
+          <p:nvPr/>
+        </p:nvPicPr>
+        <p:blipFill>
+          <a:blip r:embed="rId2"/>
+          <a:stretch>
+            <a:fillRect/>
+          </a:stretch>
+        </p:blipFill>
+        <p:spPr>
+          <a:xfrm>
+            <a:off x="838200" y="1526023"/>
+            <a:ext cx="8372301" cy="3935439"/>
+          </a:xfrm>
+          <a:prstGeom prst="rect">
+            <a:avLst/>
+          </a:prstGeom>
+        </p:spPr>
+      </p:pic>
+    </p:spTree>
+    <p:extLst>
+      <p:ext uri="{BB962C8B-B14F-4D97-AF65-F5344CB8AC3E}">
+        <p14:creationId xmlns:p14="http://schemas.microsoft.com/office/powerpoint/2010/main" val="4291162041"/>
+      </p:ext>
+    </p:extLst>
+  </p:cSld>
+  <p:clrMapOvr>
+    <a:masterClrMapping/>
+  </p:clrMapOvr>
+  <p:timing>
+    <p:tnLst>
+      <p:par>
+        <p:cTn id="1" dur="indefinite" restart="never" nodeType="tmRoot"/>
+      </p:par>
+    </p:tnLst>
+  </p:timing>
+</p:sld>
+</file>
+
+<file path=ppt/slides/slide5.xml><?xml version="1.0" encoding="utf-8"?>
+<p:sld xmlns:a="http://schemas.openxmlformats.org/drawingml/2006/main" xmlns:r="http://schemas.openxmlformats.org/officeDocument/2006/relationships" xmlns:p="http://schemas.openxmlformats.org/presentationml/2006/main">
+  <p:cSld>
+    <p:spTree>
+      <p:nvGrpSpPr>
+        <p:cNvPr id="1" name=""/>
+        <p:cNvGrpSpPr/>
+        <p:nvPr/>
+      </p:nvGrpSpPr>
+      <p:grpSpPr>
+        <a:xfrm>
+          <a:off x="0" y="0"/>
+          <a:ext cx="0" cy="0"/>
+          <a:chOff x="0" y="0"/>
+          <a:chExt cx="0" cy="0"/>
+        </a:xfrm>
+      </p:grpSpPr>
       <p:sp>
         <p:nvSpPr>
-          <p:cNvPr id="10" name="Объект 4"/>
+          <p:cNvPr id="2" name="Заголовок 1"/>
+          <p:cNvSpPr>
+            <a:spLocks noGrp="1"/>
+          </p:cNvSpPr>
+          <p:nvPr>
+            <p:ph type="title"/>
+          </p:nvPr>
+        </p:nvSpPr>
+        <p:spPr>
+          <a:xfrm>
+            <a:off x="838200" y="365125"/>
+            <a:ext cx="10515600" cy="1161361"/>
+          </a:xfrm>
+        </p:spPr>
+        <p:txBody>
+          <a:bodyPr>
+            <a:normAutofit/>
+          </a:bodyPr>
+          <a:lstStyle/>
+          <a:p>
+            <a:r>
+              <a:rPr lang="ru-RU" sz="4000" b="1" dirty="0" smtClean="0"/>
+              <a:t>Анализ влияния теста на издательства</a:t>
+            </a:r>
+            <a:endParaRPr lang="ru-RU" sz="4000" b="1" dirty="0"/>
+          </a:p>
+        </p:txBody>
+      </p:sp>
+      <p:sp>
+        <p:nvSpPr>
+          <p:cNvPr id="5" name="Объект 4"/>
+          <p:cNvSpPr>
+            <a:spLocks noGrp="1"/>
+          </p:cNvSpPr>
+          <p:nvPr>
+            <p:ph idx="1"/>
+          </p:nvPr>
+        </p:nvSpPr>
+        <p:spPr>
+          <a:xfrm>
+            <a:off x="989217" y="5461462"/>
+            <a:ext cx="9651074" cy="1304145"/>
+          </a:xfrm>
+        </p:spPr>
+        <p:txBody>
+          <a:bodyPr>
+            <a:normAutofit/>
+          </a:bodyPr>
+          <a:lstStyle/>
+          <a:p>
+            <a:pPr marL="0" indent="0" algn="just">
+              <a:buNone/>
+            </a:pPr>
+            <a:r>
+              <a:rPr lang="ru-RU" sz="1700" dirty="0" smtClean="0"/>
+              <a:t>Все издательства показали па</a:t>
+            </a:r>
+            <a:endParaRPr lang="ru-RU" sz="1700" dirty="0" smtClean="0"/>
+          </a:p>
+        </p:txBody>
+      </p:sp>
+      <p:sp>
+        <p:nvSpPr>
+          <p:cNvPr id="9" name="Объект 4"/>
           <p:cNvSpPr txBox="1">
             <a:spLocks/>
           </p:cNvSpPr>
@@ -3962,8 +4800,8 @@
         </p:nvSpPr>
         <p:spPr>
           <a:xfrm>
-            <a:off x="5418514" y="5561213"/>
-            <a:ext cx="3875116" cy="1204393"/>
+            <a:off x="9410005" y="2063042"/>
+            <a:ext cx="2177935" cy="364910"/>
           </a:xfrm>
           <a:prstGeom prst="rect">
             <a:avLst/>
@@ -3971,7 +4809,7 @@
         </p:spPr>
         <p:txBody>
           <a:bodyPr vert="horz" lIns="91440" tIns="45720" rIns="91440" bIns="45720" rtlCol="0">
-            <a:noAutofit/>
+            <a:normAutofit/>
           </a:bodyPr>
           <a:lstStyle>
             <a:lvl1pPr marL="228600" indent="-228600" algn="l" defTabSz="914400" rtl="0" eaLnBrk="1" latinLnBrk="0" hangingPunct="1">
@@ -4143,95 +4981,2799 @@
               <a:buNone/>
             </a:pPr>
             <a:r>
-              <a:rPr lang="en-US" sz="1600" b="1" dirty="0" smtClean="0"/>
-              <a:t>Mobile</a:t>
-            </a:r>
-          </a:p>
-          <a:p>
-            <a:pPr marL="0" indent="0">
-              <a:buNone/>
-            </a:pPr>
-            <a:r>
-              <a:rPr lang="ru-RU" sz="1600" b="1" dirty="0" smtClean="0">
+              <a:rPr lang="en-US" sz="1800" dirty="0" smtClean="0"/>
+              <a:t>Desktop</a:t>
+            </a:r>
+            <a:endParaRPr lang="ru-RU" sz="1800" dirty="0"/>
+          </a:p>
+        </p:txBody>
+      </p:sp>
+      <p:graphicFrame>
+        <p:nvGraphicFramePr>
+          <p:cNvPr id="4" name="Таблица 3"/>
+          <p:cNvGraphicFramePr>
+            <a:graphicFrameLocks noGrp="1"/>
+          </p:cNvGraphicFramePr>
+          <p:nvPr>
+            <p:extLst>
+              <p:ext uri="{D42A27DB-BD31-4B8C-83A1-F6EECF244321}">
+                <p14:modId xmlns:p14="http://schemas.microsoft.com/office/powerpoint/2010/main" val="4047783762"/>
+              </p:ext>
+            </p:extLst>
+          </p:nvPr>
+        </p:nvGraphicFramePr>
+        <p:xfrm>
+          <a:off x="989215" y="1596103"/>
+          <a:ext cx="8171409" cy="1298788"/>
+        </p:xfrm>
+        <a:graphic>
+          <a:graphicData uri="http://schemas.openxmlformats.org/drawingml/2006/table">
+            <a:tbl>
+              <a:tblPr firstRow="1" bandRow="1">
+                <a:tableStyleId>{8A107856-5554-42FB-B03E-39F5DBC370BA}</a:tableStyleId>
+              </a:tblPr>
+              <a:tblGrid>
+                <a:gridCol w="864523">
+                  <a:extLst>
+                    <a:ext uri="{9D8B030D-6E8A-4147-A177-3AD203B41FA5}">
+                      <a16:colId xmlns:a16="http://schemas.microsoft.com/office/drawing/2014/main" val="3073684535"/>
+                    </a:ext>
+                  </a:extLst>
+                </a:gridCol>
+                <a:gridCol w="914400">
+                  <a:extLst>
+                    <a:ext uri="{9D8B030D-6E8A-4147-A177-3AD203B41FA5}">
+                      <a16:colId xmlns:a16="http://schemas.microsoft.com/office/drawing/2014/main" val="2367231213"/>
+                    </a:ext>
+                  </a:extLst>
+                </a:gridCol>
+                <a:gridCol w="1155469">
+                  <a:extLst>
+                    <a:ext uri="{9D8B030D-6E8A-4147-A177-3AD203B41FA5}">
+                      <a16:colId xmlns:a16="http://schemas.microsoft.com/office/drawing/2014/main" val="157669674"/>
+                    </a:ext>
+                  </a:extLst>
+                </a:gridCol>
+                <a:gridCol w="1072342">
+                  <a:extLst>
+                    <a:ext uri="{9D8B030D-6E8A-4147-A177-3AD203B41FA5}">
+                      <a16:colId xmlns:a16="http://schemas.microsoft.com/office/drawing/2014/main" val="984069144"/>
+                    </a:ext>
+                  </a:extLst>
+                </a:gridCol>
+                <a:gridCol w="756458">
+                  <a:extLst>
+                    <a:ext uri="{9D8B030D-6E8A-4147-A177-3AD203B41FA5}">
+                      <a16:colId xmlns:a16="http://schemas.microsoft.com/office/drawing/2014/main" val="1180036178"/>
+                    </a:ext>
+                  </a:extLst>
+                </a:gridCol>
+                <a:gridCol w="989215">
+                  <a:extLst>
+                    <a:ext uri="{9D8B030D-6E8A-4147-A177-3AD203B41FA5}">
+                      <a16:colId xmlns:a16="http://schemas.microsoft.com/office/drawing/2014/main" val="1029428207"/>
+                    </a:ext>
+                  </a:extLst>
+                </a:gridCol>
+                <a:gridCol w="702470">
+                  <a:extLst>
+                    <a:ext uri="{9D8B030D-6E8A-4147-A177-3AD203B41FA5}">
+                      <a16:colId xmlns:a16="http://schemas.microsoft.com/office/drawing/2014/main" val="1309030349"/>
+                    </a:ext>
+                  </a:extLst>
+                </a:gridCol>
+                <a:gridCol w="858266">
+                  <a:extLst>
+                    <a:ext uri="{9D8B030D-6E8A-4147-A177-3AD203B41FA5}">
+                      <a16:colId xmlns:a16="http://schemas.microsoft.com/office/drawing/2014/main" val="3651040037"/>
+                    </a:ext>
+                  </a:extLst>
+                </a:gridCol>
+                <a:gridCol w="858266">
+                  <a:extLst>
+                    <a:ext uri="{9D8B030D-6E8A-4147-A177-3AD203B41FA5}">
+                      <a16:colId xmlns:a16="http://schemas.microsoft.com/office/drawing/2014/main" val="3677480611"/>
+                    </a:ext>
+                  </a:extLst>
+                </a:gridCol>
+              </a:tblGrid>
+              <a:tr h="336763">
+                <a:tc>
+                  <a:txBody>
+                    <a:bodyPr/>
+                    <a:lstStyle/>
+                    <a:p>
+                      <a:pPr algn="ctr" fontAlgn="ctr"/>
+                      <a:r>
+                        <a:rPr lang="ru-RU" sz="1100" u="none" strike="noStrike" dirty="0" smtClean="0">
+                          <a:effectLst/>
+                        </a:rPr>
+                        <a:t>Издательство</a:t>
+                      </a:r>
+                    </a:p>
+                  </a:txBody>
+                  <a:tcPr marL="9525" marR="9525" marT="9525" marB="0" anchor="ctr"/>
+                </a:tc>
+                <a:tc>
+                  <a:txBody>
+                    <a:bodyPr/>
+                    <a:lstStyle/>
+                    <a:p>
+                      <a:pPr algn="ctr" fontAlgn="ctr"/>
+                      <a:r>
+                        <a:rPr lang="en-US" sz="1100" u="none" strike="noStrike" dirty="0" err="1" smtClean="0">
+                          <a:effectLst/>
+                        </a:rPr>
+                        <a:t>Pageviews</a:t>
+                      </a:r>
+                      <a:r>
+                        <a:rPr lang="ru-RU" sz="1100" u="none" strike="noStrike" dirty="0" smtClean="0">
+                          <a:effectLst/>
+                        </a:rPr>
+                        <a:t>, </a:t>
+                      </a:r>
+                      <a:r>
+                        <a:rPr lang="ru-RU" sz="1100" u="none" strike="noStrike" dirty="0" err="1" smtClean="0">
+                          <a:effectLst/>
+                        </a:rPr>
+                        <a:t>шт</a:t>
+                      </a:r>
+                      <a:endParaRPr lang="en-US" sz="1100" b="1" i="0" u="none" strike="noStrike" dirty="0">
+                        <a:solidFill>
+                          <a:srgbClr val="000000"/>
+                        </a:solidFill>
+                        <a:effectLst/>
+                        <a:latin typeface="Calibri" panose="020F0502020204030204" pitchFamily="34" charset="0"/>
+                      </a:endParaRPr>
+                    </a:p>
+                  </a:txBody>
+                  <a:tcPr marL="9525" marR="9525" marT="9525" marB="0" anchor="ctr"/>
+                </a:tc>
+                <a:tc>
+                  <a:txBody>
+                    <a:bodyPr/>
+                    <a:lstStyle/>
+                    <a:p>
+                      <a:pPr algn="ctr" fontAlgn="ctr"/>
+                      <a:r>
+                        <a:rPr lang="en-US" sz="1100" u="none" strike="noStrike" dirty="0" err="1">
+                          <a:effectLst/>
+                        </a:rPr>
+                        <a:t>visible_pageviews</a:t>
+                      </a:r>
+                      <a:endParaRPr lang="en-US" sz="1100" b="1" i="0" u="none" strike="noStrike" dirty="0">
+                        <a:solidFill>
+                          <a:srgbClr val="000000"/>
+                        </a:solidFill>
+                        <a:effectLst/>
+                        <a:latin typeface="Calibri" panose="020F0502020204030204" pitchFamily="34" charset="0"/>
+                      </a:endParaRPr>
+                    </a:p>
+                  </a:txBody>
+                  <a:tcPr marL="9525" marR="9525" marT="9525" marB="0" anchor="ctr"/>
+                </a:tc>
+                <a:tc>
+                  <a:txBody>
+                    <a:bodyPr/>
+                    <a:lstStyle/>
+                    <a:p>
+                      <a:pPr algn="ctr" fontAlgn="ctr"/>
+                      <a:r>
+                        <a:rPr lang="en-US" sz="1100" u="none" strike="noStrike" dirty="0" err="1">
+                          <a:effectLst/>
+                        </a:rPr>
+                        <a:t>sponsord_clicks</a:t>
+                      </a:r>
+                      <a:endParaRPr lang="en-US" sz="1100" b="1" i="0" u="none" strike="noStrike" dirty="0">
+                        <a:solidFill>
+                          <a:srgbClr val="000000"/>
+                        </a:solidFill>
+                        <a:effectLst/>
+                        <a:latin typeface="Calibri" panose="020F0502020204030204" pitchFamily="34" charset="0"/>
+                      </a:endParaRPr>
+                    </a:p>
+                  </a:txBody>
+                  <a:tcPr marL="9525" marR="9525" marT="9525" marB="0" anchor="ctr"/>
+                </a:tc>
+                <a:tc>
+                  <a:txBody>
+                    <a:bodyPr/>
+                    <a:lstStyle/>
+                    <a:p>
+                      <a:pPr algn="ctr" fontAlgn="ctr"/>
+                      <a:r>
+                        <a:rPr lang="en-US" sz="1100" u="none" strike="noStrike" dirty="0" smtClean="0">
+                          <a:effectLst/>
+                        </a:rPr>
+                        <a:t>Revenue</a:t>
+                      </a:r>
+                      <a:r>
+                        <a:rPr lang="ru-RU" sz="1100" u="none" strike="noStrike" dirty="0" smtClean="0">
+                          <a:effectLst/>
+                        </a:rPr>
+                        <a:t>,</a:t>
+                      </a:r>
+                      <a:r>
+                        <a:rPr lang="en-US" sz="1100" u="none" strike="noStrike" dirty="0" smtClean="0">
+                          <a:effectLst/>
+                        </a:rPr>
+                        <a:t>$</a:t>
+                      </a:r>
+                      <a:endParaRPr lang="en-US" sz="1100" b="1" i="0" u="none" strike="noStrike" dirty="0">
+                        <a:solidFill>
+                          <a:srgbClr val="000000"/>
+                        </a:solidFill>
+                        <a:effectLst/>
+                        <a:latin typeface="Calibri" panose="020F0502020204030204" pitchFamily="34" charset="0"/>
+                      </a:endParaRPr>
+                    </a:p>
+                  </a:txBody>
+                  <a:tcPr marL="9525" marR="9525" marT="9525" marB="0" anchor="ctr"/>
+                </a:tc>
+                <a:tc>
+                  <a:txBody>
+                    <a:bodyPr/>
+                    <a:lstStyle/>
+                    <a:p>
+                      <a:pPr algn="ctr" fontAlgn="ctr"/>
+                      <a:r>
+                        <a:rPr lang="en-US" sz="1100" u="none" strike="noStrike" dirty="0" err="1">
+                          <a:effectLst/>
+                        </a:rPr>
+                        <a:t>organic_clicks</a:t>
+                      </a:r>
+                      <a:endParaRPr lang="en-US" sz="1100" b="1" i="0" u="none" strike="noStrike" dirty="0">
+                        <a:solidFill>
+                          <a:srgbClr val="000000"/>
+                        </a:solidFill>
+                        <a:effectLst/>
+                        <a:latin typeface="Calibri" panose="020F0502020204030204" pitchFamily="34" charset="0"/>
+                      </a:endParaRPr>
+                    </a:p>
+                  </a:txBody>
+                  <a:tcPr marL="9525" marR="9525" marT="9525" marB="0" anchor="ctr"/>
+                </a:tc>
+                <a:tc>
+                  <a:txBody>
+                    <a:bodyPr/>
+                    <a:lstStyle/>
+                    <a:p>
+                      <a:pPr algn="ctr" fontAlgn="ctr"/>
+                      <a:r>
+                        <a:rPr lang="en-US" sz="1100" u="none" strike="noStrike" dirty="0" smtClean="0">
+                          <a:effectLst/>
+                        </a:rPr>
+                        <a:t>RPM, $</a:t>
+                      </a:r>
+                      <a:endParaRPr lang="en-US" sz="1100" b="1" i="0" u="none" strike="noStrike" dirty="0">
+                        <a:solidFill>
+                          <a:srgbClr val="000000"/>
+                        </a:solidFill>
+                        <a:effectLst/>
+                        <a:latin typeface="Calibri" panose="020F0502020204030204" pitchFamily="34" charset="0"/>
+                      </a:endParaRPr>
+                    </a:p>
+                  </a:txBody>
+                  <a:tcPr marL="9525" marR="9525" marT="9525" marB="0" anchor="ctr"/>
+                </a:tc>
+                <a:tc>
+                  <a:txBody>
+                    <a:bodyPr/>
+                    <a:lstStyle/>
+                    <a:p>
+                      <a:pPr algn="ctr" fontAlgn="ctr"/>
+                      <a:r>
+                        <a:rPr lang="en-US" sz="1100" u="none" strike="noStrike" dirty="0" err="1">
+                          <a:effectLst/>
+                        </a:rPr>
+                        <a:t>CTR_paid</a:t>
+                      </a:r>
+                      <a:endParaRPr lang="en-US" sz="1100" b="1" i="0" u="none" strike="noStrike" dirty="0">
+                        <a:solidFill>
+                          <a:srgbClr val="000000"/>
+                        </a:solidFill>
+                        <a:effectLst/>
+                        <a:latin typeface="Calibri" panose="020F0502020204030204" pitchFamily="34" charset="0"/>
+                      </a:endParaRPr>
+                    </a:p>
+                  </a:txBody>
+                  <a:tcPr marL="9525" marR="9525" marT="9525" marB="0" anchor="ctr"/>
+                </a:tc>
+                <a:tc>
+                  <a:txBody>
+                    <a:bodyPr/>
+                    <a:lstStyle/>
+                    <a:p>
+                      <a:pPr algn="ctr" fontAlgn="ctr"/>
+                      <a:r>
+                        <a:rPr lang="en-US" sz="1100" u="none" strike="noStrike" dirty="0" err="1">
+                          <a:effectLst/>
+                        </a:rPr>
+                        <a:t>CTR_organic</a:t>
+                      </a:r>
+                      <a:endParaRPr lang="en-US" sz="1100" b="1" i="0" u="none" strike="noStrike" dirty="0">
+                        <a:solidFill>
+                          <a:srgbClr val="000000"/>
+                        </a:solidFill>
+                        <a:effectLst/>
+                        <a:latin typeface="Calibri" panose="020F0502020204030204" pitchFamily="34" charset="0"/>
+                      </a:endParaRPr>
+                    </a:p>
+                  </a:txBody>
+                  <a:tcPr marL="9525" marR="9525" marT="9525" marB="0" anchor="ctr"/>
+                </a:tc>
+                <a:extLst>
+                  <a:ext uri="{0D108BD9-81ED-4DB2-BD59-A6C34878D82A}">
+                    <a16:rowId xmlns:a16="http://schemas.microsoft.com/office/drawing/2014/main" val="2336196811"/>
+                  </a:ext>
+                </a:extLst>
+              </a:tr>
+              <a:tr h="187917">
+                <a:tc>
+                  <a:txBody>
+                    <a:bodyPr/>
+                    <a:lstStyle/>
+                    <a:p>
+                      <a:pPr algn="ctr" fontAlgn="ctr"/>
+                      <a:r>
+                        <a:rPr lang="ru-RU" sz="1200" b="1" u="none" strike="noStrike" dirty="0">
+                          <a:effectLst/>
+                        </a:rPr>
+                        <a:t>101</a:t>
+                      </a:r>
+                      <a:endParaRPr lang="ru-RU" sz="1200" b="1" i="0" u="none" strike="noStrike" dirty="0">
+                        <a:solidFill>
+                          <a:srgbClr val="000000"/>
+                        </a:solidFill>
+                        <a:effectLst/>
+                        <a:latin typeface="Calibri" panose="020F0502020204030204" pitchFamily="34" charset="0"/>
+                      </a:endParaRPr>
+                    </a:p>
+                  </a:txBody>
+                  <a:tcPr marL="9525" marR="9525" marT="9525" marB="0" anchor="ctr"/>
+                </a:tc>
+                <a:tc>
+                  <a:txBody>
+                    <a:bodyPr/>
+                    <a:lstStyle/>
+                    <a:p>
+                      <a:pPr algn="ctr" fontAlgn="b"/>
+                      <a:r>
+                        <a:rPr lang="ru-RU" sz="1100" b="1" u="none" strike="noStrike" dirty="0">
+                          <a:solidFill>
+                            <a:srgbClr val="FF0000"/>
+                          </a:solidFill>
+                          <a:effectLst/>
+                        </a:rPr>
+                        <a:t>-5018</a:t>
+                      </a:r>
+                      <a:endParaRPr lang="ru-RU" sz="1100" b="1" i="0" u="none" strike="noStrike" dirty="0">
+                        <a:solidFill>
+                          <a:srgbClr val="FF0000"/>
+                        </a:solidFill>
+                        <a:effectLst/>
+                        <a:latin typeface="Calibri" panose="020F0502020204030204" pitchFamily="34" charset="0"/>
+                      </a:endParaRPr>
+                    </a:p>
+                  </a:txBody>
+                  <a:tcPr marL="9525" marR="9525" marT="9525" marB="0" anchor="b"/>
+                </a:tc>
+                <a:tc>
+                  <a:txBody>
+                    <a:bodyPr/>
+                    <a:lstStyle/>
+                    <a:p>
+                      <a:pPr algn="ctr" fontAlgn="b"/>
+                      <a:r>
+                        <a:rPr lang="ru-RU" sz="1100" b="1" u="none" strike="noStrike" dirty="0">
+                          <a:solidFill>
+                            <a:srgbClr val="FF0000"/>
+                          </a:solidFill>
+                          <a:effectLst/>
+                        </a:rPr>
+                        <a:t>-3834</a:t>
+                      </a:r>
+                      <a:endParaRPr lang="ru-RU" sz="1100" b="1" i="0" u="none" strike="noStrike" dirty="0">
+                        <a:solidFill>
+                          <a:srgbClr val="FF0000"/>
+                        </a:solidFill>
+                        <a:effectLst/>
+                        <a:latin typeface="Calibri" panose="020F0502020204030204" pitchFamily="34" charset="0"/>
+                      </a:endParaRPr>
+                    </a:p>
+                  </a:txBody>
+                  <a:tcPr marL="9525" marR="9525" marT="9525" marB="0" anchor="b"/>
+                </a:tc>
+                <a:tc>
+                  <a:txBody>
+                    <a:bodyPr/>
+                    <a:lstStyle/>
+                    <a:p>
+                      <a:pPr algn="ctr" fontAlgn="b"/>
+                      <a:r>
+                        <a:rPr lang="ru-RU" sz="1100" b="1" u="none" strike="noStrike" dirty="0">
+                          <a:solidFill>
+                            <a:srgbClr val="FF0000"/>
+                          </a:solidFill>
+                          <a:effectLst/>
+                        </a:rPr>
+                        <a:t>-198</a:t>
+                      </a:r>
+                      <a:endParaRPr lang="ru-RU" sz="1100" b="1" i="0" u="none" strike="noStrike" dirty="0">
+                        <a:solidFill>
+                          <a:srgbClr val="FF0000"/>
+                        </a:solidFill>
+                        <a:effectLst/>
+                        <a:latin typeface="Calibri" panose="020F0502020204030204" pitchFamily="34" charset="0"/>
+                      </a:endParaRPr>
+                    </a:p>
+                  </a:txBody>
+                  <a:tcPr marL="9525" marR="9525" marT="9525" marB="0" anchor="b"/>
+                </a:tc>
+                <a:tc>
+                  <a:txBody>
+                    <a:bodyPr/>
+                    <a:lstStyle/>
+                    <a:p>
+                      <a:pPr algn="ctr" fontAlgn="b"/>
+                      <a:r>
+                        <a:rPr lang="ru-RU" sz="1100" b="1" u="none" strike="noStrike" dirty="0">
+                          <a:solidFill>
+                            <a:srgbClr val="FF0000"/>
+                          </a:solidFill>
+                          <a:effectLst/>
+                        </a:rPr>
+                        <a:t>-9,1724</a:t>
+                      </a:r>
+                      <a:endParaRPr lang="ru-RU" sz="1100" b="1" i="0" u="none" strike="noStrike" dirty="0">
+                        <a:solidFill>
+                          <a:srgbClr val="FF0000"/>
+                        </a:solidFill>
+                        <a:effectLst/>
+                        <a:latin typeface="Calibri" panose="020F0502020204030204" pitchFamily="34" charset="0"/>
+                      </a:endParaRPr>
+                    </a:p>
+                  </a:txBody>
+                  <a:tcPr marL="9525" marR="9525" marT="9525" marB="0" anchor="b"/>
+                </a:tc>
+                <a:tc>
+                  <a:txBody>
+                    <a:bodyPr/>
+                    <a:lstStyle/>
+                    <a:p>
+                      <a:pPr marL="0" algn="ctr" defTabSz="914400" rtl="0" eaLnBrk="1" fontAlgn="b" latinLnBrk="0" hangingPunct="1"/>
+                      <a:r>
+                        <a:rPr lang="ru-RU" sz="1100" b="1" u="none" strike="noStrike" kern="1200" dirty="0">
+                          <a:solidFill>
+                            <a:srgbClr val="FF0000"/>
+                          </a:solidFill>
+                          <a:effectLst/>
+                          <a:latin typeface="+mn-lt"/>
+                          <a:ea typeface="+mn-ea"/>
+                          <a:cs typeface="+mn-cs"/>
+                        </a:rPr>
+                        <a:t>-2512</a:t>
+                      </a:r>
+                    </a:p>
+                  </a:txBody>
+                  <a:tcPr marL="9525" marR="9525" marT="9525" marB="0" anchor="b"/>
+                </a:tc>
+                <a:tc>
+                  <a:txBody>
+                    <a:bodyPr/>
+                    <a:lstStyle/>
+                    <a:p>
+                      <a:pPr algn="ctr" fontAlgn="b"/>
+                      <a:r>
+                        <a:rPr lang="ru-RU" sz="1100" b="1" u="none" strike="noStrike">
+                          <a:effectLst/>
+                        </a:rPr>
+                        <a:t>0,000429</a:t>
+                      </a:r>
+                      <a:endParaRPr lang="ru-RU" sz="1100" b="1" i="0" u="none" strike="noStrike">
+                        <a:solidFill>
+                          <a:srgbClr val="000000"/>
+                        </a:solidFill>
+                        <a:effectLst/>
+                        <a:latin typeface="Calibri" panose="020F0502020204030204" pitchFamily="34" charset="0"/>
+                      </a:endParaRPr>
+                    </a:p>
+                  </a:txBody>
+                  <a:tcPr marL="9525" marR="9525" marT="9525" marB="0" anchor="b"/>
+                </a:tc>
+                <a:tc>
+                  <a:txBody>
+                    <a:bodyPr/>
+                    <a:lstStyle/>
+                    <a:p>
+                      <a:pPr algn="ctr" fontAlgn="b"/>
+                      <a:r>
+                        <a:rPr lang="ru-RU" sz="1100" b="1" u="none" strike="noStrike">
+                          <a:effectLst/>
+                        </a:rPr>
+                        <a:t>0,03%</a:t>
+                      </a:r>
+                      <a:endParaRPr lang="ru-RU" sz="1100" b="1" i="0" u="none" strike="noStrike">
+                        <a:solidFill>
+                          <a:srgbClr val="000000"/>
+                        </a:solidFill>
+                        <a:effectLst/>
+                        <a:latin typeface="Calibri" panose="020F0502020204030204" pitchFamily="34" charset="0"/>
+                      </a:endParaRPr>
+                    </a:p>
+                  </a:txBody>
+                  <a:tcPr marL="9525" marR="9525" marT="9525" marB="0" anchor="b"/>
+                </a:tc>
+                <a:tc>
+                  <a:txBody>
+                    <a:bodyPr/>
+                    <a:lstStyle/>
+                    <a:p>
+                      <a:pPr marL="0" algn="ctr" defTabSz="914400" rtl="0" eaLnBrk="1" fontAlgn="b" latinLnBrk="0" hangingPunct="1"/>
+                      <a:r>
+                        <a:rPr lang="ru-RU" sz="1100" b="1" u="none" strike="noStrike" kern="1200" dirty="0">
+                          <a:solidFill>
+                            <a:srgbClr val="FF0000"/>
+                          </a:solidFill>
+                          <a:effectLst/>
+                          <a:latin typeface="+mn-lt"/>
+                          <a:ea typeface="+mn-ea"/>
+                          <a:cs typeface="+mn-cs"/>
+                        </a:rPr>
+                        <a:t>-5,60%</a:t>
+                      </a:r>
+                    </a:p>
+                  </a:txBody>
+                  <a:tcPr marL="9525" marR="9525" marT="9525" marB="0" anchor="b"/>
+                </a:tc>
+                <a:extLst>
+                  <a:ext uri="{0D108BD9-81ED-4DB2-BD59-A6C34878D82A}">
+                    <a16:rowId xmlns:a16="http://schemas.microsoft.com/office/drawing/2014/main" val="4195683085"/>
+                  </a:ext>
+                </a:extLst>
+              </a:tr>
+              <a:tr h="187917">
+                <a:tc>
+                  <a:txBody>
+                    <a:bodyPr/>
+                    <a:lstStyle/>
+                    <a:p>
+                      <a:pPr algn="ctr" fontAlgn="ctr"/>
+                      <a:r>
+                        <a:rPr lang="ru-RU" sz="1200" b="1" u="none" strike="noStrike" dirty="0">
+                          <a:effectLst/>
+                        </a:rPr>
+                        <a:t>106</a:t>
+                      </a:r>
+                      <a:endParaRPr lang="ru-RU" sz="1200" b="1" i="0" u="none" strike="noStrike" dirty="0">
+                        <a:solidFill>
+                          <a:srgbClr val="000000"/>
+                        </a:solidFill>
+                        <a:effectLst/>
+                        <a:latin typeface="Calibri" panose="020F0502020204030204" pitchFamily="34" charset="0"/>
+                      </a:endParaRPr>
+                    </a:p>
+                  </a:txBody>
+                  <a:tcPr marL="9525" marR="9525" marT="9525" marB="0" anchor="ctr"/>
+                </a:tc>
+                <a:tc>
+                  <a:txBody>
+                    <a:bodyPr/>
+                    <a:lstStyle/>
+                    <a:p>
+                      <a:pPr algn="ctr" fontAlgn="b"/>
+                      <a:r>
+                        <a:rPr lang="ru-RU" sz="1100" b="1" u="none" strike="noStrike" dirty="0">
+                          <a:solidFill>
+                            <a:srgbClr val="FF0000"/>
+                          </a:solidFill>
+                          <a:effectLst/>
+                        </a:rPr>
+                        <a:t>-9498</a:t>
+                      </a:r>
+                      <a:endParaRPr lang="ru-RU" sz="1100" b="1" i="0" u="none" strike="noStrike" dirty="0">
+                        <a:solidFill>
+                          <a:srgbClr val="FF0000"/>
+                        </a:solidFill>
+                        <a:effectLst/>
+                        <a:latin typeface="Calibri" panose="020F0502020204030204" pitchFamily="34" charset="0"/>
+                      </a:endParaRPr>
+                    </a:p>
+                  </a:txBody>
+                  <a:tcPr marL="9525" marR="9525" marT="9525" marB="0" anchor="b"/>
+                </a:tc>
+                <a:tc>
+                  <a:txBody>
+                    <a:bodyPr/>
+                    <a:lstStyle/>
+                    <a:p>
+                      <a:pPr algn="ctr" fontAlgn="b"/>
+                      <a:r>
+                        <a:rPr lang="ru-RU" sz="1100" b="1" u="none" strike="noStrike" dirty="0">
+                          <a:solidFill>
+                            <a:srgbClr val="FF0000"/>
+                          </a:solidFill>
+                          <a:effectLst/>
+                        </a:rPr>
+                        <a:t>-8590</a:t>
+                      </a:r>
+                      <a:endParaRPr lang="ru-RU" sz="1100" b="1" i="0" u="none" strike="noStrike" dirty="0">
+                        <a:solidFill>
+                          <a:srgbClr val="FF0000"/>
+                        </a:solidFill>
+                        <a:effectLst/>
+                        <a:latin typeface="Calibri" panose="020F0502020204030204" pitchFamily="34" charset="0"/>
+                      </a:endParaRPr>
+                    </a:p>
+                  </a:txBody>
+                  <a:tcPr marL="9525" marR="9525" marT="9525" marB="0" anchor="b"/>
+                </a:tc>
+                <a:tc>
+                  <a:txBody>
+                    <a:bodyPr/>
+                    <a:lstStyle/>
+                    <a:p>
+                      <a:pPr algn="ctr" fontAlgn="b"/>
+                      <a:r>
+                        <a:rPr lang="ru-RU" sz="1100" b="1" u="none" strike="noStrike" dirty="0">
+                          <a:solidFill>
+                            <a:schemeClr val="accent6"/>
+                          </a:solidFill>
+                          <a:effectLst/>
+                        </a:rPr>
+                        <a:t>11</a:t>
+                      </a:r>
+                      <a:endParaRPr lang="ru-RU" sz="1100" b="1" i="0" u="none" strike="noStrike" dirty="0">
+                        <a:solidFill>
+                          <a:schemeClr val="accent6"/>
+                        </a:solidFill>
+                        <a:effectLst/>
+                        <a:latin typeface="Calibri" panose="020F0502020204030204" pitchFamily="34" charset="0"/>
+                      </a:endParaRPr>
+                    </a:p>
+                  </a:txBody>
+                  <a:tcPr marL="9525" marR="9525" marT="9525" marB="0" anchor="b"/>
+                </a:tc>
+                <a:tc>
+                  <a:txBody>
+                    <a:bodyPr/>
+                    <a:lstStyle/>
+                    <a:p>
+                      <a:pPr algn="ctr" fontAlgn="b"/>
+                      <a:r>
+                        <a:rPr lang="ru-RU" sz="1100" b="1" u="none" strike="noStrike" dirty="0">
+                          <a:solidFill>
+                            <a:srgbClr val="FF0000"/>
+                          </a:solidFill>
+                          <a:effectLst/>
+                        </a:rPr>
+                        <a:t>-6,5255</a:t>
+                      </a:r>
+                      <a:endParaRPr lang="ru-RU" sz="1100" b="1" i="0" u="none" strike="noStrike" dirty="0">
+                        <a:solidFill>
+                          <a:srgbClr val="FF0000"/>
+                        </a:solidFill>
+                        <a:effectLst/>
+                        <a:latin typeface="Calibri" panose="020F0502020204030204" pitchFamily="34" charset="0"/>
+                      </a:endParaRPr>
+                    </a:p>
+                  </a:txBody>
+                  <a:tcPr marL="9525" marR="9525" marT="9525" marB="0" anchor="b"/>
+                </a:tc>
+                <a:tc>
+                  <a:txBody>
+                    <a:bodyPr/>
+                    <a:lstStyle/>
+                    <a:p>
+                      <a:pPr marL="0" algn="ctr" defTabSz="914400" rtl="0" eaLnBrk="1" fontAlgn="b" latinLnBrk="0" hangingPunct="1"/>
+                      <a:r>
+                        <a:rPr lang="ru-RU" sz="1100" b="1" u="none" strike="noStrike" kern="1200" dirty="0">
+                          <a:solidFill>
+                            <a:srgbClr val="FF0000"/>
+                          </a:solidFill>
+                          <a:effectLst/>
+                          <a:latin typeface="+mn-lt"/>
+                          <a:ea typeface="+mn-ea"/>
+                          <a:cs typeface="+mn-cs"/>
+                        </a:rPr>
+                        <a:t>-8644</a:t>
+                      </a:r>
+                    </a:p>
+                  </a:txBody>
+                  <a:tcPr marL="9525" marR="9525" marT="9525" marB="0" anchor="b"/>
+                </a:tc>
+                <a:tc>
+                  <a:txBody>
+                    <a:bodyPr/>
+                    <a:lstStyle/>
+                    <a:p>
+                      <a:pPr algn="ctr" fontAlgn="b"/>
+                      <a:r>
+                        <a:rPr lang="ru-RU" sz="1100" b="1" u="none" strike="noStrike" dirty="0">
+                          <a:effectLst/>
+                        </a:rPr>
+                        <a:t>0,000145</a:t>
+                      </a:r>
+                      <a:endParaRPr lang="ru-RU" sz="1100" b="1" i="0" u="none" strike="noStrike" dirty="0">
+                        <a:solidFill>
+                          <a:srgbClr val="000000"/>
+                        </a:solidFill>
+                        <a:effectLst/>
+                        <a:latin typeface="Calibri" panose="020F0502020204030204" pitchFamily="34" charset="0"/>
+                      </a:endParaRPr>
+                    </a:p>
+                  </a:txBody>
+                  <a:tcPr marL="9525" marR="9525" marT="9525" marB="0" anchor="b"/>
+                </a:tc>
+                <a:tc>
+                  <a:txBody>
+                    <a:bodyPr/>
+                    <a:lstStyle/>
+                    <a:p>
+                      <a:pPr algn="ctr" fontAlgn="b"/>
+                      <a:r>
+                        <a:rPr lang="ru-RU" sz="1100" b="1" u="none" strike="noStrike">
+                          <a:effectLst/>
+                        </a:rPr>
+                        <a:t>0,8%</a:t>
+                      </a:r>
+                      <a:endParaRPr lang="ru-RU" sz="1100" b="1" i="0" u="none" strike="noStrike">
+                        <a:solidFill>
+                          <a:srgbClr val="000000"/>
+                        </a:solidFill>
+                        <a:effectLst/>
+                        <a:latin typeface="Calibri" panose="020F0502020204030204" pitchFamily="34" charset="0"/>
+                      </a:endParaRPr>
+                    </a:p>
+                  </a:txBody>
+                  <a:tcPr marL="9525" marR="9525" marT="9525" marB="0" anchor="b"/>
+                </a:tc>
+                <a:tc>
+                  <a:txBody>
+                    <a:bodyPr/>
+                    <a:lstStyle/>
+                    <a:p>
+                      <a:pPr marL="0" algn="ctr" defTabSz="914400" rtl="0" eaLnBrk="1" fontAlgn="b" latinLnBrk="0" hangingPunct="1"/>
+                      <a:r>
+                        <a:rPr lang="ru-RU" sz="1100" b="1" u="none" strike="noStrike" kern="1200" dirty="0">
+                          <a:solidFill>
+                            <a:srgbClr val="FF0000"/>
+                          </a:solidFill>
+                          <a:effectLst/>
+                          <a:latin typeface="+mn-lt"/>
+                          <a:ea typeface="+mn-ea"/>
+                          <a:cs typeface="+mn-cs"/>
+                        </a:rPr>
+                        <a:t>-10,4%</a:t>
+                      </a:r>
+                    </a:p>
+                  </a:txBody>
+                  <a:tcPr marL="9525" marR="9525" marT="9525" marB="0" anchor="b"/>
+                </a:tc>
+                <a:extLst>
+                  <a:ext uri="{0D108BD9-81ED-4DB2-BD59-A6C34878D82A}">
+                    <a16:rowId xmlns:a16="http://schemas.microsoft.com/office/drawing/2014/main" val="2433820929"/>
+                  </a:ext>
+                </a:extLst>
+              </a:tr>
+              <a:tr h="187917">
+                <a:tc>
+                  <a:txBody>
+                    <a:bodyPr/>
+                    <a:lstStyle/>
+                    <a:p>
+                      <a:pPr algn="ctr" fontAlgn="ctr"/>
+                      <a:r>
+                        <a:rPr lang="ru-RU" sz="1200" b="1" u="none" strike="noStrike" dirty="0">
+                          <a:effectLst/>
+                        </a:rPr>
+                        <a:t>111</a:t>
+                      </a:r>
+                      <a:endParaRPr lang="ru-RU" sz="1200" b="1" i="0" u="none" strike="noStrike" dirty="0">
+                        <a:solidFill>
+                          <a:srgbClr val="000000"/>
+                        </a:solidFill>
+                        <a:effectLst/>
+                        <a:latin typeface="Calibri" panose="020F0502020204030204" pitchFamily="34" charset="0"/>
+                      </a:endParaRPr>
+                    </a:p>
+                  </a:txBody>
+                  <a:tcPr marL="9525" marR="9525" marT="9525" marB="0" anchor="ctr"/>
+                </a:tc>
+                <a:tc>
+                  <a:txBody>
+                    <a:bodyPr/>
+                    <a:lstStyle/>
+                    <a:p>
+                      <a:pPr algn="ctr" fontAlgn="b"/>
+                      <a:r>
+                        <a:rPr lang="ru-RU" sz="1100" b="1" u="none" strike="noStrike" dirty="0">
+                          <a:solidFill>
+                            <a:srgbClr val="FF0000"/>
+                          </a:solidFill>
+                          <a:effectLst/>
+                        </a:rPr>
+                        <a:t>-3352</a:t>
+                      </a:r>
+                      <a:endParaRPr lang="ru-RU" sz="1100" b="1" i="0" u="none" strike="noStrike" dirty="0">
+                        <a:solidFill>
+                          <a:srgbClr val="FF0000"/>
+                        </a:solidFill>
+                        <a:effectLst/>
+                        <a:latin typeface="Calibri" panose="020F0502020204030204" pitchFamily="34" charset="0"/>
+                      </a:endParaRPr>
+                    </a:p>
+                  </a:txBody>
+                  <a:tcPr marL="9525" marR="9525" marT="9525" marB="0" anchor="b"/>
+                </a:tc>
+                <a:tc>
+                  <a:txBody>
+                    <a:bodyPr/>
+                    <a:lstStyle/>
+                    <a:p>
+                      <a:pPr algn="ctr" fontAlgn="b"/>
+                      <a:r>
+                        <a:rPr lang="ru-RU" sz="1100" b="1" u="none" strike="noStrike" dirty="0">
+                          <a:solidFill>
+                            <a:srgbClr val="FF0000"/>
+                          </a:solidFill>
+                          <a:effectLst/>
+                        </a:rPr>
+                        <a:t>-3822</a:t>
+                      </a:r>
+                      <a:endParaRPr lang="ru-RU" sz="1100" b="1" i="0" u="none" strike="noStrike" dirty="0">
+                        <a:solidFill>
+                          <a:srgbClr val="FF0000"/>
+                        </a:solidFill>
+                        <a:effectLst/>
+                        <a:latin typeface="Calibri" panose="020F0502020204030204" pitchFamily="34" charset="0"/>
+                      </a:endParaRPr>
+                    </a:p>
+                  </a:txBody>
+                  <a:tcPr marL="9525" marR="9525" marT="9525" marB="0" anchor="b"/>
+                </a:tc>
+                <a:tc>
+                  <a:txBody>
+                    <a:bodyPr/>
+                    <a:lstStyle/>
+                    <a:p>
+                      <a:pPr marL="0" algn="ctr" defTabSz="914400" rtl="0" eaLnBrk="1" fontAlgn="b" latinLnBrk="0" hangingPunct="1"/>
+                      <a:r>
+                        <a:rPr lang="ru-RU" sz="1100" b="1" u="none" strike="noStrike" kern="1200" dirty="0">
+                          <a:solidFill>
+                            <a:srgbClr val="FF0000"/>
+                          </a:solidFill>
+                          <a:effectLst/>
+                          <a:latin typeface="+mn-lt"/>
+                          <a:ea typeface="+mn-ea"/>
+                          <a:cs typeface="+mn-cs"/>
+                        </a:rPr>
+                        <a:t>-87</a:t>
+                      </a:r>
+                    </a:p>
+                  </a:txBody>
+                  <a:tcPr marL="9525" marR="9525" marT="9525" marB="0" anchor="b"/>
+                </a:tc>
+                <a:tc>
+                  <a:txBody>
+                    <a:bodyPr/>
+                    <a:lstStyle/>
+                    <a:p>
+                      <a:pPr algn="ctr" fontAlgn="b"/>
+                      <a:r>
+                        <a:rPr lang="ru-RU" sz="1100" b="1" u="none" strike="noStrike" dirty="0">
+                          <a:solidFill>
+                            <a:srgbClr val="FF0000"/>
+                          </a:solidFill>
+                          <a:effectLst/>
+                        </a:rPr>
+                        <a:t>-13,5589</a:t>
+                      </a:r>
+                      <a:endParaRPr lang="ru-RU" sz="1100" b="1" i="0" u="none" strike="noStrike" dirty="0">
+                        <a:solidFill>
+                          <a:srgbClr val="FF0000"/>
+                        </a:solidFill>
+                        <a:effectLst/>
+                        <a:latin typeface="Calibri" panose="020F0502020204030204" pitchFamily="34" charset="0"/>
+                      </a:endParaRPr>
+                    </a:p>
+                  </a:txBody>
+                  <a:tcPr marL="9525" marR="9525" marT="9525" marB="0" anchor="b"/>
+                </a:tc>
+                <a:tc>
+                  <a:txBody>
+                    <a:bodyPr/>
+                    <a:lstStyle/>
+                    <a:p>
+                      <a:pPr marL="0" algn="ctr" defTabSz="914400" rtl="0" eaLnBrk="1" fontAlgn="b" latinLnBrk="0" hangingPunct="1"/>
+                      <a:r>
+                        <a:rPr lang="ru-RU" sz="1100" b="1" u="none" strike="noStrike" kern="1200" dirty="0">
+                          <a:solidFill>
+                            <a:srgbClr val="FF0000"/>
+                          </a:solidFill>
+                          <a:effectLst/>
+                          <a:latin typeface="+mn-lt"/>
+                          <a:ea typeface="+mn-ea"/>
+                          <a:cs typeface="+mn-cs"/>
+                        </a:rPr>
+                        <a:t>-3318</a:t>
+                      </a:r>
+                    </a:p>
+                  </a:txBody>
+                  <a:tcPr marL="9525" marR="9525" marT="9525" marB="0" anchor="b"/>
+                </a:tc>
+                <a:tc>
+                  <a:txBody>
+                    <a:bodyPr/>
+                    <a:lstStyle/>
+                    <a:p>
+                      <a:pPr algn="ctr" fontAlgn="b"/>
+                      <a:r>
+                        <a:rPr lang="ru-RU" sz="1100" b="1" u="none" strike="noStrike" dirty="0">
+                          <a:effectLst/>
+                        </a:rPr>
+                        <a:t>0,001213</a:t>
+                      </a:r>
+                      <a:endParaRPr lang="ru-RU" sz="1100" b="1" i="0" u="none" strike="noStrike" dirty="0">
+                        <a:solidFill>
+                          <a:srgbClr val="000000"/>
+                        </a:solidFill>
+                        <a:effectLst/>
+                        <a:latin typeface="Calibri" panose="020F0502020204030204" pitchFamily="34" charset="0"/>
+                      </a:endParaRPr>
+                    </a:p>
+                  </a:txBody>
+                  <a:tcPr marL="9525" marR="9525" marT="9525" marB="0" anchor="b"/>
+                </a:tc>
+                <a:tc>
+                  <a:txBody>
+                    <a:bodyPr/>
+                    <a:lstStyle/>
+                    <a:p>
+                      <a:pPr algn="ctr" fontAlgn="b"/>
+                      <a:r>
+                        <a:rPr lang="ru-RU" sz="1100" b="1" u="none" strike="noStrike" dirty="0">
+                          <a:effectLst/>
+                        </a:rPr>
+                        <a:t>0,5%</a:t>
+                      </a:r>
+                      <a:endParaRPr lang="ru-RU" sz="1100" b="1" i="0" u="none" strike="noStrike" dirty="0">
+                        <a:solidFill>
+                          <a:srgbClr val="000000"/>
+                        </a:solidFill>
+                        <a:effectLst/>
+                        <a:latin typeface="Calibri" panose="020F0502020204030204" pitchFamily="34" charset="0"/>
+                      </a:endParaRPr>
+                    </a:p>
+                  </a:txBody>
+                  <a:tcPr marL="9525" marR="9525" marT="9525" marB="0" anchor="b"/>
+                </a:tc>
+                <a:tc>
+                  <a:txBody>
+                    <a:bodyPr/>
+                    <a:lstStyle/>
+                    <a:p>
+                      <a:pPr marL="0" algn="ctr" defTabSz="914400" rtl="0" eaLnBrk="1" fontAlgn="b" latinLnBrk="0" hangingPunct="1"/>
+                      <a:r>
+                        <a:rPr lang="ru-RU" sz="1100" b="1" u="none" strike="noStrike" kern="1200" dirty="0">
+                          <a:solidFill>
+                            <a:srgbClr val="FF0000"/>
+                          </a:solidFill>
+                          <a:effectLst/>
+                          <a:latin typeface="+mn-lt"/>
+                          <a:ea typeface="+mn-ea"/>
+                          <a:cs typeface="+mn-cs"/>
+                        </a:rPr>
+                        <a:t>-8,4%</a:t>
+                      </a:r>
+                    </a:p>
+                  </a:txBody>
+                  <a:tcPr marL="9525" marR="9525" marT="9525" marB="0" anchor="b"/>
+                </a:tc>
+                <a:extLst>
+                  <a:ext uri="{0D108BD9-81ED-4DB2-BD59-A6C34878D82A}">
+                    <a16:rowId xmlns:a16="http://schemas.microsoft.com/office/drawing/2014/main" val="4124081051"/>
+                  </a:ext>
+                </a:extLst>
+              </a:tr>
+              <a:tr h="187917">
+                <a:tc>
+                  <a:txBody>
+                    <a:bodyPr/>
+                    <a:lstStyle/>
+                    <a:p>
+                      <a:pPr algn="ctr" fontAlgn="ctr"/>
+                      <a:r>
+                        <a:rPr lang="ru-RU" sz="1200" b="1" u="none" strike="noStrike" dirty="0">
+                          <a:effectLst/>
+                        </a:rPr>
+                        <a:t>123</a:t>
+                      </a:r>
+                      <a:endParaRPr lang="ru-RU" sz="1200" b="1" i="0" u="none" strike="noStrike" dirty="0">
+                        <a:solidFill>
+                          <a:srgbClr val="000000"/>
+                        </a:solidFill>
+                        <a:effectLst/>
+                        <a:latin typeface="Calibri" panose="020F0502020204030204" pitchFamily="34" charset="0"/>
+                      </a:endParaRPr>
+                    </a:p>
+                  </a:txBody>
+                  <a:tcPr marL="9525" marR="9525" marT="9525" marB="0" anchor="ctr"/>
+                </a:tc>
+                <a:tc>
+                  <a:txBody>
+                    <a:bodyPr/>
+                    <a:lstStyle/>
+                    <a:p>
+                      <a:pPr algn="ctr" fontAlgn="b"/>
+                      <a:r>
+                        <a:rPr lang="ru-RU" sz="1100" b="1" u="none" strike="noStrike" dirty="0">
+                          <a:solidFill>
+                            <a:srgbClr val="FF0000"/>
+                          </a:solidFill>
+                          <a:effectLst/>
+                        </a:rPr>
+                        <a:t>-2642</a:t>
+                      </a:r>
+                      <a:endParaRPr lang="ru-RU" sz="1100" b="1" i="0" u="none" strike="noStrike" dirty="0">
+                        <a:solidFill>
+                          <a:srgbClr val="FF0000"/>
+                        </a:solidFill>
+                        <a:effectLst/>
+                        <a:latin typeface="Calibri" panose="020F0502020204030204" pitchFamily="34" charset="0"/>
+                      </a:endParaRPr>
+                    </a:p>
+                  </a:txBody>
+                  <a:tcPr marL="9525" marR="9525" marT="9525" marB="0" anchor="b"/>
+                </a:tc>
+                <a:tc>
+                  <a:txBody>
+                    <a:bodyPr/>
+                    <a:lstStyle/>
+                    <a:p>
+                      <a:pPr algn="ctr" fontAlgn="b"/>
+                      <a:r>
+                        <a:rPr lang="ru-RU" sz="1100" b="1" u="none" strike="noStrike" dirty="0">
+                          <a:solidFill>
+                            <a:srgbClr val="FF0000"/>
+                          </a:solidFill>
+                          <a:effectLst/>
+                        </a:rPr>
+                        <a:t>-1554</a:t>
+                      </a:r>
+                      <a:endParaRPr lang="ru-RU" sz="1100" b="1" i="0" u="none" strike="noStrike" dirty="0">
+                        <a:solidFill>
+                          <a:srgbClr val="FF0000"/>
+                        </a:solidFill>
+                        <a:effectLst/>
+                        <a:latin typeface="Calibri" panose="020F0502020204030204" pitchFamily="34" charset="0"/>
+                      </a:endParaRPr>
+                    </a:p>
+                  </a:txBody>
+                  <a:tcPr marL="9525" marR="9525" marT="9525" marB="0" anchor="b"/>
+                </a:tc>
+                <a:tc>
+                  <a:txBody>
+                    <a:bodyPr/>
+                    <a:lstStyle/>
+                    <a:p>
+                      <a:pPr algn="ctr" fontAlgn="b"/>
+                      <a:r>
+                        <a:rPr lang="ru-RU" sz="1100" b="1" u="none" strike="noStrike" dirty="0">
+                          <a:solidFill>
+                            <a:schemeClr val="accent6"/>
+                          </a:solidFill>
+                          <a:effectLst/>
+                        </a:rPr>
+                        <a:t>156</a:t>
+                      </a:r>
+                      <a:endParaRPr lang="ru-RU" sz="1100" b="1" i="0" u="none" strike="noStrike" dirty="0">
+                        <a:solidFill>
+                          <a:schemeClr val="accent6"/>
+                        </a:solidFill>
+                        <a:effectLst/>
+                        <a:latin typeface="Calibri" panose="020F0502020204030204" pitchFamily="34" charset="0"/>
+                      </a:endParaRPr>
+                    </a:p>
+                  </a:txBody>
+                  <a:tcPr marL="9525" marR="9525" marT="9525" marB="0" anchor="b"/>
+                </a:tc>
+                <a:tc>
+                  <a:txBody>
+                    <a:bodyPr/>
+                    <a:lstStyle/>
+                    <a:p>
+                      <a:pPr algn="ctr" fontAlgn="b"/>
+                      <a:r>
+                        <a:rPr lang="ru-RU" sz="1100" b="1" u="none" strike="noStrike" dirty="0">
+                          <a:solidFill>
+                            <a:schemeClr val="accent6"/>
+                          </a:solidFill>
+                          <a:effectLst/>
+                        </a:rPr>
+                        <a:t>4,4852</a:t>
+                      </a:r>
+                      <a:endParaRPr lang="ru-RU" sz="1100" b="1" i="0" u="none" strike="noStrike" dirty="0">
+                        <a:solidFill>
+                          <a:schemeClr val="accent6"/>
+                        </a:solidFill>
+                        <a:effectLst/>
+                        <a:latin typeface="Calibri" panose="020F0502020204030204" pitchFamily="34" charset="0"/>
+                      </a:endParaRPr>
+                    </a:p>
+                  </a:txBody>
+                  <a:tcPr marL="9525" marR="9525" marT="9525" marB="0" anchor="b"/>
+                </a:tc>
+                <a:tc>
+                  <a:txBody>
+                    <a:bodyPr/>
+                    <a:lstStyle/>
+                    <a:p>
+                      <a:pPr marL="0" algn="ctr" defTabSz="914400" rtl="0" eaLnBrk="1" fontAlgn="b" latinLnBrk="0" hangingPunct="1"/>
+                      <a:r>
+                        <a:rPr lang="ru-RU" sz="1100" b="1" u="none" strike="noStrike" kern="1200" dirty="0">
+                          <a:solidFill>
+                            <a:srgbClr val="FF0000"/>
+                          </a:solidFill>
+                          <a:effectLst/>
+                          <a:latin typeface="+mn-lt"/>
+                          <a:ea typeface="+mn-ea"/>
+                          <a:cs typeface="+mn-cs"/>
+                        </a:rPr>
+                        <a:t>-2197</a:t>
+                      </a:r>
+                    </a:p>
+                  </a:txBody>
+                  <a:tcPr marL="9525" marR="9525" marT="9525" marB="0" anchor="b"/>
+                </a:tc>
+                <a:tc>
+                  <a:txBody>
+                    <a:bodyPr/>
+                    <a:lstStyle/>
+                    <a:p>
+                      <a:pPr algn="ctr" fontAlgn="b"/>
+                      <a:r>
+                        <a:rPr lang="ru-RU" sz="1100" b="1" u="none" strike="noStrike" dirty="0">
+                          <a:effectLst/>
+                        </a:rPr>
+                        <a:t>0,000404</a:t>
+                      </a:r>
+                      <a:endParaRPr lang="ru-RU" sz="1100" b="1" i="0" u="none" strike="noStrike" dirty="0">
+                        <a:solidFill>
+                          <a:srgbClr val="000000"/>
+                        </a:solidFill>
+                        <a:effectLst/>
+                        <a:latin typeface="Calibri" panose="020F0502020204030204" pitchFamily="34" charset="0"/>
+                      </a:endParaRPr>
+                    </a:p>
+                  </a:txBody>
+                  <a:tcPr marL="9525" marR="9525" marT="9525" marB="0" anchor="b"/>
+                </a:tc>
+                <a:tc>
+                  <a:txBody>
+                    <a:bodyPr/>
+                    <a:lstStyle/>
+                    <a:p>
+                      <a:pPr algn="ctr" fontAlgn="b"/>
+                      <a:r>
+                        <a:rPr lang="ru-RU" sz="1100" b="1" u="none" strike="noStrike" dirty="0">
+                          <a:effectLst/>
+                        </a:rPr>
+                        <a:t>1,2%</a:t>
+                      </a:r>
+                      <a:endParaRPr lang="ru-RU" sz="1100" b="1" i="0" u="none" strike="noStrike" dirty="0">
+                        <a:solidFill>
+                          <a:srgbClr val="000000"/>
+                        </a:solidFill>
+                        <a:effectLst/>
+                        <a:latin typeface="Calibri" panose="020F0502020204030204" pitchFamily="34" charset="0"/>
+                      </a:endParaRPr>
+                    </a:p>
+                  </a:txBody>
+                  <a:tcPr marL="9525" marR="9525" marT="9525" marB="0" anchor="b"/>
+                </a:tc>
+                <a:tc>
+                  <a:txBody>
+                    <a:bodyPr/>
+                    <a:lstStyle/>
+                    <a:p>
+                      <a:pPr marL="0" algn="ctr" defTabSz="914400" rtl="0" eaLnBrk="1" fontAlgn="b" latinLnBrk="0" hangingPunct="1"/>
+                      <a:r>
+                        <a:rPr lang="ru-RU" sz="1100" b="1" u="none" strike="noStrike" kern="1200" dirty="0">
+                          <a:solidFill>
+                            <a:srgbClr val="FF0000"/>
+                          </a:solidFill>
+                          <a:effectLst/>
+                          <a:latin typeface="+mn-lt"/>
+                          <a:ea typeface="+mn-ea"/>
+                          <a:cs typeface="+mn-cs"/>
+                        </a:rPr>
+                        <a:t>-8,4%</a:t>
+                      </a:r>
+                    </a:p>
+                  </a:txBody>
+                  <a:tcPr marL="9525" marR="9525" marT="9525" marB="0" anchor="b"/>
+                </a:tc>
+                <a:extLst>
+                  <a:ext uri="{0D108BD9-81ED-4DB2-BD59-A6C34878D82A}">
+                    <a16:rowId xmlns:a16="http://schemas.microsoft.com/office/drawing/2014/main" val="1173856114"/>
+                  </a:ext>
+                </a:extLst>
+              </a:tr>
+              <a:tr h="187917">
+                <a:tc>
+                  <a:txBody>
+                    <a:bodyPr/>
+                    <a:lstStyle/>
+                    <a:p>
+                      <a:pPr algn="ctr" fontAlgn="ctr"/>
+                      <a:r>
+                        <a:rPr lang="ru-RU" sz="1200" b="1" u="none" strike="noStrike" dirty="0">
+                          <a:effectLst/>
+                        </a:rPr>
+                        <a:t>373</a:t>
+                      </a:r>
+                      <a:endParaRPr lang="ru-RU" sz="1200" b="1" i="0" u="none" strike="noStrike" dirty="0">
+                        <a:solidFill>
+                          <a:srgbClr val="000000"/>
+                        </a:solidFill>
+                        <a:effectLst/>
+                        <a:latin typeface="Calibri" panose="020F0502020204030204" pitchFamily="34" charset="0"/>
+                      </a:endParaRPr>
+                    </a:p>
+                  </a:txBody>
+                  <a:tcPr marL="9525" marR="9525" marT="9525" marB="0" anchor="ctr"/>
+                </a:tc>
+                <a:tc>
+                  <a:txBody>
+                    <a:bodyPr/>
+                    <a:lstStyle/>
+                    <a:p>
+                      <a:pPr algn="ctr" fontAlgn="b"/>
+                      <a:r>
+                        <a:rPr lang="ru-RU" sz="1100" b="1" u="none" strike="noStrike" dirty="0">
+                          <a:solidFill>
+                            <a:srgbClr val="FF0000"/>
+                          </a:solidFill>
+                          <a:effectLst/>
+                        </a:rPr>
+                        <a:t>-6834</a:t>
+                      </a:r>
+                      <a:endParaRPr lang="ru-RU" sz="1100" b="1" i="0" u="none" strike="noStrike" dirty="0">
+                        <a:solidFill>
+                          <a:srgbClr val="FF0000"/>
+                        </a:solidFill>
+                        <a:effectLst/>
+                        <a:latin typeface="Calibri" panose="020F0502020204030204" pitchFamily="34" charset="0"/>
+                      </a:endParaRPr>
+                    </a:p>
+                  </a:txBody>
+                  <a:tcPr marL="9525" marR="9525" marT="9525" marB="0" anchor="b"/>
+                </a:tc>
+                <a:tc>
+                  <a:txBody>
+                    <a:bodyPr/>
+                    <a:lstStyle/>
+                    <a:p>
+                      <a:pPr algn="ctr" fontAlgn="b"/>
+                      <a:r>
+                        <a:rPr lang="ru-RU" sz="1100" b="1" u="none" strike="noStrike" dirty="0">
+                          <a:solidFill>
+                            <a:srgbClr val="FF0000"/>
+                          </a:solidFill>
+                          <a:effectLst/>
+                        </a:rPr>
+                        <a:t>-14137</a:t>
+                      </a:r>
+                      <a:endParaRPr lang="ru-RU" sz="1100" b="1" i="0" u="none" strike="noStrike" dirty="0">
+                        <a:solidFill>
+                          <a:srgbClr val="FF0000"/>
+                        </a:solidFill>
+                        <a:effectLst/>
+                        <a:latin typeface="Calibri" panose="020F0502020204030204" pitchFamily="34" charset="0"/>
+                      </a:endParaRPr>
+                    </a:p>
+                  </a:txBody>
+                  <a:tcPr marL="9525" marR="9525" marT="9525" marB="0" anchor="b"/>
+                </a:tc>
+                <a:tc>
+                  <a:txBody>
+                    <a:bodyPr/>
+                    <a:lstStyle/>
+                    <a:p>
+                      <a:pPr algn="ctr" fontAlgn="b"/>
+                      <a:r>
+                        <a:rPr lang="ru-RU" sz="1100" b="1" u="none" strike="noStrike" dirty="0">
+                          <a:solidFill>
+                            <a:schemeClr val="accent6"/>
+                          </a:solidFill>
+                          <a:effectLst/>
+                        </a:rPr>
+                        <a:t>41</a:t>
+                      </a:r>
+                      <a:endParaRPr lang="ru-RU" sz="1100" b="1" i="0" u="none" strike="noStrike" dirty="0">
+                        <a:solidFill>
+                          <a:schemeClr val="accent6"/>
+                        </a:solidFill>
+                        <a:effectLst/>
+                        <a:latin typeface="Calibri" panose="020F0502020204030204" pitchFamily="34" charset="0"/>
+                      </a:endParaRPr>
+                    </a:p>
+                  </a:txBody>
+                  <a:tcPr marL="9525" marR="9525" marT="9525" marB="0" anchor="b"/>
+                </a:tc>
+                <a:tc>
+                  <a:txBody>
+                    <a:bodyPr/>
+                    <a:lstStyle/>
+                    <a:p>
+                      <a:pPr algn="ctr" fontAlgn="b"/>
+                      <a:r>
+                        <a:rPr lang="ru-RU" sz="1100" b="1" u="none" strike="noStrike" dirty="0">
+                          <a:solidFill>
+                            <a:srgbClr val="FF0000"/>
+                          </a:solidFill>
+                          <a:effectLst/>
+                        </a:rPr>
+                        <a:t>-2,4767</a:t>
+                      </a:r>
+                      <a:endParaRPr lang="ru-RU" sz="1100" b="1" i="0" u="none" strike="noStrike" dirty="0">
+                        <a:solidFill>
+                          <a:srgbClr val="FF0000"/>
+                        </a:solidFill>
+                        <a:effectLst/>
+                        <a:latin typeface="Calibri" panose="020F0502020204030204" pitchFamily="34" charset="0"/>
+                      </a:endParaRPr>
+                    </a:p>
+                  </a:txBody>
+                  <a:tcPr marL="9525" marR="9525" marT="9525" marB="0" anchor="b"/>
+                </a:tc>
+                <a:tc>
+                  <a:txBody>
+                    <a:bodyPr/>
+                    <a:lstStyle/>
+                    <a:p>
+                      <a:pPr marL="0" algn="ctr" defTabSz="914400" rtl="0" eaLnBrk="1" fontAlgn="b" latinLnBrk="0" hangingPunct="1"/>
+                      <a:r>
+                        <a:rPr lang="ru-RU" sz="1100" b="1" u="none" strike="noStrike" kern="1200" dirty="0">
+                          <a:solidFill>
+                            <a:srgbClr val="FF0000"/>
+                          </a:solidFill>
+                          <a:effectLst/>
+                          <a:latin typeface="+mn-lt"/>
+                          <a:ea typeface="+mn-ea"/>
+                          <a:cs typeface="+mn-cs"/>
+                        </a:rPr>
+                        <a:t>-6691</a:t>
+                      </a:r>
+                    </a:p>
+                  </a:txBody>
+                  <a:tcPr marL="9525" marR="9525" marT="9525" marB="0" anchor="b"/>
+                </a:tc>
+                <a:tc>
+                  <a:txBody>
+                    <a:bodyPr/>
+                    <a:lstStyle/>
+                    <a:p>
+                      <a:pPr algn="ctr" fontAlgn="b"/>
+                      <a:r>
+                        <a:rPr lang="ru-RU" sz="1100" b="1" u="none" strike="noStrike" dirty="0">
+                          <a:effectLst/>
+                        </a:rPr>
+                        <a:t>0,000768</a:t>
+                      </a:r>
+                      <a:endParaRPr lang="ru-RU" sz="1100" b="1" i="0" u="none" strike="noStrike" dirty="0">
+                        <a:solidFill>
+                          <a:srgbClr val="000000"/>
+                        </a:solidFill>
+                        <a:effectLst/>
+                        <a:latin typeface="Calibri" panose="020F0502020204030204" pitchFamily="34" charset="0"/>
+                      </a:endParaRPr>
+                    </a:p>
+                  </a:txBody>
+                  <a:tcPr marL="9525" marR="9525" marT="9525" marB="0" anchor="b"/>
+                </a:tc>
+                <a:tc>
+                  <a:txBody>
+                    <a:bodyPr/>
+                    <a:lstStyle/>
+                    <a:p>
+                      <a:pPr algn="ctr" fontAlgn="b"/>
+                      <a:r>
+                        <a:rPr lang="ru-RU" sz="1100" b="1" u="none" strike="noStrike" dirty="0">
+                          <a:effectLst/>
+                        </a:rPr>
+                        <a:t>1,0%</a:t>
+                      </a:r>
+                      <a:endParaRPr lang="ru-RU" sz="1100" b="1" i="0" u="none" strike="noStrike" dirty="0">
+                        <a:solidFill>
+                          <a:srgbClr val="000000"/>
+                        </a:solidFill>
+                        <a:effectLst/>
+                        <a:latin typeface="Calibri" panose="020F0502020204030204" pitchFamily="34" charset="0"/>
+                      </a:endParaRPr>
+                    </a:p>
+                  </a:txBody>
+                  <a:tcPr marL="9525" marR="9525" marT="9525" marB="0" anchor="b"/>
+                </a:tc>
+                <a:tc>
+                  <a:txBody>
+                    <a:bodyPr/>
+                    <a:lstStyle/>
+                    <a:p>
+                      <a:pPr marL="0" algn="ctr" defTabSz="914400" rtl="0" eaLnBrk="1" fontAlgn="b" latinLnBrk="0" hangingPunct="1"/>
+                      <a:r>
+                        <a:rPr lang="ru-RU" sz="1100" b="1" u="none" strike="noStrike" kern="1200" dirty="0">
+                          <a:solidFill>
+                            <a:srgbClr val="FF0000"/>
+                          </a:solidFill>
+                          <a:effectLst/>
+                          <a:latin typeface="+mn-lt"/>
+                          <a:ea typeface="+mn-ea"/>
+                          <a:cs typeface="+mn-cs"/>
+                        </a:rPr>
+                        <a:t>-9,7%</a:t>
+                      </a:r>
+                    </a:p>
+                  </a:txBody>
+                  <a:tcPr marL="9525" marR="9525" marT="9525" marB="0" anchor="b"/>
+                </a:tc>
+                <a:extLst>
+                  <a:ext uri="{0D108BD9-81ED-4DB2-BD59-A6C34878D82A}">
+                    <a16:rowId xmlns:a16="http://schemas.microsoft.com/office/drawing/2014/main" val="405860313"/>
+                  </a:ext>
+                </a:extLst>
+              </a:tr>
+            </a:tbl>
+          </a:graphicData>
+        </a:graphic>
+      </p:graphicFrame>
+      <p:graphicFrame>
+        <p:nvGraphicFramePr>
+          <p:cNvPr id="10" name="Таблица 9"/>
+          <p:cNvGraphicFramePr>
+            <a:graphicFrameLocks noGrp="1"/>
+          </p:cNvGraphicFramePr>
+          <p:nvPr>
+            <p:extLst>
+              <p:ext uri="{D42A27DB-BD31-4B8C-83A1-F6EECF244321}">
+                <p14:modId xmlns:p14="http://schemas.microsoft.com/office/powerpoint/2010/main" val="2598013358"/>
+              </p:ext>
+            </p:extLst>
+          </p:nvPr>
+        </p:nvGraphicFramePr>
+        <p:xfrm>
+          <a:off x="989215" y="3528782"/>
+          <a:ext cx="8171409" cy="1106383"/>
+        </p:xfrm>
+        <a:graphic>
+          <a:graphicData uri="http://schemas.openxmlformats.org/drawingml/2006/table">
+            <a:tbl>
+              <a:tblPr firstRow="1" bandRow="1">
+                <a:tableStyleId>{8A107856-5554-42FB-B03E-39F5DBC370BA}</a:tableStyleId>
+              </a:tblPr>
+              <a:tblGrid>
+                <a:gridCol w="864523">
+                  <a:extLst>
+                    <a:ext uri="{9D8B030D-6E8A-4147-A177-3AD203B41FA5}">
+                      <a16:colId xmlns:a16="http://schemas.microsoft.com/office/drawing/2014/main" val="3073684535"/>
+                    </a:ext>
+                  </a:extLst>
+                </a:gridCol>
+                <a:gridCol w="914400">
+                  <a:extLst>
+                    <a:ext uri="{9D8B030D-6E8A-4147-A177-3AD203B41FA5}">
+                      <a16:colId xmlns:a16="http://schemas.microsoft.com/office/drawing/2014/main" val="2367231213"/>
+                    </a:ext>
+                  </a:extLst>
+                </a:gridCol>
+                <a:gridCol w="1155469">
+                  <a:extLst>
+                    <a:ext uri="{9D8B030D-6E8A-4147-A177-3AD203B41FA5}">
+                      <a16:colId xmlns:a16="http://schemas.microsoft.com/office/drawing/2014/main" val="157669674"/>
+                    </a:ext>
+                  </a:extLst>
+                </a:gridCol>
+                <a:gridCol w="1072342">
+                  <a:extLst>
+                    <a:ext uri="{9D8B030D-6E8A-4147-A177-3AD203B41FA5}">
+                      <a16:colId xmlns:a16="http://schemas.microsoft.com/office/drawing/2014/main" val="984069144"/>
+                    </a:ext>
+                  </a:extLst>
+                </a:gridCol>
+                <a:gridCol w="756458">
+                  <a:extLst>
+                    <a:ext uri="{9D8B030D-6E8A-4147-A177-3AD203B41FA5}">
+                      <a16:colId xmlns:a16="http://schemas.microsoft.com/office/drawing/2014/main" val="1180036178"/>
+                    </a:ext>
+                  </a:extLst>
+                </a:gridCol>
+                <a:gridCol w="989215">
+                  <a:extLst>
+                    <a:ext uri="{9D8B030D-6E8A-4147-A177-3AD203B41FA5}">
+                      <a16:colId xmlns:a16="http://schemas.microsoft.com/office/drawing/2014/main" val="1029428207"/>
+                    </a:ext>
+                  </a:extLst>
+                </a:gridCol>
+                <a:gridCol w="702470">
+                  <a:extLst>
+                    <a:ext uri="{9D8B030D-6E8A-4147-A177-3AD203B41FA5}">
+                      <a16:colId xmlns:a16="http://schemas.microsoft.com/office/drawing/2014/main" val="1309030349"/>
+                    </a:ext>
+                  </a:extLst>
+                </a:gridCol>
+                <a:gridCol w="858266">
+                  <a:extLst>
+                    <a:ext uri="{9D8B030D-6E8A-4147-A177-3AD203B41FA5}">
+                      <a16:colId xmlns:a16="http://schemas.microsoft.com/office/drawing/2014/main" val="3651040037"/>
+                    </a:ext>
+                  </a:extLst>
+                </a:gridCol>
+                <a:gridCol w="858266">
+                  <a:extLst>
+                    <a:ext uri="{9D8B030D-6E8A-4147-A177-3AD203B41FA5}">
+                      <a16:colId xmlns:a16="http://schemas.microsoft.com/office/drawing/2014/main" val="3677480611"/>
+                    </a:ext>
+                  </a:extLst>
+                </a:gridCol>
+              </a:tblGrid>
+              <a:tr h="336763">
+                <a:tc>
+                  <a:txBody>
+                    <a:bodyPr/>
+                    <a:lstStyle/>
+                    <a:p>
+                      <a:pPr algn="ctr" fontAlgn="ctr"/>
+                      <a:r>
+                        <a:rPr lang="ru-RU" sz="1100" u="none" strike="noStrike" dirty="0" smtClean="0">
+                          <a:effectLst/>
+                        </a:rPr>
+                        <a:t>Издательство</a:t>
+                      </a:r>
+                    </a:p>
+                  </a:txBody>
+                  <a:tcPr marL="9525" marR="9525" marT="9525" marB="0" anchor="ctr"/>
+                </a:tc>
+                <a:tc>
+                  <a:txBody>
+                    <a:bodyPr/>
+                    <a:lstStyle/>
+                    <a:p>
+                      <a:pPr algn="ctr" fontAlgn="ctr"/>
+                      <a:r>
+                        <a:rPr lang="en-US" sz="1100" u="none" strike="noStrike" dirty="0" err="1" smtClean="0">
+                          <a:effectLst/>
+                        </a:rPr>
+                        <a:t>Pageviews</a:t>
+                      </a:r>
+                      <a:r>
+                        <a:rPr lang="ru-RU" sz="1100" u="none" strike="noStrike" dirty="0" smtClean="0">
+                          <a:effectLst/>
+                        </a:rPr>
+                        <a:t>, </a:t>
+                      </a:r>
+                      <a:r>
+                        <a:rPr lang="ru-RU" sz="1100" u="none" strike="noStrike" dirty="0" err="1" smtClean="0">
+                          <a:effectLst/>
+                        </a:rPr>
+                        <a:t>шт</a:t>
+                      </a:r>
+                      <a:endParaRPr lang="en-US" sz="1100" b="1" i="0" u="none" strike="noStrike" dirty="0">
+                        <a:solidFill>
+                          <a:srgbClr val="000000"/>
+                        </a:solidFill>
+                        <a:effectLst/>
+                        <a:latin typeface="Calibri" panose="020F0502020204030204" pitchFamily="34" charset="0"/>
+                      </a:endParaRPr>
+                    </a:p>
+                  </a:txBody>
+                  <a:tcPr marL="9525" marR="9525" marT="9525" marB="0" anchor="ctr"/>
+                </a:tc>
+                <a:tc>
+                  <a:txBody>
+                    <a:bodyPr/>
+                    <a:lstStyle/>
+                    <a:p>
+                      <a:pPr algn="ctr" fontAlgn="ctr"/>
+                      <a:r>
+                        <a:rPr lang="en-US" sz="1100" u="none" strike="noStrike" dirty="0" err="1">
+                          <a:effectLst/>
+                        </a:rPr>
+                        <a:t>visible_pageviews</a:t>
+                      </a:r>
+                      <a:endParaRPr lang="en-US" sz="1100" b="1" i="0" u="none" strike="noStrike" dirty="0">
+                        <a:solidFill>
+                          <a:srgbClr val="000000"/>
+                        </a:solidFill>
+                        <a:effectLst/>
+                        <a:latin typeface="Calibri" panose="020F0502020204030204" pitchFamily="34" charset="0"/>
+                      </a:endParaRPr>
+                    </a:p>
+                  </a:txBody>
+                  <a:tcPr marL="9525" marR="9525" marT="9525" marB="0" anchor="ctr"/>
+                </a:tc>
+                <a:tc>
+                  <a:txBody>
+                    <a:bodyPr/>
+                    <a:lstStyle/>
+                    <a:p>
+                      <a:pPr algn="ctr" fontAlgn="ctr"/>
+                      <a:r>
+                        <a:rPr lang="en-US" sz="1100" u="none" strike="noStrike" dirty="0" err="1">
+                          <a:effectLst/>
+                        </a:rPr>
+                        <a:t>sponsord_clicks</a:t>
+                      </a:r>
+                      <a:endParaRPr lang="en-US" sz="1100" b="1" i="0" u="none" strike="noStrike" dirty="0">
+                        <a:solidFill>
+                          <a:srgbClr val="000000"/>
+                        </a:solidFill>
+                        <a:effectLst/>
+                        <a:latin typeface="Calibri" panose="020F0502020204030204" pitchFamily="34" charset="0"/>
+                      </a:endParaRPr>
+                    </a:p>
+                  </a:txBody>
+                  <a:tcPr marL="9525" marR="9525" marT="9525" marB="0" anchor="ctr"/>
+                </a:tc>
+                <a:tc>
+                  <a:txBody>
+                    <a:bodyPr/>
+                    <a:lstStyle/>
+                    <a:p>
+                      <a:pPr algn="ctr" fontAlgn="ctr"/>
+                      <a:r>
+                        <a:rPr lang="en-US" sz="1100" u="none" strike="noStrike" dirty="0" smtClean="0">
+                          <a:effectLst/>
+                        </a:rPr>
+                        <a:t>Revenue</a:t>
+                      </a:r>
+                      <a:r>
+                        <a:rPr lang="ru-RU" sz="1100" u="none" strike="noStrike" dirty="0" smtClean="0">
+                          <a:effectLst/>
+                        </a:rPr>
+                        <a:t>,</a:t>
+                      </a:r>
+                      <a:r>
+                        <a:rPr lang="en-US" sz="1100" u="none" strike="noStrike" dirty="0" smtClean="0">
+                          <a:effectLst/>
+                        </a:rPr>
+                        <a:t>$</a:t>
+                      </a:r>
+                      <a:endParaRPr lang="en-US" sz="1100" b="1" i="0" u="none" strike="noStrike" dirty="0">
+                        <a:solidFill>
+                          <a:srgbClr val="000000"/>
+                        </a:solidFill>
+                        <a:effectLst/>
+                        <a:latin typeface="Calibri" panose="020F0502020204030204" pitchFamily="34" charset="0"/>
+                      </a:endParaRPr>
+                    </a:p>
+                  </a:txBody>
+                  <a:tcPr marL="9525" marR="9525" marT="9525" marB="0" anchor="ctr"/>
+                </a:tc>
+                <a:tc>
+                  <a:txBody>
+                    <a:bodyPr/>
+                    <a:lstStyle/>
+                    <a:p>
+                      <a:pPr algn="ctr" fontAlgn="ctr"/>
+                      <a:r>
+                        <a:rPr lang="en-US" sz="1100" u="none" strike="noStrike" dirty="0" err="1">
+                          <a:effectLst/>
+                        </a:rPr>
+                        <a:t>organic_clicks</a:t>
+                      </a:r>
+                      <a:endParaRPr lang="en-US" sz="1100" b="1" i="0" u="none" strike="noStrike" dirty="0">
+                        <a:solidFill>
+                          <a:srgbClr val="000000"/>
+                        </a:solidFill>
+                        <a:effectLst/>
+                        <a:latin typeface="Calibri" panose="020F0502020204030204" pitchFamily="34" charset="0"/>
+                      </a:endParaRPr>
+                    </a:p>
+                  </a:txBody>
+                  <a:tcPr marL="9525" marR="9525" marT="9525" marB="0" anchor="ctr"/>
+                </a:tc>
+                <a:tc>
+                  <a:txBody>
+                    <a:bodyPr/>
+                    <a:lstStyle/>
+                    <a:p>
+                      <a:pPr algn="ctr" fontAlgn="ctr"/>
+                      <a:r>
+                        <a:rPr lang="en-US" sz="1100" u="none" strike="noStrike" dirty="0" smtClean="0">
+                          <a:effectLst/>
+                        </a:rPr>
+                        <a:t>RPM, $</a:t>
+                      </a:r>
+                      <a:endParaRPr lang="en-US" sz="1100" b="1" i="0" u="none" strike="noStrike" dirty="0">
+                        <a:solidFill>
+                          <a:srgbClr val="000000"/>
+                        </a:solidFill>
+                        <a:effectLst/>
+                        <a:latin typeface="Calibri" panose="020F0502020204030204" pitchFamily="34" charset="0"/>
+                      </a:endParaRPr>
+                    </a:p>
+                  </a:txBody>
+                  <a:tcPr marL="9525" marR="9525" marT="9525" marB="0" anchor="ctr"/>
+                </a:tc>
+                <a:tc>
+                  <a:txBody>
+                    <a:bodyPr/>
+                    <a:lstStyle/>
+                    <a:p>
+                      <a:pPr algn="ctr" fontAlgn="ctr"/>
+                      <a:r>
+                        <a:rPr lang="en-US" sz="1100" u="none" strike="noStrike" dirty="0" err="1">
+                          <a:effectLst/>
+                        </a:rPr>
+                        <a:t>CTR_paid</a:t>
+                      </a:r>
+                      <a:endParaRPr lang="en-US" sz="1100" b="1" i="0" u="none" strike="noStrike" dirty="0">
+                        <a:solidFill>
+                          <a:srgbClr val="000000"/>
+                        </a:solidFill>
+                        <a:effectLst/>
+                        <a:latin typeface="Calibri" panose="020F0502020204030204" pitchFamily="34" charset="0"/>
+                      </a:endParaRPr>
+                    </a:p>
+                  </a:txBody>
+                  <a:tcPr marL="9525" marR="9525" marT="9525" marB="0" anchor="ctr"/>
+                </a:tc>
+                <a:tc>
+                  <a:txBody>
+                    <a:bodyPr/>
+                    <a:lstStyle/>
+                    <a:p>
+                      <a:pPr algn="ctr" fontAlgn="ctr"/>
+                      <a:r>
+                        <a:rPr lang="en-US" sz="1100" u="none" strike="noStrike" dirty="0" err="1">
+                          <a:effectLst/>
+                        </a:rPr>
+                        <a:t>CTR_organic</a:t>
+                      </a:r>
+                      <a:endParaRPr lang="en-US" sz="1100" b="1" i="0" u="none" strike="noStrike" dirty="0">
+                        <a:solidFill>
+                          <a:srgbClr val="000000"/>
+                        </a:solidFill>
+                        <a:effectLst/>
+                        <a:latin typeface="Calibri" panose="020F0502020204030204" pitchFamily="34" charset="0"/>
+                      </a:endParaRPr>
+                    </a:p>
+                  </a:txBody>
+                  <a:tcPr marL="9525" marR="9525" marT="9525" marB="0" anchor="ctr"/>
+                </a:tc>
+                <a:extLst>
+                  <a:ext uri="{0D108BD9-81ED-4DB2-BD59-A6C34878D82A}">
+                    <a16:rowId xmlns:a16="http://schemas.microsoft.com/office/drawing/2014/main" val="2336196811"/>
+                  </a:ext>
+                </a:extLst>
+              </a:tr>
+              <a:tr h="187917">
+                <a:tc>
+                  <a:txBody>
+                    <a:bodyPr/>
+                    <a:lstStyle/>
+                    <a:p>
+                      <a:pPr algn="ctr" fontAlgn="ctr"/>
+                      <a:r>
+                        <a:rPr lang="ru-RU" sz="1200" b="1" u="none" strike="noStrike" kern="1200" dirty="0">
+                          <a:solidFill>
+                            <a:schemeClr val="dk1"/>
+                          </a:solidFill>
+                          <a:effectLst/>
+                          <a:latin typeface="+mn-lt"/>
+                          <a:ea typeface="+mn-ea"/>
+                          <a:cs typeface="+mn-cs"/>
+                        </a:rPr>
+                        <a:t>106</a:t>
+                      </a:r>
+                    </a:p>
+                  </a:txBody>
+                  <a:tcPr marL="9525" marR="9525" marT="9525" marB="0" anchor="ctr"/>
+                </a:tc>
+                <a:tc>
+                  <a:txBody>
+                    <a:bodyPr/>
+                    <a:lstStyle/>
+                    <a:p>
+                      <a:pPr algn="ctr" fontAlgn="b"/>
+                      <a:r>
+                        <a:rPr lang="ru-RU" sz="1200" b="1" u="none" strike="noStrike" kern="1200" dirty="0">
+                          <a:solidFill>
+                            <a:srgbClr val="FF0000"/>
+                          </a:solidFill>
+                          <a:effectLst/>
+                          <a:latin typeface="+mn-lt"/>
+                          <a:ea typeface="+mn-ea"/>
+                          <a:cs typeface="+mn-cs"/>
+                        </a:rPr>
+                        <a:t>-6921</a:t>
+                      </a:r>
+                    </a:p>
+                  </a:txBody>
+                  <a:tcPr marL="9525" marR="9525" marT="9525" marB="0" anchor="b"/>
+                </a:tc>
+                <a:tc>
+                  <a:txBody>
+                    <a:bodyPr/>
+                    <a:lstStyle/>
+                    <a:p>
+                      <a:pPr algn="ctr" fontAlgn="b"/>
+                      <a:r>
+                        <a:rPr lang="ru-RU" sz="1200" b="1" u="none" strike="noStrike" kern="1200">
+                          <a:solidFill>
+                            <a:srgbClr val="FF0000"/>
+                          </a:solidFill>
+                          <a:effectLst/>
+                          <a:latin typeface="+mn-lt"/>
+                          <a:ea typeface="+mn-ea"/>
+                          <a:cs typeface="+mn-cs"/>
+                        </a:rPr>
+                        <a:t>-5010</a:t>
+                      </a:r>
+                    </a:p>
+                  </a:txBody>
+                  <a:tcPr marL="9525" marR="9525" marT="9525" marB="0" anchor="b"/>
+                </a:tc>
+                <a:tc>
+                  <a:txBody>
+                    <a:bodyPr/>
+                    <a:lstStyle/>
+                    <a:p>
+                      <a:pPr algn="ctr" fontAlgn="b"/>
+                      <a:r>
+                        <a:rPr lang="ru-RU" sz="1200" b="1" u="none" strike="noStrike" kern="1200" dirty="0">
+                          <a:solidFill>
+                            <a:schemeClr val="accent6"/>
+                          </a:solidFill>
+                          <a:effectLst/>
+                          <a:latin typeface="+mn-lt"/>
+                          <a:ea typeface="+mn-ea"/>
+                          <a:cs typeface="+mn-cs"/>
+                        </a:rPr>
+                        <a:t>455</a:t>
+                      </a:r>
+                    </a:p>
+                  </a:txBody>
+                  <a:tcPr marL="9525" marR="9525" marT="9525" marB="0" anchor="b"/>
+                </a:tc>
+                <a:tc>
+                  <a:txBody>
+                    <a:bodyPr/>
+                    <a:lstStyle/>
+                    <a:p>
+                      <a:pPr algn="ctr" fontAlgn="b"/>
+                      <a:r>
+                        <a:rPr lang="ru-RU" sz="1200" b="1" u="none" strike="noStrike" kern="1200" dirty="0">
+                          <a:solidFill>
+                            <a:schemeClr val="accent6"/>
+                          </a:solidFill>
+                          <a:effectLst/>
+                          <a:latin typeface="+mn-lt"/>
+                          <a:ea typeface="+mn-ea"/>
+                          <a:cs typeface="+mn-cs"/>
+                        </a:rPr>
+                        <a:t>43,9411</a:t>
+                      </a:r>
+                    </a:p>
+                  </a:txBody>
+                  <a:tcPr marL="9525" marR="9525" marT="9525" marB="0" anchor="b"/>
+                </a:tc>
+                <a:tc>
+                  <a:txBody>
+                    <a:bodyPr/>
+                    <a:lstStyle/>
+                    <a:p>
+                      <a:pPr algn="ctr" fontAlgn="b"/>
+                      <a:r>
+                        <a:rPr lang="ru-RU" sz="1200" b="1" u="none" strike="noStrike" kern="1200" dirty="0">
+                          <a:solidFill>
+                            <a:srgbClr val="FF0000"/>
+                          </a:solidFill>
+                          <a:effectLst/>
+                          <a:latin typeface="+mn-lt"/>
+                          <a:ea typeface="+mn-ea"/>
+                          <a:cs typeface="+mn-cs"/>
+                        </a:rPr>
+                        <a:t>-6765</a:t>
+                      </a:r>
+                    </a:p>
+                  </a:txBody>
+                  <a:tcPr marL="9525" marR="9525" marT="9525" marB="0" anchor="b"/>
+                </a:tc>
+                <a:tc>
+                  <a:txBody>
+                    <a:bodyPr/>
+                    <a:lstStyle/>
+                    <a:p>
+                      <a:pPr algn="ctr" fontAlgn="b"/>
+                      <a:r>
+                        <a:rPr lang="ru-RU" sz="1200" b="1" u="none" strike="noStrike" kern="1200">
+                          <a:solidFill>
+                            <a:schemeClr val="dk1"/>
+                          </a:solidFill>
+                          <a:effectLst/>
+                          <a:latin typeface="+mn-lt"/>
+                          <a:ea typeface="+mn-ea"/>
+                          <a:cs typeface="+mn-cs"/>
+                        </a:rPr>
+                        <a:t>0,002073</a:t>
+                      </a:r>
+                    </a:p>
+                  </a:txBody>
+                  <a:tcPr marL="9525" marR="9525" marT="9525" marB="0" anchor="b"/>
+                </a:tc>
+                <a:tc>
+                  <a:txBody>
+                    <a:bodyPr/>
+                    <a:lstStyle/>
+                    <a:p>
+                      <a:pPr algn="ctr" fontAlgn="b"/>
+                      <a:r>
+                        <a:rPr lang="ru-RU" sz="1200" b="1" u="none" strike="noStrike" kern="1200">
+                          <a:solidFill>
+                            <a:schemeClr val="dk1"/>
+                          </a:solidFill>
+                          <a:effectLst/>
+                          <a:latin typeface="+mn-lt"/>
+                          <a:ea typeface="+mn-ea"/>
+                          <a:cs typeface="+mn-cs"/>
+                        </a:rPr>
+                        <a:t>1,61%</a:t>
+                      </a:r>
+                    </a:p>
+                  </a:txBody>
+                  <a:tcPr marL="9525" marR="9525" marT="9525" marB="0" anchor="b"/>
+                </a:tc>
+                <a:tc>
+                  <a:txBody>
+                    <a:bodyPr/>
+                    <a:lstStyle/>
+                    <a:p>
+                      <a:pPr algn="ctr" fontAlgn="b"/>
+                      <a:r>
+                        <a:rPr lang="ru-RU" sz="1200" b="1" u="none" strike="noStrike" kern="1200" dirty="0">
+                          <a:solidFill>
+                            <a:srgbClr val="FF0000"/>
+                          </a:solidFill>
+                          <a:effectLst/>
+                          <a:latin typeface="+mn-lt"/>
+                          <a:ea typeface="+mn-ea"/>
+                          <a:cs typeface="+mn-cs"/>
+                        </a:rPr>
+                        <a:t>-11,72%</a:t>
+                      </a:r>
+                    </a:p>
+                  </a:txBody>
+                  <a:tcPr marL="9525" marR="9525" marT="9525" marB="0" anchor="b"/>
+                </a:tc>
+                <a:extLst>
+                  <a:ext uri="{0D108BD9-81ED-4DB2-BD59-A6C34878D82A}">
+                    <a16:rowId xmlns:a16="http://schemas.microsoft.com/office/drawing/2014/main" val="4195683085"/>
+                  </a:ext>
+                </a:extLst>
+              </a:tr>
+              <a:tr h="187917">
+                <a:tc>
+                  <a:txBody>
+                    <a:bodyPr/>
+                    <a:lstStyle/>
+                    <a:p>
+                      <a:pPr algn="ctr" fontAlgn="ctr"/>
+                      <a:r>
+                        <a:rPr lang="ru-RU" sz="1200" b="1" u="none" strike="noStrike" kern="1200" dirty="0">
+                          <a:solidFill>
+                            <a:schemeClr val="dk1"/>
+                          </a:solidFill>
+                          <a:effectLst/>
+                          <a:latin typeface="+mn-lt"/>
+                          <a:ea typeface="+mn-ea"/>
+                          <a:cs typeface="+mn-cs"/>
+                        </a:rPr>
+                        <a:t>259</a:t>
+                      </a:r>
+                    </a:p>
+                  </a:txBody>
+                  <a:tcPr marL="9525" marR="9525" marT="9525" marB="0" anchor="ctr"/>
+                </a:tc>
+                <a:tc>
+                  <a:txBody>
+                    <a:bodyPr/>
+                    <a:lstStyle/>
+                    <a:p>
+                      <a:pPr algn="ctr" fontAlgn="b"/>
+                      <a:r>
+                        <a:rPr lang="ru-RU" sz="1200" b="1" u="none" strike="noStrike" kern="1200" dirty="0">
+                          <a:solidFill>
+                            <a:srgbClr val="FF0000"/>
+                          </a:solidFill>
+                          <a:effectLst/>
+                          <a:latin typeface="+mn-lt"/>
+                          <a:ea typeface="+mn-ea"/>
+                          <a:cs typeface="+mn-cs"/>
+                        </a:rPr>
+                        <a:t>-6833</a:t>
+                      </a:r>
+                    </a:p>
+                  </a:txBody>
+                  <a:tcPr marL="9525" marR="9525" marT="9525" marB="0" anchor="b"/>
+                </a:tc>
+                <a:tc>
+                  <a:txBody>
+                    <a:bodyPr/>
+                    <a:lstStyle/>
+                    <a:p>
+                      <a:pPr algn="ctr" fontAlgn="b"/>
+                      <a:r>
+                        <a:rPr lang="ru-RU" sz="1200" b="1" u="none" strike="noStrike" kern="1200" dirty="0">
+                          <a:solidFill>
+                            <a:srgbClr val="FF0000"/>
+                          </a:solidFill>
+                          <a:effectLst/>
+                          <a:latin typeface="+mn-lt"/>
+                          <a:ea typeface="+mn-ea"/>
+                          <a:cs typeface="+mn-cs"/>
+                        </a:rPr>
+                        <a:t>-13446</a:t>
+                      </a:r>
+                    </a:p>
+                  </a:txBody>
+                  <a:tcPr marL="9525" marR="9525" marT="9525" marB="0" anchor="b"/>
+                </a:tc>
+                <a:tc>
+                  <a:txBody>
+                    <a:bodyPr/>
+                    <a:lstStyle/>
+                    <a:p>
+                      <a:pPr algn="ctr" fontAlgn="b"/>
+                      <a:r>
+                        <a:rPr lang="ru-RU" sz="1200" b="1" u="none" strike="noStrike" kern="1200" dirty="0">
+                          <a:solidFill>
+                            <a:schemeClr val="accent6"/>
+                          </a:solidFill>
+                          <a:effectLst/>
+                          <a:latin typeface="+mn-lt"/>
+                          <a:ea typeface="+mn-ea"/>
+                          <a:cs typeface="+mn-cs"/>
+                        </a:rPr>
+                        <a:t>373</a:t>
+                      </a:r>
+                    </a:p>
+                  </a:txBody>
+                  <a:tcPr marL="9525" marR="9525" marT="9525" marB="0" anchor="b"/>
+                </a:tc>
+                <a:tc>
+                  <a:txBody>
+                    <a:bodyPr/>
+                    <a:lstStyle/>
+                    <a:p>
+                      <a:pPr algn="ctr" fontAlgn="b"/>
+                      <a:r>
+                        <a:rPr lang="ru-RU" sz="1200" b="1" u="none" strike="noStrike" kern="1200" dirty="0">
+                          <a:solidFill>
+                            <a:schemeClr val="accent6"/>
+                          </a:solidFill>
+                          <a:effectLst/>
+                          <a:latin typeface="+mn-lt"/>
+                          <a:ea typeface="+mn-ea"/>
+                          <a:cs typeface="+mn-cs"/>
+                        </a:rPr>
+                        <a:t>7,5351</a:t>
+                      </a:r>
+                    </a:p>
+                  </a:txBody>
+                  <a:tcPr marL="9525" marR="9525" marT="9525" marB="0" anchor="b"/>
+                </a:tc>
+                <a:tc>
+                  <a:txBody>
+                    <a:bodyPr/>
+                    <a:lstStyle/>
+                    <a:p>
+                      <a:pPr algn="ctr" fontAlgn="b"/>
+                      <a:r>
+                        <a:rPr lang="ru-RU" sz="1200" b="1" u="none" strike="noStrike" kern="1200">
+                          <a:solidFill>
+                            <a:srgbClr val="FF0000"/>
+                          </a:solidFill>
+                          <a:effectLst/>
+                          <a:latin typeface="+mn-lt"/>
+                          <a:ea typeface="+mn-ea"/>
+                          <a:cs typeface="+mn-cs"/>
+                        </a:rPr>
+                        <a:t>-9791</a:t>
+                      </a:r>
+                    </a:p>
+                  </a:txBody>
+                  <a:tcPr marL="9525" marR="9525" marT="9525" marB="0" anchor="b"/>
+                </a:tc>
+                <a:tc>
+                  <a:txBody>
+                    <a:bodyPr/>
+                    <a:lstStyle/>
+                    <a:p>
+                      <a:pPr algn="ctr" fontAlgn="b"/>
+                      <a:r>
+                        <a:rPr lang="ru-RU" sz="1200" b="1" u="none" strike="noStrike" kern="1200">
+                          <a:solidFill>
+                            <a:schemeClr val="dk1"/>
+                          </a:solidFill>
+                          <a:effectLst/>
+                          <a:latin typeface="+mn-lt"/>
+                          <a:ea typeface="+mn-ea"/>
+                          <a:cs typeface="+mn-cs"/>
+                        </a:rPr>
+                        <a:t>0,000243</a:t>
+                      </a:r>
+                    </a:p>
+                  </a:txBody>
+                  <a:tcPr marL="9525" marR="9525" marT="9525" marB="0" anchor="b"/>
+                </a:tc>
+                <a:tc>
+                  <a:txBody>
+                    <a:bodyPr/>
+                    <a:lstStyle/>
+                    <a:p>
+                      <a:pPr algn="ctr" fontAlgn="b"/>
+                      <a:r>
+                        <a:rPr lang="ru-RU" sz="1200" b="1" u="none" strike="noStrike" kern="1200">
+                          <a:solidFill>
+                            <a:schemeClr val="dk1"/>
+                          </a:solidFill>
+                          <a:effectLst/>
+                          <a:latin typeface="+mn-lt"/>
+                          <a:ea typeface="+mn-ea"/>
+                          <a:cs typeface="+mn-cs"/>
+                        </a:rPr>
+                        <a:t>0,9%</a:t>
+                      </a:r>
+                    </a:p>
+                  </a:txBody>
+                  <a:tcPr marL="9525" marR="9525" marT="9525" marB="0" anchor="b"/>
+                </a:tc>
+                <a:tc>
+                  <a:txBody>
+                    <a:bodyPr/>
+                    <a:lstStyle/>
+                    <a:p>
+                      <a:pPr algn="ctr" fontAlgn="b"/>
+                      <a:r>
+                        <a:rPr lang="ru-RU" sz="1200" b="1" u="none" strike="noStrike" kern="1200" dirty="0">
+                          <a:solidFill>
+                            <a:srgbClr val="FF0000"/>
+                          </a:solidFill>
+                          <a:effectLst/>
+                          <a:latin typeface="+mn-lt"/>
+                          <a:ea typeface="+mn-ea"/>
+                          <a:cs typeface="+mn-cs"/>
+                        </a:rPr>
+                        <a:t>-9,6%</a:t>
+                      </a:r>
+                    </a:p>
+                  </a:txBody>
+                  <a:tcPr marL="9525" marR="9525" marT="9525" marB="0" anchor="b"/>
+                </a:tc>
+                <a:extLst>
+                  <a:ext uri="{0D108BD9-81ED-4DB2-BD59-A6C34878D82A}">
+                    <a16:rowId xmlns:a16="http://schemas.microsoft.com/office/drawing/2014/main" val="2433820929"/>
+                  </a:ext>
+                </a:extLst>
+              </a:tr>
+              <a:tr h="187917">
+                <a:tc>
+                  <a:txBody>
+                    <a:bodyPr/>
+                    <a:lstStyle/>
+                    <a:p>
+                      <a:pPr algn="ctr" fontAlgn="ctr"/>
+                      <a:r>
+                        <a:rPr lang="ru-RU" sz="1200" b="1" u="none" strike="noStrike" kern="1200" dirty="0">
+                          <a:solidFill>
+                            <a:schemeClr val="dk1"/>
+                          </a:solidFill>
+                          <a:effectLst/>
+                          <a:latin typeface="+mn-lt"/>
+                          <a:ea typeface="+mn-ea"/>
+                          <a:cs typeface="+mn-cs"/>
+                        </a:rPr>
+                        <a:t>574</a:t>
+                      </a:r>
+                    </a:p>
+                  </a:txBody>
+                  <a:tcPr marL="9525" marR="9525" marT="9525" marB="0" anchor="ctr"/>
+                </a:tc>
+                <a:tc>
+                  <a:txBody>
+                    <a:bodyPr/>
+                    <a:lstStyle/>
+                    <a:p>
+                      <a:pPr algn="ctr" fontAlgn="b"/>
+                      <a:r>
+                        <a:rPr lang="ru-RU" sz="1200" b="1" u="none" strike="noStrike" kern="1200" dirty="0">
+                          <a:solidFill>
+                            <a:srgbClr val="FF0000"/>
+                          </a:solidFill>
+                          <a:effectLst/>
+                          <a:latin typeface="+mn-lt"/>
+                          <a:ea typeface="+mn-ea"/>
+                          <a:cs typeface="+mn-cs"/>
+                        </a:rPr>
+                        <a:t>-12177</a:t>
+                      </a:r>
+                    </a:p>
+                  </a:txBody>
+                  <a:tcPr marL="9525" marR="9525" marT="9525" marB="0" anchor="b"/>
+                </a:tc>
+                <a:tc>
+                  <a:txBody>
+                    <a:bodyPr/>
+                    <a:lstStyle/>
+                    <a:p>
+                      <a:pPr algn="ctr" fontAlgn="b"/>
+                      <a:r>
+                        <a:rPr lang="ru-RU" sz="1200" b="1" u="none" strike="noStrike" kern="1200" dirty="0">
+                          <a:solidFill>
+                            <a:srgbClr val="FF0000"/>
+                          </a:solidFill>
+                          <a:effectLst/>
+                          <a:latin typeface="+mn-lt"/>
+                          <a:ea typeface="+mn-ea"/>
+                          <a:cs typeface="+mn-cs"/>
+                        </a:rPr>
+                        <a:t>-8020</a:t>
+                      </a:r>
+                    </a:p>
+                  </a:txBody>
+                  <a:tcPr marL="9525" marR="9525" marT="9525" marB="0" anchor="b"/>
+                </a:tc>
+                <a:tc>
+                  <a:txBody>
+                    <a:bodyPr/>
+                    <a:lstStyle/>
+                    <a:p>
+                      <a:pPr algn="ctr" fontAlgn="b"/>
+                      <a:r>
+                        <a:rPr lang="ru-RU" sz="1200" b="1" u="none" strike="noStrike" kern="1200" dirty="0">
+                          <a:solidFill>
+                            <a:schemeClr val="accent6"/>
+                          </a:solidFill>
+                          <a:effectLst/>
+                          <a:latin typeface="+mn-lt"/>
+                          <a:ea typeface="+mn-ea"/>
+                          <a:cs typeface="+mn-cs"/>
+                        </a:rPr>
+                        <a:t>445</a:t>
+                      </a:r>
+                    </a:p>
+                  </a:txBody>
+                  <a:tcPr marL="9525" marR="9525" marT="9525" marB="0" anchor="b"/>
+                </a:tc>
+                <a:tc>
+                  <a:txBody>
+                    <a:bodyPr/>
+                    <a:lstStyle/>
+                    <a:p>
+                      <a:pPr algn="ctr" fontAlgn="b"/>
+                      <a:r>
+                        <a:rPr lang="ru-RU" sz="1200" b="1" u="none" strike="noStrike" kern="1200" dirty="0">
+                          <a:solidFill>
+                            <a:schemeClr val="accent6"/>
+                          </a:solidFill>
+                          <a:effectLst/>
+                          <a:latin typeface="+mn-lt"/>
+                          <a:ea typeface="+mn-ea"/>
+                          <a:cs typeface="+mn-cs"/>
+                        </a:rPr>
+                        <a:t>17,2834</a:t>
+                      </a:r>
+                    </a:p>
+                  </a:txBody>
+                  <a:tcPr marL="9525" marR="9525" marT="9525" marB="0" anchor="b"/>
+                </a:tc>
+                <a:tc>
+                  <a:txBody>
+                    <a:bodyPr/>
+                    <a:lstStyle/>
+                    <a:p>
+                      <a:pPr algn="ctr" fontAlgn="b"/>
+                      <a:r>
+                        <a:rPr lang="ru-RU" sz="1200" b="1" u="none" strike="noStrike" kern="1200" dirty="0">
+                          <a:solidFill>
+                            <a:srgbClr val="FF0000"/>
+                          </a:solidFill>
+                          <a:effectLst/>
+                          <a:latin typeface="+mn-lt"/>
+                          <a:ea typeface="+mn-ea"/>
+                          <a:cs typeface="+mn-cs"/>
+                        </a:rPr>
+                        <a:t>-7644</a:t>
+                      </a:r>
+                    </a:p>
+                  </a:txBody>
+                  <a:tcPr marL="9525" marR="9525" marT="9525" marB="0" anchor="b"/>
+                </a:tc>
+                <a:tc>
+                  <a:txBody>
+                    <a:bodyPr/>
+                    <a:lstStyle/>
+                    <a:p>
+                      <a:pPr algn="ctr" fontAlgn="b"/>
+                      <a:r>
+                        <a:rPr lang="ru-RU" sz="1200" b="1" u="none" strike="noStrike" kern="1200">
+                          <a:solidFill>
+                            <a:schemeClr val="dk1"/>
+                          </a:solidFill>
+                          <a:effectLst/>
+                          <a:latin typeface="+mn-lt"/>
+                          <a:ea typeface="+mn-ea"/>
+                          <a:cs typeface="+mn-cs"/>
+                        </a:rPr>
+                        <a:t>0,000908</a:t>
+                      </a:r>
+                    </a:p>
+                  </a:txBody>
+                  <a:tcPr marL="9525" marR="9525" marT="9525" marB="0" anchor="b"/>
+                </a:tc>
+                <a:tc>
+                  <a:txBody>
+                    <a:bodyPr/>
+                    <a:lstStyle/>
+                    <a:p>
+                      <a:pPr algn="ctr" fontAlgn="b"/>
+                      <a:r>
+                        <a:rPr lang="ru-RU" sz="1200" b="1" u="none" strike="noStrike" kern="1200" dirty="0">
+                          <a:solidFill>
+                            <a:schemeClr val="dk1"/>
+                          </a:solidFill>
+                          <a:effectLst/>
+                          <a:latin typeface="+mn-lt"/>
+                          <a:ea typeface="+mn-ea"/>
+                          <a:cs typeface="+mn-cs"/>
+                        </a:rPr>
+                        <a:t>2,4%</a:t>
+                      </a:r>
+                    </a:p>
+                  </a:txBody>
+                  <a:tcPr marL="9525" marR="9525" marT="9525" marB="0" anchor="b"/>
+                </a:tc>
+                <a:tc>
+                  <a:txBody>
+                    <a:bodyPr/>
+                    <a:lstStyle/>
+                    <a:p>
+                      <a:pPr algn="ctr" fontAlgn="b"/>
+                      <a:r>
+                        <a:rPr lang="ru-RU" sz="1200" b="1" u="none" strike="noStrike" kern="1200" dirty="0">
+                          <a:solidFill>
+                            <a:srgbClr val="FF0000"/>
+                          </a:solidFill>
+                          <a:effectLst/>
+                          <a:latin typeface="+mn-lt"/>
+                          <a:ea typeface="+mn-ea"/>
+                          <a:cs typeface="+mn-cs"/>
+                        </a:rPr>
+                        <a:t>-9,3%</a:t>
+                      </a:r>
+                    </a:p>
+                  </a:txBody>
+                  <a:tcPr marL="9525" marR="9525" marT="9525" marB="0" anchor="b"/>
+                </a:tc>
+                <a:extLst>
+                  <a:ext uri="{0D108BD9-81ED-4DB2-BD59-A6C34878D82A}">
+                    <a16:rowId xmlns:a16="http://schemas.microsoft.com/office/drawing/2014/main" val="4124081051"/>
+                  </a:ext>
+                </a:extLst>
+              </a:tr>
+              <a:tr h="187917">
+                <a:tc>
+                  <a:txBody>
+                    <a:bodyPr/>
+                    <a:lstStyle/>
+                    <a:p>
+                      <a:pPr algn="ctr" fontAlgn="ctr"/>
+                      <a:r>
+                        <a:rPr lang="ru-RU" sz="1200" b="1" u="none" strike="noStrike" kern="1200" dirty="0">
+                          <a:solidFill>
+                            <a:schemeClr val="dk1"/>
+                          </a:solidFill>
+                          <a:effectLst/>
+                          <a:latin typeface="+mn-lt"/>
+                          <a:ea typeface="+mn-ea"/>
+                          <a:cs typeface="+mn-cs"/>
+                        </a:rPr>
+                        <a:t>700</a:t>
+                      </a:r>
+                    </a:p>
+                  </a:txBody>
+                  <a:tcPr marL="9525" marR="9525" marT="9525" marB="0" anchor="ctr"/>
+                </a:tc>
+                <a:tc>
+                  <a:txBody>
+                    <a:bodyPr/>
+                    <a:lstStyle/>
+                    <a:p>
+                      <a:pPr algn="ctr" fontAlgn="b"/>
+                      <a:r>
+                        <a:rPr lang="ru-RU" sz="1200" b="1" u="none" strike="noStrike" kern="1200">
+                          <a:solidFill>
+                            <a:srgbClr val="FF0000"/>
+                          </a:solidFill>
+                          <a:effectLst/>
+                          <a:latin typeface="+mn-lt"/>
+                          <a:ea typeface="+mn-ea"/>
+                          <a:cs typeface="+mn-cs"/>
+                        </a:rPr>
+                        <a:t>-4388</a:t>
+                      </a:r>
+                    </a:p>
+                  </a:txBody>
+                  <a:tcPr marL="9525" marR="9525" marT="9525" marB="0" anchor="b"/>
+                </a:tc>
+                <a:tc>
+                  <a:txBody>
+                    <a:bodyPr/>
+                    <a:lstStyle/>
+                    <a:p>
+                      <a:pPr algn="ctr" fontAlgn="b"/>
+                      <a:r>
+                        <a:rPr lang="ru-RU" sz="1200" b="1" u="none" strike="noStrike" kern="1200" dirty="0">
+                          <a:solidFill>
+                            <a:srgbClr val="FF0000"/>
+                          </a:solidFill>
+                          <a:effectLst/>
+                          <a:latin typeface="+mn-lt"/>
+                          <a:ea typeface="+mn-ea"/>
+                          <a:cs typeface="+mn-cs"/>
+                        </a:rPr>
+                        <a:t>-2982</a:t>
+                      </a:r>
+                    </a:p>
+                  </a:txBody>
+                  <a:tcPr marL="9525" marR="9525" marT="9525" marB="0" anchor="b"/>
+                </a:tc>
+                <a:tc>
+                  <a:txBody>
+                    <a:bodyPr/>
+                    <a:lstStyle/>
+                    <a:p>
+                      <a:pPr algn="ctr" fontAlgn="b"/>
+                      <a:r>
+                        <a:rPr lang="ru-RU" sz="1200" b="1" u="none" strike="noStrike" kern="1200" dirty="0">
+                          <a:solidFill>
+                            <a:schemeClr val="accent6"/>
+                          </a:solidFill>
+                          <a:effectLst/>
+                          <a:latin typeface="+mn-lt"/>
+                          <a:ea typeface="+mn-ea"/>
+                          <a:cs typeface="+mn-cs"/>
+                        </a:rPr>
+                        <a:t>338</a:t>
+                      </a:r>
+                    </a:p>
+                  </a:txBody>
+                  <a:tcPr marL="9525" marR="9525" marT="9525" marB="0" anchor="b"/>
+                </a:tc>
+                <a:tc>
+                  <a:txBody>
+                    <a:bodyPr/>
+                    <a:lstStyle/>
+                    <a:p>
+                      <a:pPr algn="ctr" fontAlgn="b"/>
+                      <a:r>
+                        <a:rPr lang="ru-RU" sz="1200" b="1" u="none" strike="noStrike" kern="1200" dirty="0">
+                          <a:solidFill>
+                            <a:schemeClr val="accent6"/>
+                          </a:solidFill>
+                          <a:effectLst/>
+                          <a:latin typeface="+mn-lt"/>
+                          <a:ea typeface="+mn-ea"/>
+                          <a:cs typeface="+mn-cs"/>
+                        </a:rPr>
+                        <a:t>136,5857</a:t>
+                      </a:r>
+                    </a:p>
+                  </a:txBody>
+                  <a:tcPr marL="9525" marR="9525" marT="9525" marB="0" anchor="b"/>
+                </a:tc>
+                <a:tc>
+                  <a:txBody>
+                    <a:bodyPr/>
+                    <a:lstStyle/>
+                    <a:p>
+                      <a:pPr algn="ctr" fontAlgn="b"/>
+                      <a:r>
+                        <a:rPr lang="ru-RU" sz="1200" b="1" u="none" strike="noStrike" kern="1200" dirty="0">
+                          <a:solidFill>
+                            <a:srgbClr val="FF0000"/>
+                          </a:solidFill>
+                          <a:effectLst/>
+                          <a:latin typeface="+mn-lt"/>
+                          <a:ea typeface="+mn-ea"/>
+                          <a:cs typeface="+mn-cs"/>
+                        </a:rPr>
+                        <a:t>-3985</a:t>
+                      </a:r>
+                    </a:p>
+                  </a:txBody>
+                  <a:tcPr marL="9525" marR="9525" marT="9525" marB="0" anchor="b"/>
+                </a:tc>
+                <a:tc>
+                  <a:txBody>
+                    <a:bodyPr/>
+                    <a:lstStyle/>
+                    <a:p>
+                      <a:pPr algn="ctr" fontAlgn="b"/>
+                      <a:r>
+                        <a:rPr lang="ru-RU" sz="1200" b="1" u="none" strike="noStrike" kern="1200" dirty="0">
+                          <a:solidFill>
+                            <a:schemeClr val="dk1"/>
+                          </a:solidFill>
+                          <a:effectLst/>
+                          <a:latin typeface="+mn-lt"/>
+                          <a:ea typeface="+mn-ea"/>
+                          <a:cs typeface="+mn-cs"/>
+                        </a:rPr>
+                        <a:t>0,006369</a:t>
+                      </a:r>
+                    </a:p>
+                  </a:txBody>
+                  <a:tcPr marL="9525" marR="9525" marT="9525" marB="0" anchor="b"/>
+                </a:tc>
+                <a:tc>
+                  <a:txBody>
+                    <a:bodyPr/>
+                    <a:lstStyle/>
+                    <a:p>
+                      <a:pPr algn="ctr" fontAlgn="b"/>
+                      <a:r>
+                        <a:rPr lang="ru-RU" sz="1200" b="1" u="none" strike="noStrike" kern="1200" dirty="0">
+                          <a:solidFill>
+                            <a:schemeClr val="dk1"/>
+                          </a:solidFill>
+                          <a:effectLst/>
+                          <a:latin typeface="+mn-lt"/>
+                          <a:ea typeface="+mn-ea"/>
+                          <a:cs typeface="+mn-cs"/>
+                        </a:rPr>
+                        <a:t>1,8%</a:t>
+                      </a:r>
+                    </a:p>
+                  </a:txBody>
+                  <a:tcPr marL="9525" marR="9525" marT="9525" marB="0" anchor="b"/>
+                </a:tc>
+                <a:tc>
+                  <a:txBody>
+                    <a:bodyPr/>
+                    <a:lstStyle/>
+                    <a:p>
+                      <a:pPr algn="ctr" fontAlgn="b"/>
+                      <a:r>
+                        <a:rPr lang="ru-RU" sz="1200" b="1" u="none" strike="noStrike" kern="1200" dirty="0">
+                          <a:solidFill>
+                            <a:srgbClr val="FF0000"/>
+                          </a:solidFill>
+                          <a:effectLst/>
+                          <a:latin typeface="+mn-lt"/>
+                          <a:ea typeface="+mn-ea"/>
+                          <a:cs typeface="+mn-cs"/>
+                        </a:rPr>
+                        <a:t>-11,7%</a:t>
+                      </a:r>
+                    </a:p>
+                  </a:txBody>
+                  <a:tcPr marL="9525" marR="9525" marT="9525" marB="0" anchor="b"/>
+                </a:tc>
+                <a:extLst>
+                  <a:ext uri="{0D108BD9-81ED-4DB2-BD59-A6C34878D82A}">
+                    <a16:rowId xmlns:a16="http://schemas.microsoft.com/office/drawing/2014/main" val="1173856114"/>
+                  </a:ext>
+                </a:extLst>
+              </a:tr>
+            </a:tbl>
+          </a:graphicData>
+        </a:graphic>
+      </p:graphicFrame>
+      <p:sp>
+        <p:nvSpPr>
+          <p:cNvPr id="11" name="Объект 4"/>
+          <p:cNvSpPr txBox="1">
+            <a:spLocks/>
+          </p:cNvSpPr>
+          <p:nvPr/>
+        </p:nvSpPr>
+        <p:spPr>
+          <a:xfrm>
+            <a:off x="9410005" y="3995544"/>
+            <a:ext cx="2177935" cy="365266"/>
+          </a:xfrm>
+          <a:prstGeom prst="rect">
+            <a:avLst/>
+          </a:prstGeom>
+        </p:spPr>
+        <p:txBody>
+          <a:bodyPr vert="horz" lIns="91440" tIns="45720" rIns="91440" bIns="45720" rtlCol="0">
+            <a:normAutofit/>
+          </a:bodyPr>
+          <a:lstStyle>
+            <a:lvl1pPr marL="228600" indent="-228600" algn="l" defTabSz="914400" rtl="0" eaLnBrk="1" latinLnBrk="0" hangingPunct="1">
+              <a:lnSpc>
+                <a:spcPct val="90000"/>
+              </a:lnSpc>
+              <a:spcBef>
+                <a:spcPts val="1000"/>
+              </a:spcBef>
+              <a:buFont typeface="Arial" panose="020B0604020202020204" pitchFamily="34" charset="0"/>
+              <a:buChar char="•"/>
+              <a:defRPr sz="2800" kern="1200">
                 <a:solidFill>
-                  <a:schemeClr val="accent6"/>
+                  <a:schemeClr val="tx1"/>
                 </a:solidFill>
-              </a:rPr>
-              <a:t>Рост:</a:t>
-            </a:r>
-            <a:r>
-              <a:rPr lang="ru-RU" sz="1600" dirty="0" smtClean="0"/>
-              <a:t> </a:t>
-            </a:r>
-            <a:r>
-              <a:rPr lang="en-US" sz="1600" b="1" dirty="0" smtClean="0"/>
-              <a:t>Revenue, </a:t>
-            </a:r>
-            <a:r>
-              <a:rPr lang="en-US" sz="1600" b="1" dirty="0" smtClean="0"/>
-              <a:t>RPM</a:t>
-            </a:r>
-            <a:r>
-              <a:rPr lang="ru-RU" sz="1600" dirty="0" smtClean="0"/>
-              <a:t>,</a:t>
-            </a:r>
-            <a:r>
-              <a:rPr lang="en-US" sz="1600" dirty="0" smtClean="0"/>
-              <a:t> </a:t>
-            </a:r>
-            <a:r>
-              <a:rPr lang="en-US" sz="1600" b="1" dirty="0" smtClean="0"/>
-              <a:t>RPS,</a:t>
-            </a:r>
-            <a:r>
-              <a:rPr lang="ru-RU" sz="1600" dirty="0" smtClean="0"/>
-              <a:t> </a:t>
-            </a:r>
-            <a:r>
-              <a:rPr lang="en-US" sz="1600" b="1" dirty="0" smtClean="0"/>
-              <a:t>CTR</a:t>
-            </a:r>
-            <a:r>
-              <a:rPr lang="ru-RU" sz="1600" dirty="0" smtClean="0"/>
-              <a:t>-реклама.</a:t>
-            </a:r>
-          </a:p>
+                <a:latin typeface="+mn-lt"/>
+                <a:ea typeface="+mn-ea"/>
+                <a:cs typeface="+mn-cs"/>
+              </a:defRPr>
+            </a:lvl1pPr>
+            <a:lvl2pPr marL="685800" indent="-228600" algn="l" defTabSz="914400" rtl="0" eaLnBrk="1" latinLnBrk="0" hangingPunct="1">
+              <a:lnSpc>
+                <a:spcPct val="90000"/>
+              </a:lnSpc>
+              <a:spcBef>
+                <a:spcPts val="500"/>
+              </a:spcBef>
+              <a:buFont typeface="Arial" panose="020B0604020202020204" pitchFamily="34" charset="0"/>
+              <a:buChar char="•"/>
+              <a:defRPr sz="2400" kern="1200">
+                <a:solidFill>
+                  <a:schemeClr val="tx1"/>
+                </a:solidFill>
+                <a:latin typeface="+mn-lt"/>
+                <a:ea typeface="+mn-ea"/>
+                <a:cs typeface="+mn-cs"/>
+              </a:defRPr>
+            </a:lvl2pPr>
+            <a:lvl3pPr marL="1143000" indent="-228600" algn="l" defTabSz="914400" rtl="0" eaLnBrk="1" latinLnBrk="0" hangingPunct="1">
+              <a:lnSpc>
+                <a:spcPct val="90000"/>
+              </a:lnSpc>
+              <a:spcBef>
+                <a:spcPts val="500"/>
+              </a:spcBef>
+              <a:buFont typeface="Arial" panose="020B0604020202020204" pitchFamily="34" charset="0"/>
+              <a:buChar char="•"/>
+              <a:defRPr sz="2000" kern="1200">
+                <a:solidFill>
+                  <a:schemeClr val="tx1"/>
+                </a:solidFill>
+                <a:latin typeface="+mn-lt"/>
+                <a:ea typeface="+mn-ea"/>
+                <a:cs typeface="+mn-cs"/>
+              </a:defRPr>
+            </a:lvl3pPr>
+            <a:lvl4pPr marL="1600200" indent="-228600" algn="l" defTabSz="914400" rtl="0" eaLnBrk="1" latinLnBrk="0" hangingPunct="1">
+              <a:lnSpc>
+                <a:spcPct val="90000"/>
+              </a:lnSpc>
+              <a:spcBef>
+                <a:spcPts val="500"/>
+              </a:spcBef>
+              <a:buFont typeface="Arial" panose="020B0604020202020204" pitchFamily="34" charset="0"/>
+              <a:buChar char="•"/>
+              <a:defRPr sz="1800" kern="1200">
+                <a:solidFill>
+                  <a:schemeClr val="tx1"/>
+                </a:solidFill>
+                <a:latin typeface="+mn-lt"/>
+                <a:ea typeface="+mn-ea"/>
+                <a:cs typeface="+mn-cs"/>
+              </a:defRPr>
+            </a:lvl4pPr>
+            <a:lvl5pPr marL="2057400" indent="-228600" algn="l" defTabSz="914400" rtl="0" eaLnBrk="1" latinLnBrk="0" hangingPunct="1">
+              <a:lnSpc>
+                <a:spcPct val="90000"/>
+              </a:lnSpc>
+              <a:spcBef>
+                <a:spcPts val="500"/>
+              </a:spcBef>
+              <a:buFont typeface="Arial" panose="020B0604020202020204" pitchFamily="34" charset="0"/>
+              <a:buChar char="•"/>
+              <a:defRPr sz="1800" kern="1200">
+                <a:solidFill>
+                  <a:schemeClr val="tx1"/>
+                </a:solidFill>
+                <a:latin typeface="+mn-lt"/>
+                <a:ea typeface="+mn-ea"/>
+                <a:cs typeface="+mn-cs"/>
+              </a:defRPr>
+            </a:lvl5pPr>
+            <a:lvl6pPr marL="2514600" indent="-228600" algn="l" defTabSz="914400" rtl="0" eaLnBrk="1" latinLnBrk="0" hangingPunct="1">
+              <a:lnSpc>
+                <a:spcPct val="90000"/>
+              </a:lnSpc>
+              <a:spcBef>
+                <a:spcPts val="500"/>
+              </a:spcBef>
+              <a:buFont typeface="Arial" panose="020B0604020202020204" pitchFamily="34" charset="0"/>
+              <a:buChar char="•"/>
+              <a:defRPr sz="1800" kern="1200">
+                <a:solidFill>
+                  <a:schemeClr val="tx1"/>
+                </a:solidFill>
+                <a:latin typeface="+mn-lt"/>
+                <a:ea typeface="+mn-ea"/>
+                <a:cs typeface="+mn-cs"/>
+              </a:defRPr>
+            </a:lvl6pPr>
+            <a:lvl7pPr marL="2971800" indent="-228600" algn="l" defTabSz="914400" rtl="0" eaLnBrk="1" latinLnBrk="0" hangingPunct="1">
+              <a:lnSpc>
+                <a:spcPct val="90000"/>
+              </a:lnSpc>
+              <a:spcBef>
+                <a:spcPts val="500"/>
+              </a:spcBef>
+              <a:buFont typeface="Arial" panose="020B0604020202020204" pitchFamily="34" charset="0"/>
+              <a:buChar char="•"/>
+              <a:defRPr sz="1800" kern="1200">
+                <a:solidFill>
+                  <a:schemeClr val="tx1"/>
+                </a:solidFill>
+                <a:latin typeface="+mn-lt"/>
+                <a:ea typeface="+mn-ea"/>
+                <a:cs typeface="+mn-cs"/>
+              </a:defRPr>
+            </a:lvl7pPr>
+            <a:lvl8pPr marL="3429000" indent="-228600" algn="l" defTabSz="914400" rtl="0" eaLnBrk="1" latinLnBrk="0" hangingPunct="1">
+              <a:lnSpc>
+                <a:spcPct val="90000"/>
+              </a:lnSpc>
+              <a:spcBef>
+                <a:spcPts val="500"/>
+              </a:spcBef>
+              <a:buFont typeface="Arial" panose="020B0604020202020204" pitchFamily="34" charset="0"/>
+              <a:buChar char="•"/>
+              <a:defRPr sz="1800" kern="1200">
+                <a:solidFill>
+                  <a:schemeClr val="tx1"/>
+                </a:solidFill>
+                <a:latin typeface="+mn-lt"/>
+                <a:ea typeface="+mn-ea"/>
+                <a:cs typeface="+mn-cs"/>
+              </a:defRPr>
+            </a:lvl8pPr>
+            <a:lvl9pPr marL="3886200" indent="-228600" algn="l" defTabSz="914400" rtl="0" eaLnBrk="1" latinLnBrk="0" hangingPunct="1">
+              <a:lnSpc>
+                <a:spcPct val="90000"/>
+              </a:lnSpc>
+              <a:spcBef>
+                <a:spcPts val="500"/>
+              </a:spcBef>
+              <a:buFont typeface="Arial" panose="020B0604020202020204" pitchFamily="34" charset="0"/>
+              <a:buChar char="•"/>
+              <a:defRPr sz="1800" kern="1200">
+                <a:solidFill>
+                  <a:schemeClr val="tx1"/>
+                </a:solidFill>
+                <a:latin typeface="+mn-lt"/>
+                <a:ea typeface="+mn-ea"/>
+                <a:cs typeface="+mn-cs"/>
+              </a:defRPr>
+            </a:lvl9pPr>
+          </a:lstStyle>
           <a:p>
             <a:pPr marL="0" indent="0">
               <a:buFont typeface="Arial" panose="020B0604020202020204" pitchFamily="34" charset="0"/>
               <a:buNone/>
             </a:pPr>
             <a:r>
-              <a:rPr lang="ru-RU" sz="1600" b="1" dirty="0" smtClean="0">
-                <a:solidFill>
-                  <a:srgbClr val="FF0000"/>
-                </a:solidFill>
-              </a:rPr>
-              <a:t>Падение:</a:t>
-            </a:r>
-            <a:r>
-              <a:rPr lang="en-US" sz="1600" b="1" dirty="0" smtClean="0"/>
-              <a:t> CTR</a:t>
-            </a:r>
-            <a:r>
-              <a:rPr lang="ru-RU" sz="1600" b="1" dirty="0" smtClean="0"/>
-              <a:t>-</a:t>
-            </a:r>
-            <a:r>
-              <a:rPr lang="ru-RU" sz="1600" dirty="0" smtClean="0"/>
-              <a:t>органика.</a:t>
-            </a:r>
-            <a:br>
-              <a:rPr lang="ru-RU" sz="1600" dirty="0" smtClean="0"/>
-            </a:br>
-            <a:endParaRPr lang="ru-RU" sz="1600" dirty="0"/>
+              <a:rPr lang="en-US" sz="1800" dirty="0" smtClean="0"/>
+              <a:t>Mobile</a:t>
+            </a:r>
+            <a:endParaRPr lang="ru-RU" sz="1800" dirty="0"/>
           </a:p>
         </p:txBody>
       </p:sp>
     </p:spTree>
     <p:extLst>
       <p:ext uri="{BB962C8B-B14F-4D97-AF65-F5344CB8AC3E}">
-        <p14:creationId xmlns:p14="http://schemas.microsoft.com/office/powerpoint/2010/main" val="2771018751"/>
+        <p14:creationId xmlns:p14="http://schemas.microsoft.com/office/powerpoint/2010/main" val="2138135669"/>
       </p:ext>
     </p:extLst>
   </p:cSld>
@@ -4248,7 +7790,7 @@
 </p:sld>
 </file>
 
-<file path=ppt/slides/slide4.xml><?xml version="1.0" encoding="utf-8"?>
+<file path=ppt/slides/slide6.xml><?xml version="1.0" encoding="utf-8"?>
 <p:sld xmlns:a="http://schemas.openxmlformats.org/drawingml/2006/main" xmlns:r="http://schemas.openxmlformats.org/officeDocument/2006/relationships" xmlns:p="http://schemas.openxmlformats.org/presentationml/2006/main">
   <p:cSld>
     <p:spTree>
@@ -4289,7 +7831,7 @@
           <a:p>
             <a:r>
               <a:rPr lang="ru-RU" sz="4000" b="1" dirty="0" smtClean="0"/>
-              <a:t>Обоснование полученных результатов</a:t>
+              <a:t>Анализ поведения пользователей</a:t>
             </a:r>
             <a:endParaRPr lang="ru-RU" sz="4000" b="1" dirty="0"/>
           </a:p>
@@ -4307,22 +7849,30 @@
         </p:nvSpPr>
         <p:spPr>
           <a:xfrm>
-            <a:off x="838200" y="5461462"/>
-            <a:ext cx="10515600" cy="1304145"/>
+            <a:off x="989217" y="5461462"/>
+            <a:ext cx="9651074" cy="1304145"/>
           </a:xfrm>
         </p:spPr>
         <p:txBody>
           <a:bodyPr>
-            <a:normAutofit fontScale="92500" lnSpcReduction="10000"/>
+            <a:normAutofit fontScale="92500" lnSpcReduction="20000"/>
           </a:bodyPr>
           <a:lstStyle/>
           <a:p>
-            <a:pPr marL="0" indent="0">
+            <a:pPr marL="0" indent="0" algn="just">
               <a:buNone/>
             </a:pPr>
             <a:r>
+              <a:rPr lang="ru-RU" sz="1700" b="1" dirty="0" smtClean="0"/>
+              <a:t>Важно</a:t>
+            </a:r>
+            <a:r>
               <a:rPr lang="ru-RU" sz="1700" dirty="0" smtClean="0"/>
-              <a:t>Количество сессий практически не изменилось (пользователи возвращаются), но снизилось общее количество загруженных страниц и резко упало количество страниц, где пользователь видел нашу ленту.</a:t>
+              <a:t>: количество </a:t>
+            </a:r>
+            <a:r>
+              <a:rPr lang="ru-RU" sz="1700" dirty="0" smtClean="0"/>
+              <a:t>сессий практически не изменилось (пользователи возвращаются), но снизилось общее количество загруженных страниц и резко упало количество страниц, где пользователь видел нашу ленту.</a:t>
             </a:r>
           </a:p>
           <a:p>
@@ -4342,7 +7892,15 @@
             </a:br>
             <a:r>
               <a:rPr lang="ru-RU" sz="1700" dirty="0" smtClean="0"/>
-              <a:t> - пользователи стали чаще кликать на рекламный контент и не возвращаться обратно на сайт. Это подтверждается снижением глубины просмотра.</a:t>
+              <a:t> - пользователи стали чаще кликать на рекламный контент и не возвращаться обратно на сайт. </a:t>
+            </a:r>
+            <a:r>
+              <a:rPr lang="ru-RU" sz="1700" dirty="0" smtClean="0"/>
+              <a:t>Это </a:t>
+            </a:r>
+            <a:r>
+              <a:rPr lang="ru-RU" sz="1700" dirty="0" smtClean="0"/>
+              <a:t>подтверждается снижением глубины просмотра.</a:t>
             </a:r>
             <a:r>
               <a:rPr lang="ru-RU" sz="1700" dirty="0"/>
@@ -4350,7 +7908,26 @@
             </a:r>
             <a:r>
               <a:rPr lang="ru-RU" sz="1700" dirty="0" smtClean="0"/>
-              <a:t>А снижение </a:t>
+              <a:t/>
+            </a:r>
+            <a:br>
+              <a:rPr lang="ru-RU" sz="1700" dirty="0" smtClean="0"/>
+            </a:br>
+            <a:r>
+              <a:rPr lang="ru-RU" sz="1700" dirty="0"/>
+              <a:t> </a:t>
+            </a:r>
+            <a:r>
+              <a:rPr lang="ru-RU" sz="1700" dirty="0" smtClean="0"/>
+              <a:t>-</a:t>
+            </a:r>
+            <a:r>
+              <a:rPr lang="ru-RU" sz="1700" dirty="0" smtClean="0"/>
+              <a:t> </a:t>
+            </a:r>
+            <a:r>
+              <a:rPr lang="ru-RU" sz="1700" dirty="0" smtClean="0"/>
+              <a:t>снижение </a:t>
             </a:r>
             <a:r>
               <a:rPr lang="en-US" sz="1700" dirty="0" smtClean="0"/>
@@ -4381,7 +7958,7 @@
         </p:nvSpPr>
         <p:spPr>
           <a:xfrm>
-            <a:off x="9293629" y="2905473"/>
+            <a:off x="9293629" y="2872453"/>
             <a:ext cx="2177935" cy="1242578"/>
           </a:xfrm>
           <a:prstGeom prst="rect">
@@ -4596,7 +8173,7 @@
     </p:spTree>
     <p:extLst>
       <p:ext uri="{BB962C8B-B14F-4D97-AF65-F5344CB8AC3E}">
-        <p14:creationId xmlns:p14="http://schemas.microsoft.com/office/powerpoint/2010/main" val="4291162041"/>
+        <p14:creationId xmlns:p14="http://schemas.microsoft.com/office/powerpoint/2010/main" val="132676662"/>
       </p:ext>
     </p:extLst>
   </p:cSld>
@@ -4613,7 +8190,75 @@
 </p:sld>
 </file>
 
-<file path=ppt/slides/slide5.xml><?xml version="1.0" encoding="utf-8"?>
+<file path=ppt/slides/slide7.xml><?xml version="1.0" encoding="utf-8"?>
+<p:sld xmlns:a="http://schemas.openxmlformats.org/drawingml/2006/main" xmlns:r="http://schemas.openxmlformats.org/officeDocument/2006/relationships" xmlns:p="http://schemas.openxmlformats.org/presentationml/2006/main">
+  <p:cSld>
+    <p:spTree>
+      <p:nvGrpSpPr>
+        <p:cNvPr id="1" name=""/>
+        <p:cNvGrpSpPr/>
+        <p:nvPr/>
+      </p:nvGrpSpPr>
+      <p:grpSpPr>
+        <a:xfrm>
+          <a:off x="0" y="0"/>
+          <a:ext cx="0" cy="0"/>
+          <a:chOff x="0" y="0"/>
+          <a:chExt cx="0" cy="0"/>
+        </a:xfrm>
+      </p:grpSpPr>
+      <p:sp>
+        <p:nvSpPr>
+          <p:cNvPr id="2" name="Заголовок 1"/>
+          <p:cNvSpPr>
+            <a:spLocks noGrp="1"/>
+          </p:cNvSpPr>
+          <p:nvPr>
+            <p:ph type="title"/>
+          </p:nvPr>
+        </p:nvSpPr>
+        <p:spPr/>
+        <p:txBody>
+          <a:bodyPr/>
+          <a:lstStyle/>
+          <a:p>
+            <a:endParaRPr lang="ru-RU"/>
+          </a:p>
+        </p:txBody>
+      </p:sp>
+      <p:sp>
+        <p:nvSpPr>
+          <p:cNvPr id="3" name="Объект 2"/>
+          <p:cNvSpPr>
+            <a:spLocks noGrp="1"/>
+          </p:cNvSpPr>
+          <p:nvPr>
+            <p:ph idx="1"/>
+          </p:nvPr>
+        </p:nvSpPr>
+        <p:spPr/>
+        <p:txBody>
+          <a:bodyPr/>
+          <a:lstStyle/>
+          <a:p>
+            <a:endParaRPr lang="ru-RU"/>
+          </a:p>
+        </p:txBody>
+      </p:sp>
+    </p:spTree>
+    <p:extLst>
+      <p:ext uri="{BB962C8B-B14F-4D97-AF65-F5344CB8AC3E}">
+        <p14:creationId xmlns:p14="http://schemas.microsoft.com/office/powerpoint/2010/main" val="688466209"/>
+      </p:ext>
+    </p:extLst>
+  </p:cSld>
+  <p:clrMapOvr>
+    <a:masterClrMapping/>
+  </p:clrMapOvr>
+</p:sld>
+</file>
+
+<file path=ppt/slides/slide8.xml><?xml version="1.0" encoding="utf-8"?>
 <p:sld xmlns:a="http://schemas.openxmlformats.org/drawingml/2006/main" xmlns:r="http://schemas.openxmlformats.org/officeDocument/2006/relationships" xmlns:p="http://schemas.openxmlformats.org/presentationml/2006/main">
   <p:cSld>
     <p:spTree>

--- a/AB_test.pptx
+++ b/AB_test.pptx
@@ -9,9 +9,9 @@
     <p:sldId id="257" r:id="rId3"/>
     <p:sldId id="258" r:id="rId4"/>
     <p:sldId id="260" r:id="rId5"/>
-    <p:sldId id="263" r:id="rId6"/>
-    <p:sldId id="262" r:id="rId7"/>
-    <p:sldId id="261" r:id="rId8"/>
+    <p:sldId id="262" r:id="rId6"/>
+    <p:sldId id="263" r:id="rId7"/>
+    <p:sldId id="264" r:id="rId8"/>
     <p:sldId id="259" r:id="rId9"/>
   </p:sldIdLst>
   <p:sldSz cx="12192000" cy="6858000"/>
@@ -250,7 +250,7 @@
           <a:p>
             <a:fld id="{65688B3E-6BDF-447D-927C-7173740618A1}" type="datetimeFigureOut">
               <a:rPr lang="ru-RU" smtClean="0"/>
-              <a:t>26.02.2026</a:t>
+              <a:t>28.02.2026</a:t>
             </a:fld>
             <a:endParaRPr lang="ru-RU"/>
           </a:p>
@@ -420,7 +420,7 @@
           <a:p>
             <a:fld id="{65688B3E-6BDF-447D-927C-7173740618A1}" type="datetimeFigureOut">
               <a:rPr lang="ru-RU" smtClean="0"/>
-              <a:t>26.02.2026</a:t>
+              <a:t>28.02.2026</a:t>
             </a:fld>
             <a:endParaRPr lang="ru-RU"/>
           </a:p>
@@ -600,7 +600,7 @@
           <a:p>
             <a:fld id="{65688B3E-6BDF-447D-927C-7173740618A1}" type="datetimeFigureOut">
               <a:rPr lang="ru-RU" smtClean="0"/>
-              <a:t>26.02.2026</a:t>
+              <a:t>28.02.2026</a:t>
             </a:fld>
             <a:endParaRPr lang="ru-RU"/>
           </a:p>
@@ -770,7 +770,7 @@
           <a:p>
             <a:fld id="{65688B3E-6BDF-447D-927C-7173740618A1}" type="datetimeFigureOut">
               <a:rPr lang="ru-RU" smtClean="0"/>
-              <a:t>26.02.2026</a:t>
+              <a:t>28.02.2026</a:t>
             </a:fld>
             <a:endParaRPr lang="ru-RU"/>
           </a:p>
@@ -1016,7 +1016,7 @@
           <a:p>
             <a:fld id="{65688B3E-6BDF-447D-927C-7173740618A1}" type="datetimeFigureOut">
               <a:rPr lang="ru-RU" smtClean="0"/>
-              <a:t>26.02.2026</a:t>
+              <a:t>28.02.2026</a:t>
             </a:fld>
             <a:endParaRPr lang="ru-RU"/>
           </a:p>
@@ -1248,7 +1248,7 @@
           <a:p>
             <a:fld id="{65688B3E-6BDF-447D-927C-7173740618A1}" type="datetimeFigureOut">
               <a:rPr lang="ru-RU" smtClean="0"/>
-              <a:t>26.02.2026</a:t>
+              <a:t>28.02.2026</a:t>
             </a:fld>
             <a:endParaRPr lang="ru-RU"/>
           </a:p>
@@ -1615,7 +1615,7 @@
           <a:p>
             <a:fld id="{65688B3E-6BDF-447D-927C-7173740618A1}" type="datetimeFigureOut">
               <a:rPr lang="ru-RU" smtClean="0"/>
-              <a:t>26.02.2026</a:t>
+              <a:t>28.02.2026</a:t>
             </a:fld>
             <a:endParaRPr lang="ru-RU"/>
           </a:p>
@@ -1733,7 +1733,7 @@
           <a:p>
             <a:fld id="{65688B3E-6BDF-447D-927C-7173740618A1}" type="datetimeFigureOut">
               <a:rPr lang="ru-RU" smtClean="0"/>
-              <a:t>26.02.2026</a:t>
+              <a:t>28.02.2026</a:t>
             </a:fld>
             <a:endParaRPr lang="ru-RU"/>
           </a:p>
@@ -1828,7 +1828,7 @@
           <a:p>
             <a:fld id="{65688B3E-6BDF-447D-927C-7173740618A1}" type="datetimeFigureOut">
               <a:rPr lang="ru-RU" smtClean="0"/>
-              <a:t>26.02.2026</a:t>
+              <a:t>28.02.2026</a:t>
             </a:fld>
             <a:endParaRPr lang="ru-RU"/>
           </a:p>
@@ -2105,7 +2105,7 @@
           <a:p>
             <a:fld id="{65688B3E-6BDF-447D-927C-7173740618A1}" type="datetimeFigureOut">
               <a:rPr lang="ru-RU" smtClean="0"/>
-              <a:t>26.02.2026</a:t>
+              <a:t>28.02.2026</a:t>
             </a:fld>
             <a:endParaRPr lang="ru-RU"/>
           </a:p>
@@ -2358,7 +2358,7 @@
           <a:p>
             <a:fld id="{65688B3E-6BDF-447D-927C-7173740618A1}" type="datetimeFigureOut">
               <a:rPr lang="ru-RU" smtClean="0"/>
-              <a:t>26.02.2026</a:t>
+              <a:t>28.02.2026</a:t>
             </a:fld>
             <a:endParaRPr lang="ru-RU"/>
           </a:p>
@@ -2571,7 +2571,7 @@
           <a:p>
             <a:fld id="{65688B3E-6BDF-447D-927C-7173740618A1}" type="datetimeFigureOut">
               <a:rPr lang="ru-RU" smtClean="0"/>
-              <a:t>26.02.2026</a:t>
+              <a:t>28.02.2026</a:t>
             </a:fld>
             <a:endParaRPr lang="ru-RU"/>
           </a:p>
@@ -3678,15 +3678,7 @@
                   <a:schemeClr val="accent6"/>
                 </a:solidFill>
               </a:rPr>
-              <a:t>Рост</a:t>
-            </a:r>
-            <a:r>
-              <a:rPr lang="ru-RU" sz="1600" b="1" dirty="0" smtClean="0">
-                <a:solidFill>
-                  <a:schemeClr val="accent6"/>
-                </a:solidFill>
-              </a:rPr>
-              <a:t>:</a:t>
+              <a:t>Рост:</a:t>
             </a:r>
             <a:r>
               <a:rPr lang="ru-RU" sz="1600" dirty="0" smtClean="0"/>
@@ -3721,15 +3713,7 @@
                   <a:srgbClr val="FF0000"/>
                 </a:solidFill>
               </a:rPr>
-              <a:t>Падение</a:t>
-            </a:r>
-            <a:r>
-              <a:rPr lang="ru-RU" sz="1600" b="1" dirty="0" smtClean="0">
-                <a:solidFill>
-                  <a:srgbClr val="FF0000"/>
-                </a:solidFill>
-              </a:rPr>
-              <a:t>:</a:t>
+              <a:t>Падение:</a:t>
             </a:r>
             <a:r>
               <a:rPr lang="ru-RU" sz="1600" dirty="0" smtClean="0"/>
@@ -4210,15 +4194,7 @@
                   <a:schemeClr val="accent6"/>
                 </a:solidFill>
               </a:rPr>
-              <a:t>Рост</a:t>
-            </a:r>
-            <a:r>
-              <a:rPr lang="ru-RU" sz="1600" b="1" dirty="0" smtClean="0">
-                <a:solidFill>
-                  <a:schemeClr val="accent6"/>
-                </a:solidFill>
-              </a:rPr>
-              <a:t>:</a:t>
+              <a:t>Рост:</a:t>
             </a:r>
             <a:r>
               <a:rPr lang="ru-RU" sz="1600" dirty="0" smtClean="0"/>
@@ -4261,15 +4237,7 @@
                   <a:srgbClr val="FF0000"/>
                 </a:solidFill>
               </a:rPr>
-              <a:t>Падение</a:t>
-            </a:r>
-            <a:r>
-              <a:rPr lang="ru-RU" sz="1600" b="1" dirty="0" smtClean="0">
-                <a:solidFill>
-                  <a:srgbClr val="FF0000"/>
-                </a:solidFill>
-              </a:rPr>
-              <a:t>:</a:t>
+              <a:t>Падение:</a:t>
             </a:r>
             <a:r>
               <a:rPr lang="en-US" sz="1600" b="1" dirty="0" smtClean="0"/>
@@ -4388,11 +4356,7 @@
             </a:r>
             <a:r>
               <a:rPr lang="ru-RU" sz="1700" dirty="0" smtClean="0"/>
-              <a:t>: количество </a:t>
-            </a:r>
-            <a:r>
-              <a:rPr lang="ru-RU" sz="1700" dirty="0" smtClean="0"/>
-              <a:t>сессий практически не изменилось (пользователи возвращаются), но снизилось общее количество загруженных страниц и резко упало количество страниц, где пользователь видел нашу ленту.</a:t>
+              <a:t>: количество сессий практически не изменилось (пользователи возвращаются), но снизилось общее количество загруженных страниц и резко упало количество страниц, где пользователь видел нашу ленту.</a:t>
             </a:r>
           </a:p>
           <a:p>
@@ -4412,15 +4376,7 @@
             </a:br>
             <a:r>
               <a:rPr lang="ru-RU" sz="1700" dirty="0" smtClean="0"/>
-              <a:t> - пользователи стали чаще кликать на рекламный контент и не возвращаться обратно на сайт. </a:t>
-            </a:r>
-            <a:r>
-              <a:rPr lang="ru-RU" sz="1700" dirty="0" smtClean="0"/>
-              <a:t>Это </a:t>
-            </a:r>
-            <a:r>
-              <a:rPr lang="ru-RU" sz="1700" dirty="0" smtClean="0"/>
-              <a:t>подтверждается снижением глубины просмотра.</a:t>
+              <a:t> - пользователи стали чаще кликать на рекламный контент и не возвращаться обратно на сайт. Это подтверждается снижением глубины просмотра.</a:t>
             </a:r>
             <a:r>
               <a:rPr lang="ru-RU" sz="1700" dirty="0"/>
@@ -4439,15 +4395,7 @@
             </a:r>
             <a:r>
               <a:rPr lang="ru-RU" sz="1700" dirty="0" smtClean="0"/>
-              <a:t>-</a:t>
-            </a:r>
-            <a:r>
-              <a:rPr lang="ru-RU" sz="1700" dirty="0" smtClean="0"/>
-              <a:t> </a:t>
-            </a:r>
-            <a:r>
-              <a:rPr lang="ru-RU" sz="1700" dirty="0" smtClean="0"/>
-              <a:t>снижение </a:t>
+              <a:t>- снижение </a:t>
             </a:r>
             <a:r>
               <a:rPr lang="en-US" sz="1700" dirty="0" smtClean="0"/>
@@ -4739,8 +4687,8 @@
         </p:nvSpPr>
         <p:spPr>
           <a:xfrm>
-            <a:off x="838200" y="365125"/>
-            <a:ext cx="10515600" cy="1161361"/>
+            <a:off x="820396" y="365125"/>
+            <a:ext cx="10533404" cy="1161361"/>
           </a:xfrm>
         </p:spPr>
         <p:txBody>
@@ -4751,7 +4699,7 @@
           <a:p>
             <a:r>
               <a:rPr lang="ru-RU" sz="4000" b="1" dirty="0" smtClean="0"/>
-              <a:t>Анализ влияния теста на издательства</a:t>
+              <a:t>Анализ эффективности ленты в издательствах</a:t>
             </a:r>
             <a:endParaRPr lang="ru-RU" sz="4000" b="1" dirty="0"/>
           </a:p>
@@ -4769,24 +4717,58 @@
         </p:nvSpPr>
         <p:spPr>
           <a:xfrm>
-            <a:off x="989217" y="5461462"/>
-            <a:ext cx="9651074" cy="1304145"/>
+            <a:off x="906089" y="5247118"/>
+            <a:ext cx="9734202" cy="1518489"/>
           </a:xfrm>
         </p:spPr>
         <p:txBody>
           <a:bodyPr>
-            <a:normAutofit/>
+            <a:normAutofit lnSpcReduction="10000"/>
           </a:bodyPr>
           <a:lstStyle/>
           <a:p>
-            <a:pPr marL="0" indent="0" algn="just">
+            <a:pPr marL="0" indent="0">
               <a:buNone/>
             </a:pPr>
             <a:r>
+              <a:rPr lang="ru-RU" sz="1700" b="1" dirty="0" smtClean="0"/>
+              <a:t>Независимо от платформы:</a:t>
+            </a:r>
+            <a:br>
+              <a:rPr lang="ru-RU" sz="1700" b="1" dirty="0" smtClean="0"/>
+            </a:br>
+            <a:r>
+              <a:rPr lang="ru-RU" sz="1700" b="1" dirty="0" smtClean="0"/>
+              <a:t>- </a:t>
+            </a:r>
+            <a:r>
               <a:rPr lang="ru-RU" sz="1700" dirty="0" smtClean="0"/>
-              <a:t>Все издательства показали па</a:t>
-            </a:r>
-            <a:endParaRPr lang="ru-RU" sz="1700" dirty="0" smtClean="0"/>
+              <a:t>издательства, имеющие наименьший трафик приносят наибольший доход,</a:t>
+            </a:r>
+            <a:br>
+              <a:rPr lang="ru-RU" sz="1700" dirty="0" smtClean="0"/>
+            </a:br>
+            <a:r>
+              <a:rPr lang="ru-RU" sz="1700" dirty="0" smtClean="0"/>
+              <a:t>- издательства с наибольшим трафиком имеют наименьший доход.</a:t>
+            </a:r>
+          </a:p>
+          <a:p>
+            <a:pPr marL="0" indent="0">
+              <a:buNone/>
+            </a:pPr>
+            <a:r>
+              <a:rPr lang="ru-RU" sz="1700" dirty="0" smtClean="0"/>
+              <a:t> </a:t>
+            </a:r>
+            <a:r>
+              <a:rPr lang="ru-RU" sz="1700" b="1" dirty="0" smtClean="0"/>
+              <a:t> </a:t>
+            </a:r>
+            <a:r>
+              <a:rPr lang="ru-RU" sz="1700" dirty="0" smtClean="0"/>
+              <a:t>Необходимо изучить данную особенность, выявить какие факторы влияют на данные показатели, попробовать применить их к другим издательствами, либо учесть при сотрудничестве с новыми издательствами</a:t>
+            </a:r>
           </a:p>
         </p:txBody>
       </p:sp>
@@ -4800,7 +4782,1297 @@
         </p:nvSpPr>
         <p:spPr>
           <a:xfrm>
-            <a:off x="9410005" y="2063042"/>
+            <a:off x="9285084" y="3004470"/>
+            <a:ext cx="2177935" cy="1242578"/>
+          </a:xfrm>
+          <a:prstGeom prst="rect">
+            <a:avLst/>
+          </a:prstGeom>
+        </p:spPr>
+        <p:txBody>
+          <a:bodyPr vert="horz" lIns="91440" tIns="45720" rIns="91440" bIns="45720" rtlCol="0">
+            <a:normAutofit/>
+          </a:bodyPr>
+          <a:lstStyle>
+            <a:lvl1pPr marL="228600" indent="-228600" algn="l" defTabSz="914400" rtl="0" eaLnBrk="1" latinLnBrk="0" hangingPunct="1">
+              <a:lnSpc>
+                <a:spcPct val="90000"/>
+              </a:lnSpc>
+              <a:spcBef>
+                <a:spcPts val="1000"/>
+              </a:spcBef>
+              <a:buFont typeface="Arial" panose="020B0604020202020204" pitchFamily="34" charset="0"/>
+              <a:buChar char="•"/>
+              <a:defRPr sz="2800" kern="1200">
+                <a:solidFill>
+                  <a:schemeClr val="tx1"/>
+                </a:solidFill>
+                <a:latin typeface="+mn-lt"/>
+                <a:ea typeface="+mn-ea"/>
+                <a:cs typeface="+mn-cs"/>
+              </a:defRPr>
+            </a:lvl1pPr>
+            <a:lvl2pPr marL="685800" indent="-228600" algn="l" defTabSz="914400" rtl="0" eaLnBrk="1" latinLnBrk="0" hangingPunct="1">
+              <a:lnSpc>
+                <a:spcPct val="90000"/>
+              </a:lnSpc>
+              <a:spcBef>
+                <a:spcPts val="500"/>
+              </a:spcBef>
+              <a:buFont typeface="Arial" panose="020B0604020202020204" pitchFamily="34" charset="0"/>
+              <a:buChar char="•"/>
+              <a:defRPr sz="2400" kern="1200">
+                <a:solidFill>
+                  <a:schemeClr val="tx1"/>
+                </a:solidFill>
+                <a:latin typeface="+mn-lt"/>
+                <a:ea typeface="+mn-ea"/>
+                <a:cs typeface="+mn-cs"/>
+              </a:defRPr>
+            </a:lvl2pPr>
+            <a:lvl3pPr marL="1143000" indent="-228600" algn="l" defTabSz="914400" rtl="0" eaLnBrk="1" latinLnBrk="0" hangingPunct="1">
+              <a:lnSpc>
+                <a:spcPct val="90000"/>
+              </a:lnSpc>
+              <a:spcBef>
+                <a:spcPts val="500"/>
+              </a:spcBef>
+              <a:buFont typeface="Arial" panose="020B0604020202020204" pitchFamily="34" charset="0"/>
+              <a:buChar char="•"/>
+              <a:defRPr sz="2000" kern="1200">
+                <a:solidFill>
+                  <a:schemeClr val="tx1"/>
+                </a:solidFill>
+                <a:latin typeface="+mn-lt"/>
+                <a:ea typeface="+mn-ea"/>
+                <a:cs typeface="+mn-cs"/>
+              </a:defRPr>
+            </a:lvl3pPr>
+            <a:lvl4pPr marL="1600200" indent="-228600" algn="l" defTabSz="914400" rtl="0" eaLnBrk="1" latinLnBrk="0" hangingPunct="1">
+              <a:lnSpc>
+                <a:spcPct val="90000"/>
+              </a:lnSpc>
+              <a:spcBef>
+                <a:spcPts val="500"/>
+              </a:spcBef>
+              <a:buFont typeface="Arial" panose="020B0604020202020204" pitchFamily="34" charset="0"/>
+              <a:buChar char="•"/>
+              <a:defRPr sz="1800" kern="1200">
+                <a:solidFill>
+                  <a:schemeClr val="tx1"/>
+                </a:solidFill>
+                <a:latin typeface="+mn-lt"/>
+                <a:ea typeface="+mn-ea"/>
+                <a:cs typeface="+mn-cs"/>
+              </a:defRPr>
+            </a:lvl4pPr>
+            <a:lvl5pPr marL="2057400" indent="-228600" algn="l" defTabSz="914400" rtl="0" eaLnBrk="1" latinLnBrk="0" hangingPunct="1">
+              <a:lnSpc>
+                <a:spcPct val="90000"/>
+              </a:lnSpc>
+              <a:spcBef>
+                <a:spcPts val="500"/>
+              </a:spcBef>
+              <a:buFont typeface="Arial" panose="020B0604020202020204" pitchFamily="34" charset="0"/>
+              <a:buChar char="•"/>
+              <a:defRPr sz="1800" kern="1200">
+                <a:solidFill>
+                  <a:schemeClr val="tx1"/>
+                </a:solidFill>
+                <a:latin typeface="+mn-lt"/>
+                <a:ea typeface="+mn-ea"/>
+                <a:cs typeface="+mn-cs"/>
+              </a:defRPr>
+            </a:lvl5pPr>
+            <a:lvl6pPr marL="2514600" indent="-228600" algn="l" defTabSz="914400" rtl="0" eaLnBrk="1" latinLnBrk="0" hangingPunct="1">
+              <a:lnSpc>
+                <a:spcPct val="90000"/>
+              </a:lnSpc>
+              <a:spcBef>
+                <a:spcPts val="500"/>
+              </a:spcBef>
+              <a:buFont typeface="Arial" panose="020B0604020202020204" pitchFamily="34" charset="0"/>
+              <a:buChar char="•"/>
+              <a:defRPr sz="1800" kern="1200">
+                <a:solidFill>
+                  <a:schemeClr val="tx1"/>
+                </a:solidFill>
+                <a:latin typeface="+mn-lt"/>
+                <a:ea typeface="+mn-ea"/>
+                <a:cs typeface="+mn-cs"/>
+              </a:defRPr>
+            </a:lvl6pPr>
+            <a:lvl7pPr marL="2971800" indent="-228600" algn="l" defTabSz="914400" rtl="0" eaLnBrk="1" latinLnBrk="0" hangingPunct="1">
+              <a:lnSpc>
+                <a:spcPct val="90000"/>
+              </a:lnSpc>
+              <a:spcBef>
+                <a:spcPts val="500"/>
+              </a:spcBef>
+              <a:buFont typeface="Arial" panose="020B0604020202020204" pitchFamily="34" charset="0"/>
+              <a:buChar char="•"/>
+              <a:defRPr sz="1800" kern="1200">
+                <a:solidFill>
+                  <a:schemeClr val="tx1"/>
+                </a:solidFill>
+                <a:latin typeface="+mn-lt"/>
+                <a:ea typeface="+mn-ea"/>
+                <a:cs typeface="+mn-cs"/>
+              </a:defRPr>
+            </a:lvl7pPr>
+            <a:lvl8pPr marL="3429000" indent="-228600" algn="l" defTabSz="914400" rtl="0" eaLnBrk="1" latinLnBrk="0" hangingPunct="1">
+              <a:lnSpc>
+                <a:spcPct val="90000"/>
+              </a:lnSpc>
+              <a:spcBef>
+                <a:spcPts val="500"/>
+              </a:spcBef>
+              <a:buFont typeface="Arial" panose="020B0604020202020204" pitchFamily="34" charset="0"/>
+              <a:buChar char="•"/>
+              <a:defRPr sz="1800" kern="1200">
+                <a:solidFill>
+                  <a:schemeClr val="tx1"/>
+                </a:solidFill>
+                <a:latin typeface="+mn-lt"/>
+                <a:ea typeface="+mn-ea"/>
+                <a:cs typeface="+mn-cs"/>
+              </a:defRPr>
+            </a:lvl8pPr>
+            <a:lvl9pPr marL="3886200" indent="-228600" algn="l" defTabSz="914400" rtl="0" eaLnBrk="1" latinLnBrk="0" hangingPunct="1">
+              <a:lnSpc>
+                <a:spcPct val="90000"/>
+              </a:lnSpc>
+              <a:spcBef>
+                <a:spcPts val="500"/>
+              </a:spcBef>
+              <a:buFont typeface="Arial" panose="020B0604020202020204" pitchFamily="34" charset="0"/>
+              <a:buChar char="•"/>
+              <a:defRPr sz="1800" kern="1200">
+                <a:solidFill>
+                  <a:schemeClr val="tx1"/>
+                </a:solidFill>
+                <a:latin typeface="+mn-lt"/>
+                <a:ea typeface="+mn-ea"/>
+                <a:cs typeface="+mn-cs"/>
+              </a:defRPr>
+            </a:lvl9pPr>
+          </a:lstStyle>
+          <a:p>
+            <a:pPr marL="0" indent="0">
+              <a:buFont typeface="Arial" panose="020B0604020202020204" pitchFamily="34" charset="0"/>
+              <a:buNone/>
+            </a:pPr>
+            <a:r>
+              <a:rPr lang="ru-RU" sz="1800" dirty="0" smtClean="0"/>
+              <a:t>Доля каждого издательства от общего объема метрики</a:t>
+            </a:r>
+            <a:endParaRPr lang="ru-RU" sz="1800" dirty="0"/>
+          </a:p>
+        </p:txBody>
+      </p:sp>
+      <p:graphicFrame>
+        <p:nvGraphicFramePr>
+          <p:cNvPr id="4" name="Таблица 3"/>
+          <p:cNvGraphicFramePr>
+            <a:graphicFrameLocks noGrp="1"/>
+          </p:cNvGraphicFramePr>
+          <p:nvPr>
+            <p:extLst>
+              <p:ext uri="{D42A27DB-BD31-4B8C-83A1-F6EECF244321}">
+                <p14:modId xmlns:p14="http://schemas.microsoft.com/office/powerpoint/2010/main" val="1504213012"/>
+              </p:ext>
+            </p:extLst>
+          </p:nvPr>
+        </p:nvGraphicFramePr>
+        <p:xfrm>
+          <a:off x="940038" y="1707412"/>
+          <a:ext cx="8133504" cy="1297058"/>
+        </p:xfrm>
+        <a:graphic>
+          <a:graphicData uri="http://schemas.openxmlformats.org/drawingml/2006/table">
+            <a:tbl>
+              <a:tblPr firstRow="1" bandRow="1">
+                <a:tableStyleId>{8A107856-5554-42FB-B03E-39F5DBC370BA}</a:tableStyleId>
+              </a:tblPr>
+              <a:tblGrid>
+                <a:gridCol w="876236">
+                  <a:extLst>
+                    <a:ext uri="{9D8B030D-6E8A-4147-A177-3AD203B41FA5}">
+                      <a16:colId xmlns:a16="http://schemas.microsoft.com/office/drawing/2014/main" val="2648907033"/>
+                    </a:ext>
+                  </a:extLst>
+                </a:gridCol>
+                <a:gridCol w="1412064">
+                  <a:extLst>
+                    <a:ext uri="{9D8B030D-6E8A-4147-A177-3AD203B41FA5}">
+                      <a16:colId xmlns:a16="http://schemas.microsoft.com/office/drawing/2014/main" val="3933250765"/>
+                    </a:ext>
+                  </a:extLst>
+                </a:gridCol>
+                <a:gridCol w="1731278">
+                  <a:extLst>
+                    <a:ext uri="{9D8B030D-6E8A-4147-A177-3AD203B41FA5}">
+                      <a16:colId xmlns:a16="http://schemas.microsoft.com/office/drawing/2014/main" val="2992452003"/>
+                    </a:ext>
+                  </a:extLst>
+                </a:gridCol>
+                <a:gridCol w="1388450">
+                  <a:extLst>
+                    <a:ext uri="{9D8B030D-6E8A-4147-A177-3AD203B41FA5}">
+                      <a16:colId xmlns:a16="http://schemas.microsoft.com/office/drawing/2014/main" val="3965870187"/>
+                    </a:ext>
+                  </a:extLst>
+                </a:gridCol>
+                <a:gridCol w="1688425">
+                  <a:extLst>
+                    <a:ext uri="{9D8B030D-6E8A-4147-A177-3AD203B41FA5}">
+                      <a16:colId xmlns:a16="http://schemas.microsoft.com/office/drawing/2014/main" val="2033533074"/>
+                    </a:ext>
+                  </a:extLst>
+                </a:gridCol>
+                <a:gridCol w="1037051">
+                  <a:extLst>
+                    <a:ext uri="{9D8B030D-6E8A-4147-A177-3AD203B41FA5}">
+                      <a16:colId xmlns:a16="http://schemas.microsoft.com/office/drawing/2014/main" val="4184256437"/>
+                    </a:ext>
+                  </a:extLst>
+                </a:gridCol>
+              </a:tblGrid>
+              <a:tr h="335033">
+                <a:tc>
+                  <a:txBody>
+                    <a:bodyPr/>
+                    <a:lstStyle/>
+                    <a:p>
+                      <a:pPr algn="ctr" fontAlgn="ctr"/>
+                      <a:r>
+                        <a:rPr lang="ru-RU" sz="1100" u="none" strike="noStrike" dirty="0" smtClean="0">
+                          <a:effectLst/>
+                        </a:rPr>
+                        <a:t>Издательство</a:t>
+                      </a:r>
+                      <a:endParaRPr lang="en-US" sz="1100" b="1" i="0" u="none" strike="noStrike" dirty="0">
+                        <a:solidFill>
+                          <a:srgbClr val="000000"/>
+                        </a:solidFill>
+                        <a:effectLst/>
+                        <a:latin typeface="Calibri" panose="020F0502020204030204" pitchFamily="34" charset="0"/>
+                      </a:endParaRPr>
+                    </a:p>
+                  </a:txBody>
+                  <a:tcPr marL="9525" marR="9525" marT="9525" marB="0" anchor="ctr"/>
+                </a:tc>
+                <a:tc>
+                  <a:txBody>
+                    <a:bodyPr/>
+                    <a:lstStyle/>
+                    <a:p>
+                      <a:pPr algn="ctr" fontAlgn="ctr"/>
+                      <a:r>
+                        <a:rPr lang="en-US" sz="1100" u="none" strike="noStrike" dirty="0" err="1" smtClean="0">
+                          <a:effectLst/>
+                        </a:rPr>
+                        <a:t>pageviews</a:t>
+                      </a:r>
+                      <a:r>
+                        <a:rPr lang="en-US" sz="1100" u="none" strike="noStrike" dirty="0" smtClean="0">
+                          <a:effectLst/>
+                        </a:rPr>
+                        <a:t>, </a:t>
+                      </a:r>
+                      <a:r>
+                        <a:rPr lang="en-US" sz="1100" u="none" strike="noStrike" dirty="0">
+                          <a:effectLst/>
+                        </a:rPr>
+                        <a:t>% </a:t>
+                      </a:r>
+                      <a:r>
+                        <a:rPr lang="ru-RU" sz="1100" u="none" strike="noStrike" dirty="0">
+                          <a:effectLst/>
+                        </a:rPr>
+                        <a:t>от </a:t>
+                      </a:r>
+                      <a:r>
+                        <a:rPr lang="ru-RU" sz="1100" u="none" strike="noStrike" dirty="0" err="1" smtClean="0">
+                          <a:effectLst/>
+                        </a:rPr>
+                        <a:t>тотал</a:t>
+                      </a:r>
+                      <a:endParaRPr lang="ru-RU" sz="1100" b="1" i="0" u="none" strike="noStrike" dirty="0">
+                        <a:solidFill>
+                          <a:srgbClr val="000000"/>
+                        </a:solidFill>
+                        <a:effectLst/>
+                        <a:latin typeface="Calibri" panose="020F0502020204030204" pitchFamily="34" charset="0"/>
+                      </a:endParaRPr>
+                    </a:p>
+                  </a:txBody>
+                  <a:tcPr marL="9525" marR="9525" marT="9525" marB="0" anchor="ctr"/>
+                </a:tc>
+                <a:tc>
+                  <a:txBody>
+                    <a:bodyPr/>
+                    <a:lstStyle/>
+                    <a:p>
+                      <a:pPr algn="ctr" fontAlgn="ctr"/>
+                      <a:r>
+                        <a:rPr lang="en-US" sz="1100" u="none" strike="noStrike" dirty="0" err="1" smtClean="0">
+                          <a:effectLst/>
+                        </a:rPr>
+                        <a:t>visible_pageviews</a:t>
+                      </a:r>
+                      <a:r>
+                        <a:rPr lang="en-US" sz="1100" u="none" strike="noStrike" dirty="0" smtClean="0">
+                          <a:effectLst/>
+                        </a:rPr>
+                        <a:t> </a:t>
+                      </a:r>
+                      <a:r>
+                        <a:rPr lang="en-US" sz="1100" u="none" strike="noStrike" dirty="0">
+                          <a:effectLst/>
+                        </a:rPr>
+                        <a:t>% </a:t>
+                      </a:r>
+                      <a:r>
+                        <a:rPr lang="ru-RU" sz="1100" u="none" strike="noStrike" dirty="0">
+                          <a:effectLst/>
+                        </a:rPr>
+                        <a:t>от </a:t>
+                      </a:r>
+                      <a:r>
+                        <a:rPr lang="ru-RU" sz="1100" u="none" strike="noStrike" dirty="0" err="1">
+                          <a:effectLst/>
+                        </a:rPr>
+                        <a:t>тотал</a:t>
+                      </a:r>
+                      <a:endParaRPr lang="ru-RU" sz="1100" b="1" i="0" u="none" strike="noStrike" dirty="0">
+                        <a:solidFill>
+                          <a:srgbClr val="000000"/>
+                        </a:solidFill>
+                        <a:effectLst/>
+                        <a:latin typeface="Calibri" panose="020F0502020204030204" pitchFamily="34" charset="0"/>
+                      </a:endParaRPr>
+                    </a:p>
+                  </a:txBody>
+                  <a:tcPr marL="9525" marR="9525" marT="9525" marB="0" anchor="ctr"/>
+                </a:tc>
+                <a:tc>
+                  <a:txBody>
+                    <a:bodyPr/>
+                    <a:lstStyle/>
+                    <a:p>
+                      <a:pPr algn="ctr" fontAlgn="ctr"/>
+                      <a:r>
+                        <a:rPr lang="en-US" sz="1100" u="none" strike="noStrike" dirty="0" smtClean="0">
+                          <a:effectLst/>
+                        </a:rPr>
+                        <a:t>Revenue</a:t>
+                      </a:r>
+                      <a:r>
+                        <a:rPr lang="ru-RU" sz="1100" u="none" strike="noStrike" baseline="0" dirty="0" smtClean="0">
+                          <a:effectLst/>
+                        </a:rPr>
+                        <a:t> </a:t>
+                      </a:r>
+                      <a:r>
+                        <a:rPr lang="ru-RU" sz="1100" u="none" strike="noStrike" dirty="0" smtClean="0">
+                          <a:effectLst/>
+                        </a:rPr>
+                        <a:t>% </a:t>
+                      </a:r>
+                      <a:r>
+                        <a:rPr lang="ru-RU" sz="1100" u="none" strike="noStrike" dirty="0">
+                          <a:effectLst/>
+                        </a:rPr>
+                        <a:t>от </a:t>
+                      </a:r>
+                      <a:r>
+                        <a:rPr lang="ru-RU" sz="1100" u="none" strike="noStrike" dirty="0" err="1" smtClean="0">
+                          <a:effectLst/>
+                        </a:rPr>
+                        <a:t>тотал</a:t>
+                      </a:r>
+                      <a:endParaRPr lang="ru-RU" sz="1100" b="1" i="0" u="none" strike="noStrike" dirty="0">
+                        <a:solidFill>
+                          <a:srgbClr val="000000"/>
+                        </a:solidFill>
+                        <a:effectLst/>
+                        <a:latin typeface="Calibri" panose="020F0502020204030204" pitchFamily="34" charset="0"/>
+                      </a:endParaRPr>
+                    </a:p>
+                  </a:txBody>
+                  <a:tcPr marL="9525" marR="9525" marT="9525" marB="0" anchor="ctr"/>
+                </a:tc>
+                <a:tc>
+                  <a:txBody>
+                    <a:bodyPr/>
+                    <a:lstStyle/>
+                    <a:p>
+                      <a:pPr algn="ctr" fontAlgn="ctr"/>
+                      <a:r>
+                        <a:rPr lang="en-US" sz="1100" u="none" strike="noStrike" dirty="0" err="1" smtClean="0">
+                          <a:effectLst/>
+                        </a:rPr>
+                        <a:t>sponsord_clicks</a:t>
+                      </a:r>
+                      <a:r>
+                        <a:rPr lang="en-US" sz="1100" u="none" strike="noStrike" dirty="0" smtClean="0">
+                          <a:effectLst/>
+                        </a:rPr>
+                        <a:t>, </a:t>
+                      </a:r>
+                      <a:r>
+                        <a:rPr lang="en-US" sz="1100" u="none" strike="noStrike" dirty="0">
+                          <a:effectLst/>
+                        </a:rPr>
+                        <a:t>% </a:t>
+                      </a:r>
+                      <a:r>
+                        <a:rPr lang="ru-RU" sz="1100" u="none" strike="noStrike" dirty="0">
+                          <a:effectLst/>
+                        </a:rPr>
+                        <a:t>от </a:t>
+                      </a:r>
+                      <a:r>
+                        <a:rPr lang="ru-RU" sz="1100" u="none" strike="noStrike" dirty="0" err="1" smtClean="0">
+                          <a:effectLst/>
+                        </a:rPr>
+                        <a:t>тотал</a:t>
+                      </a:r>
+                      <a:endParaRPr lang="ru-RU" sz="1100" b="1" i="0" u="none" strike="noStrike" dirty="0">
+                        <a:solidFill>
+                          <a:srgbClr val="000000"/>
+                        </a:solidFill>
+                        <a:effectLst/>
+                        <a:latin typeface="Calibri" panose="020F0502020204030204" pitchFamily="34" charset="0"/>
+                      </a:endParaRPr>
+                    </a:p>
+                  </a:txBody>
+                  <a:tcPr marL="9525" marR="9525" marT="9525" marB="0" anchor="ctr"/>
+                </a:tc>
+                <a:tc>
+                  <a:txBody>
+                    <a:bodyPr/>
+                    <a:lstStyle/>
+                    <a:p>
+                      <a:pPr algn="ctr" fontAlgn="ctr"/>
+                      <a:r>
+                        <a:rPr lang="en-US" sz="1100" u="none" strike="noStrike" dirty="0">
+                          <a:effectLst/>
+                        </a:rPr>
+                        <a:t>CPC,A</a:t>
+                      </a:r>
+                      <a:endParaRPr lang="en-US" sz="1100" b="1" i="0" u="none" strike="noStrike" dirty="0">
+                        <a:solidFill>
+                          <a:srgbClr val="000000"/>
+                        </a:solidFill>
+                        <a:effectLst/>
+                        <a:latin typeface="Calibri" panose="020F0502020204030204" pitchFamily="34" charset="0"/>
+                      </a:endParaRPr>
+                    </a:p>
+                  </a:txBody>
+                  <a:tcPr marL="9525" marR="9525" marT="9525" marB="0" anchor="ctr"/>
+                </a:tc>
+                <a:extLst>
+                  <a:ext uri="{0D108BD9-81ED-4DB2-BD59-A6C34878D82A}">
+                    <a16:rowId xmlns:a16="http://schemas.microsoft.com/office/drawing/2014/main" val="3225280426"/>
+                  </a:ext>
+                </a:extLst>
+              </a:tr>
+              <a:tr h="177248">
+                <a:tc>
+                  <a:txBody>
+                    <a:bodyPr/>
+                    <a:lstStyle/>
+                    <a:p>
+                      <a:pPr algn="ctr" fontAlgn="ctr"/>
+                      <a:r>
+                        <a:rPr lang="ru-RU" sz="1200" b="1" u="none" strike="noStrike" dirty="0">
+                          <a:effectLst/>
+                        </a:rPr>
+                        <a:t>101</a:t>
+                      </a:r>
+                      <a:endParaRPr lang="ru-RU" sz="1200" b="1" i="0" u="none" strike="noStrike" dirty="0">
+                        <a:solidFill>
+                          <a:srgbClr val="000000"/>
+                        </a:solidFill>
+                        <a:effectLst/>
+                        <a:latin typeface="Calibri" panose="020F0502020204030204" pitchFamily="34" charset="0"/>
+                      </a:endParaRPr>
+                    </a:p>
+                  </a:txBody>
+                  <a:tcPr marL="9525" marR="9525" marT="9525" marB="0" anchor="ctr"/>
+                </a:tc>
+                <a:tc>
+                  <a:txBody>
+                    <a:bodyPr/>
+                    <a:lstStyle/>
+                    <a:p>
+                      <a:pPr algn="ctr" fontAlgn="b"/>
+                      <a:r>
+                        <a:rPr lang="ru-RU" sz="1100" b="1" u="none" strike="noStrike" dirty="0">
+                          <a:effectLst/>
+                        </a:rPr>
+                        <a:t>18,4%</a:t>
+                      </a:r>
+                      <a:endParaRPr lang="ru-RU" sz="1100" b="1" i="0" u="none" strike="noStrike" dirty="0">
+                        <a:solidFill>
+                          <a:srgbClr val="000000"/>
+                        </a:solidFill>
+                        <a:effectLst/>
+                        <a:latin typeface="Calibri" panose="020F0502020204030204" pitchFamily="34" charset="0"/>
+                      </a:endParaRPr>
+                    </a:p>
+                  </a:txBody>
+                  <a:tcPr marL="9525" marR="9525" marT="9525" marB="0" anchor="b"/>
+                </a:tc>
+                <a:tc>
+                  <a:txBody>
+                    <a:bodyPr/>
+                    <a:lstStyle/>
+                    <a:p>
+                      <a:pPr algn="ctr" fontAlgn="b"/>
+                      <a:r>
+                        <a:rPr lang="ru-RU" sz="1100" b="1" u="none" strike="noStrike">
+                          <a:effectLst/>
+                        </a:rPr>
+                        <a:t>16,7%</a:t>
+                      </a:r>
+                      <a:endParaRPr lang="ru-RU" sz="1100" b="1" i="0" u="none" strike="noStrike">
+                        <a:solidFill>
+                          <a:srgbClr val="000000"/>
+                        </a:solidFill>
+                        <a:effectLst/>
+                        <a:latin typeface="Calibri" panose="020F0502020204030204" pitchFamily="34" charset="0"/>
+                      </a:endParaRPr>
+                    </a:p>
+                  </a:txBody>
+                  <a:tcPr marL="9525" marR="9525" marT="9525" marB="0" anchor="b"/>
+                </a:tc>
+                <a:tc>
+                  <a:txBody>
+                    <a:bodyPr/>
+                    <a:lstStyle/>
+                    <a:p>
+                      <a:pPr algn="ctr" fontAlgn="b"/>
+                      <a:r>
+                        <a:rPr lang="ru-RU" sz="1100" b="1" u="none" strike="noStrike">
+                          <a:effectLst/>
+                        </a:rPr>
+                        <a:t>21,3%</a:t>
+                      </a:r>
+                      <a:endParaRPr lang="ru-RU" sz="1100" b="1" i="0" u="none" strike="noStrike">
+                        <a:solidFill>
+                          <a:srgbClr val="000000"/>
+                        </a:solidFill>
+                        <a:effectLst/>
+                        <a:latin typeface="Calibri" panose="020F0502020204030204" pitchFamily="34" charset="0"/>
+                      </a:endParaRPr>
+                    </a:p>
+                  </a:txBody>
+                  <a:tcPr marL="9525" marR="9525" marT="9525" marB="0" anchor="b"/>
+                </a:tc>
+                <a:tc>
+                  <a:txBody>
+                    <a:bodyPr/>
+                    <a:lstStyle/>
+                    <a:p>
+                      <a:pPr algn="ctr" fontAlgn="b"/>
+                      <a:r>
+                        <a:rPr lang="ru-RU" sz="1100" b="1" u="none" strike="noStrike">
+                          <a:effectLst/>
+                        </a:rPr>
+                        <a:t>16,8%</a:t>
+                      </a:r>
+                      <a:endParaRPr lang="ru-RU" sz="1100" b="1" i="0" u="none" strike="noStrike">
+                        <a:solidFill>
+                          <a:srgbClr val="000000"/>
+                        </a:solidFill>
+                        <a:effectLst/>
+                        <a:latin typeface="Calibri" panose="020F0502020204030204" pitchFamily="34" charset="0"/>
+                      </a:endParaRPr>
+                    </a:p>
+                  </a:txBody>
+                  <a:tcPr marL="9525" marR="9525" marT="9525" marB="0" anchor="b"/>
+                </a:tc>
+                <a:tc>
+                  <a:txBody>
+                    <a:bodyPr/>
+                    <a:lstStyle/>
+                    <a:p>
+                      <a:pPr algn="ctr" fontAlgn="b"/>
+                      <a:r>
+                        <a:rPr lang="ru-RU" sz="1100" b="1" u="none" strike="noStrike">
+                          <a:effectLst/>
+                        </a:rPr>
+                        <a:t>0,11</a:t>
+                      </a:r>
+                      <a:endParaRPr lang="ru-RU" sz="1100" b="1" i="0" u="none" strike="noStrike">
+                        <a:solidFill>
+                          <a:srgbClr val="000000"/>
+                        </a:solidFill>
+                        <a:effectLst/>
+                        <a:latin typeface="Calibri" panose="020F0502020204030204" pitchFamily="34" charset="0"/>
+                      </a:endParaRPr>
+                    </a:p>
+                  </a:txBody>
+                  <a:tcPr marL="9525" marR="9525" marT="9525" marB="0" anchor="b"/>
+                </a:tc>
+                <a:extLst>
+                  <a:ext uri="{0D108BD9-81ED-4DB2-BD59-A6C34878D82A}">
+                    <a16:rowId xmlns:a16="http://schemas.microsoft.com/office/drawing/2014/main" val="4268263604"/>
+                  </a:ext>
+                </a:extLst>
+              </a:tr>
+              <a:tr h="177248">
+                <a:tc>
+                  <a:txBody>
+                    <a:bodyPr/>
+                    <a:lstStyle/>
+                    <a:p>
+                      <a:pPr algn="ctr" fontAlgn="ctr"/>
+                      <a:r>
+                        <a:rPr lang="ru-RU" sz="1200" b="1" u="none" strike="noStrike" dirty="0">
+                          <a:effectLst/>
+                        </a:rPr>
+                        <a:t>106</a:t>
+                      </a:r>
+                      <a:endParaRPr lang="ru-RU" sz="1200" b="1" i="0" u="none" strike="noStrike" dirty="0">
+                        <a:solidFill>
+                          <a:srgbClr val="000000"/>
+                        </a:solidFill>
+                        <a:effectLst/>
+                        <a:latin typeface="Calibri" panose="020F0502020204030204" pitchFamily="34" charset="0"/>
+                      </a:endParaRPr>
+                    </a:p>
+                  </a:txBody>
+                  <a:tcPr marL="9525" marR="9525" marT="9525" marB="0" anchor="ctr"/>
+                </a:tc>
+                <a:tc>
+                  <a:txBody>
+                    <a:bodyPr/>
+                    <a:lstStyle/>
+                    <a:p>
+                      <a:pPr algn="ctr" fontAlgn="b"/>
+                      <a:r>
+                        <a:rPr lang="ru-RU" sz="1100" b="1" u="none" strike="noStrike" dirty="0">
+                          <a:effectLst/>
+                        </a:rPr>
+                        <a:t>17,0%</a:t>
+                      </a:r>
+                      <a:endParaRPr lang="ru-RU" sz="1100" b="1" i="0" u="none" strike="noStrike" dirty="0">
+                        <a:solidFill>
+                          <a:srgbClr val="000000"/>
+                        </a:solidFill>
+                        <a:effectLst/>
+                        <a:latin typeface="Calibri" panose="020F0502020204030204" pitchFamily="34" charset="0"/>
+                      </a:endParaRPr>
+                    </a:p>
+                  </a:txBody>
+                  <a:tcPr marL="9525" marR="9525" marT="9525" marB="0" anchor="b"/>
+                </a:tc>
+                <a:tc>
+                  <a:txBody>
+                    <a:bodyPr/>
+                    <a:lstStyle/>
+                    <a:p>
+                      <a:pPr algn="ctr" fontAlgn="b"/>
+                      <a:r>
+                        <a:rPr lang="ru-RU" sz="1100" b="1" u="none" strike="noStrike" dirty="0">
+                          <a:effectLst/>
+                        </a:rPr>
+                        <a:t>33,5%</a:t>
+                      </a:r>
+                      <a:endParaRPr lang="ru-RU" sz="1100" b="1" i="0" u="none" strike="noStrike" dirty="0">
+                        <a:solidFill>
+                          <a:srgbClr val="000000"/>
+                        </a:solidFill>
+                        <a:effectLst/>
+                        <a:latin typeface="Calibri" panose="020F0502020204030204" pitchFamily="34" charset="0"/>
+                      </a:endParaRPr>
+                    </a:p>
+                  </a:txBody>
+                  <a:tcPr marL="9525" marR="9525" marT="9525" marB="0" anchor="b"/>
+                </a:tc>
+                <a:tc>
+                  <a:txBody>
+                    <a:bodyPr/>
+                    <a:lstStyle/>
+                    <a:p>
+                      <a:pPr algn="ctr" fontAlgn="b"/>
+                      <a:r>
+                        <a:rPr lang="ru-RU" sz="1100" b="1" u="none" strike="noStrike" dirty="0">
+                          <a:effectLst/>
+                        </a:rPr>
+                        <a:t>13,0%</a:t>
+                      </a:r>
+                      <a:endParaRPr lang="ru-RU" sz="1100" b="1" i="0" u="none" strike="noStrike" dirty="0">
+                        <a:solidFill>
+                          <a:srgbClr val="000000"/>
+                        </a:solidFill>
+                        <a:effectLst/>
+                        <a:latin typeface="Calibri" panose="020F0502020204030204" pitchFamily="34" charset="0"/>
+                      </a:endParaRPr>
+                    </a:p>
+                  </a:txBody>
+                  <a:tcPr marL="9525" marR="9525" marT="9525" marB="0" anchor="b"/>
+                </a:tc>
+                <a:tc>
+                  <a:txBody>
+                    <a:bodyPr/>
+                    <a:lstStyle/>
+                    <a:p>
+                      <a:pPr algn="ctr" fontAlgn="b"/>
+                      <a:r>
+                        <a:rPr lang="ru-RU" sz="1100" b="1" u="none" strike="noStrike" dirty="0">
+                          <a:effectLst/>
+                        </a:rPr>
+                        <a:t>38,9%</a:t>
+                      </a:r>
+                      <a:endParaRPr lang="ru-RU" sz="1100" b="1" i="0" u="none" strike="noStrike" dirty="0">
+                        <a:solidFill>
+                          <a:srgbClr val="000000"/>
+                        </a:solidFill>
+                        <a:effectLst/>
+                        <a:latin typeface="Calibri" panose="020F0502020204030204" pitchFamily="34" charset="0"/>
+                      </a:endParaRPr>
+                    </a:p>
+                  </a:txBody>
+                  <a:tcPr marL="9525" marR="9525" marT="9525" marB="0" anchor="b"/>
+                </a:tc>
+                <a:tc>
+                  <a:txBody>
+                    <a:bodyPr/>
+                    <a:lstStyle/>
+                    <a:p>
+                      <a:pPr algn="ctr" fontAlgn="b"/>
+                      <a:r>
+                        <a:rPr lang="ru-RU" sz="1100" b="1" u="none" strike="noStrike">
+                          <a:effectLst/>
+                        </a:rPr>
+                        <a:t>0,03</a:t>
+                      </a:r>
+                      <a:endParaRPr lang="ru-RU" sz="1100" b="1" i="0" u="none" strike="noStrike">
+                        <a:solidFill>
+                          <a:srgbClr val="000000"/>
+                        </a:solidFill>
+                        <a:effectLst/>
+                        <a:latin typeface="Calibri" panose="020F0502020204030204" pitchFamily="34" charset="0"/>
+                      </a:endParaRPr>
+                    </a:p>
+                  </a:txBody>
+                  <a:tcPr marL="9525" marR="9525" marT="9525" marB="0" anchor="b"/>
+                </a:tc>
+                <a:extLst>
+                  <a:ext uri="{0D108BD9-81ED-4DB2-BD59-A6C34878D82A}">
+                    <a16:rowId xmlns:a16="http://schemas.microsoft.com/office/drawing/2014/main" val="2771539292"/>
+                  </a:ext>
+                </a:extLst>
+              </a:tr>
+              <a:tr h="177248">
+                <a:tc>
+                  <a:txBody>
+                    <a:bodyPr/>
+                    <a:lstStyle/>
+                    <a:p>
+                      <a:pPr algn="ctr" fontAlgn="ctr"/>
+                      <a:r>
+                        <a:rPr lang="ru-RU" sz="1200" b="1" u="none" strike="noStrike" dirty="0">
+                          <a:solidFill>
+                            <a:srgbClr val="00B050"/>
+                          </a:solidFill>
+                          <a:effectLst/>
+                        </a:rPr>
+                        <a:t>111</a:t>
+                      </a:r>
+                      <a:endParaRPr lang="ru-RU" sz="1200" b="1" i="0" u="none" strike="noStrike" dirty="0">
+                        <a:solidFill>
+                          <a:srgbClr val="00B050"/>
+                        </a:solidFill>
+                        <a:effectLst/>
+                        <a:latin typeface="Calibri" panose="020F0502020204030204" pitchFamily="34" charset="0"/>
+                      </a:endParaRPr>
+                    </a:p>
+                  </a:txBody>
+                  <a:tcPr marL="9525" marR="9525" marT="9525" marB="0" anchor="ctr"/>
+                </a:tc>
+                <a:tc>
+                  <a:txBody>
+                    <a:bodyPr/>
+                    <a:lstStyle/>
+                    <a:p>
+                      <a:pPr algn="ctr" fontAlgn="b"/>
+                      <a:r>
+                        <a:rPr lang="ru-RU" sz="1100" b="1" u="none" strike="noStrike" dirty="0">
+                          <a:solidFill>
+                            <a:srgbClr val="00B050"/>
+                          </a:solidFill>
+                          <a:effectLst/>
+                        </a:rPr>
+                        <a:t>14,1%</a:t>
+                      </a:r>
+                      <a:endParaRPr lang="ru-RU" sz="1100" b="1" i="0" u="none" strike="noStrike" dirty="0">
+                        <a:solidFill>
+                          <a:srgbClr val="00B050"/>
+                        </a:solidFill>
+                        <a:effectLst/>
+                        <a:latin typeface="Calibri" panose="020F0502020204030204" pitchFamily="34" charset="0"/>
+                      </a:endParaRPr>
+                    </a:p>
+                  </a:txBody>
+                  <a:tcPr marL="9525" marR="9525" marT="9525" marB="0" anchor="b"/>
+                </a:tc>
+                <a:tc>
+                  <a:txBody>
+                    <a:bodyPr/>
+                    <a:lstStyle/>
+                    <a:p>
+                      <a:pPr algn="ctr" fontAlgn="b"/>
+                      <a:r>
+                        <a:rPr lang="ru-RU" sz="1100" b="1" u="none" strike="noStrike" dirty="0">
+                          <a:solidFill>
+                            <a:srgbClr val="00B050"/>
+                          </a:solidFill>
+                          <a:effectLst/>
+                        </a:rPr>
+                        <a:t>16,7%</a:t>
+                      </a:r>
+                      <a:endParaRPr lang="ru-RU" sz="1100" b="1" i="0" u="none" strike="noStrike" dirty="0">
+                        <a:solidFill>
+                          <a:srgbClr val="00B050"/>
+                        </a:solidFill>
+                        <a:effectLst/>
+                        <a:latin typeface="Calibri" panose="020F0502020204030204" pitchFamily="34" charset="0"/>
+                      </a:endParaRPr>
+                    </a:p>
+                  </a:txBody>
+                  <a:tcPr marL="9525" marR="9525" marT="9525" marB="0" anchor="b"/>
+                </a:tc>
+                <a:tc>
+                  <a:txBody>
+                    <a:bodyPr/>
+                    <a:lstStyle/>
+                    <a:p>
+                      <a:pPr algn="ctr" fontAlgn="b"/>
+                      <a:r>
+                        <a:rPr lang="ru-RU" sz="1100" b="1" u="none" strike="noStrike" dirty="0">
+                          <a:solidFill>
+                            <a:srgbClr val="00B050"/>
+                          </a:solidFill>
+                          <a:effectLst/>
+                        </a:rPr>
+                        <a:t>49,0%</a:t>
+                      </a:r>
+                      <a:endParaRPr lang="ru-RU" sz="1100" b="1" i="0" u="none" strike="noStrike" dirty="0">
+                        <a:solidFill>
+                          <a:srgbClr val="00B050"/>
+                        </a:solidFill>
+                        <a:effectLst/>
+                        <a:latin typeface="Calibri" panose="020F0502020204030204" pitchFamily="34" charset="0"/>
+                      </a:endParaRPr>
+                    </a:p>
+                  </a:txBody>
+                  <a:tcPr marL="9525" marR="9525" marT="9525" marB="0" anchor="b"/>
+                </a:tc>
+                <a:tc>
+                  <a:txBody>
+                    <a:bodyPr/>
+                    <a:lstStyle/>
+                    <a:p>
+                      <a:pPr algn="ctr" fontAlgn="b"/>
+                      <a:r>
+                        <a:rPr lang="ru-RU" sz="1100" b="1" u="none" strike="noStrike" dirty="0">
+                          <a:solidFill>
+                            <a:srgbClr val="00B050"/>
+                          </a:solidFill>
+                          <a:effectLst/>
+                        </a:rPr>
+                        <a:t>20,6%</a:t>
+                      </a:r>
+                      <a:endParaRPr lang="ru-RU" sz="1100" b="1" i="0" u="none" strike="noStrike" dirty="0">
+                        <a:solidFill>
+                          <a:srgbClr val="00B050"/>
+                        </a:solidFill>
+                        <a:effectLst/>
+                        <a:latin typeface="Calibri" panose="020F0502020204030204" pitchFamily="34" charset="0"/>
+                      </a:endParaRPr>
+                    </a:p>
+                  </a:txBody>
+                  <a:tcPr marL="9525" marR="9525" marT="9525" marB="0" anchor="b"/>
+                </a:tc>
+                <a:tc>
+                  <a:txBody>
+                    <a:bodyPr/>
+                    <a:lstStyle/>
+                    <a:p>
+                      <a:pPr algn="ctr" fontAlgn="b"/>
+                      <a:r>
+                        <a:rPr lang="ru-RU" sz="1100" b="1" u="none" strike="noStrike" dirty="0">
+                          <a:solidFill>
+                            <a:srgbClr val="00B050"/>
+                          </a:solidFill>
+                          <a:effectLst/>
+                        </a:rPr>
+                        <a:t>0,21</a:t>
+                      </a:r>
+                      <a:endParaRPr lang="ru-RU" sz="1100" b="1" i="0" u="none" strike="noStrike" dirty="0">
+                        <a:solidFill>
+                          <a:srgbClr val="00B050"/>
+                        </a:solidFill>
+                        <a:effectLst/>
+                        <a:latin typeface="Calibri" panose="020F0502020204030204" pitchFamily="34" charset="0"/>
+                      </a:endParaRPr>
+                    </a:p>
+                  </a:txBody>
+                  <a:tcPr marL="9525" marR="9525" marT="9525" marB="0" anchor="b"/>
+                </a:tc>
+                <a:extLst>
+                  <a:ext uri="{0D108BD9-81ED-4DB2-BD59-A6C34878D82A}">
+                    <a16:rowId xmlns:a16="http://schemas.microsoft.com/office/drawing/2014/main" val="2768880754"/>
+                  </a:ext>
+                </a:extLst>
+              </a:tr>
+              <a:tr h="177248">
+                <a:tc>
+                  <a:txBody>
+                    <a:bodyPr/>
+                    <a:lstStyle/>
+                    <a:p>
+                      <a:pPr algn="ctr" fontAlgn="ctr"/>
+                      <a:r>
+                        <a:rPr lang="ru-RU" sz="1200" b="1" u="none" strike="noStrike" dirty="0">
+                          <a:solidFill>
+                            <a:srgbClr val="FF0000"/>
+                          </a:solidFill>
+                          <a:effectLst/>
+                        </a:rPr>
+                        <a:t>123</a:t>
+                      </a:r>
+                      <a:endParaRPr lang="ru-RU" sz="1200" b="1" i="0" u="none" strike="noStrike" dirty="0">
+                        <a:solidFill>
+                          <a:srgbClr val="FF0000"/>
+                        </a:solidFill>
+                        <a:effectLst/>
+                        <a:latin typeface="Calibri" panose="020F0502020204030204" pitchFamily="34" charset="0"/>
+                      </a:endParaRPr>
+                    </a:p>
+                  </a:txBody>
+                  <a:tcPr marL="9525" marR="9525" marT="9525" marB="0" anchor="ctr"/>
+                </a:tc>
+                <a:tc>
+                  <a:txBody>
+                    <a:bodyPr/>
+                    <a:lstStyle/>
+                    <a:p>
+                      <a:pPr algn="ctr" fontAlgn="b"/>
+                      <a:r>
+                        <a:rPr lang="ru-RU" sz="1100" b="1" u="none" strike="noStrike">
+                          <a:solidFill>
+                            <a:srgbClr val="FF0000"/>
+                          </a:solidFill>
+                          <a:effectLst/>
+                        </a:rPr>
+                        <a:t>23,5%</a:t>
+                      </a:r>
+                      <a:endParaRPr lang="ru-RU" sz="1100" b="1" i="0" u="none" strike="noStrike">
+                        <a:solidFill>
+                          <a:srgbClr val="FF0000"/>
+                        </a:solidFill>
+                        <a:effectLst/>
+                        <a:latin typeface="Calibri" panose="020F0502020204030204" pitchFamily="34" charset="0"/>
+                      </a:endParaRPr>
+                    </a:p>
+                  </a:txBody>
+                  <a:tcPr marL="9525" marR="9525" marT="9525" marB="0" anchor="b"/>
+                </a:tc>
+                <a:tc>
+                  <a:txBody>
+                    <a:bodyPr/>
+                    <a:lstStyle/>
+                    <a:p>
+                      <a:pPr algn="ctr" fontAlgn="b"/>
+                      <a:r>
+                        <a:rPr lang="ru-RU" sz="1100" b="1" u="none" strike="noStrike">
+                          <a:solidFill>
+                            <a:srgbClr val="FF0000"/>
+                          </a:solidFill>
+                          <a:effectLst/>
+                        </a:rPr>
+                        <a:t>11,0%</a:t>
+                      </a:r>
+                      <a:endParaRPr lang="ru-RU" sz="1100" b="1" i="0" u="none" strike="noStrike">
+                        <a:solidFill>
+                          <a:srgbClr val="FF0000"/>
+                        </a:solidFill>
+                        <a:effectLst/>
+                        <a:latin typeface="Calibri" panose="020F0502020204030204" pitchFamily="34" charset="0"/>
+                      </a:endParaRPr>
+                    </a:p>
+                  </a:txBody>
+                  <a:tcPr marL="9525" marR="9525" marT="9525" marB="0" anchor="b"/>
+                </a:tc>
+                <a:tc>
+                  <a:txBody>
+                    <a:bodyPr/>
+                    <a:lstStyle/>
+                    <a:p>
+                      <a:pPr algn="ctr" fontAlgn="b"/>
+                      <a:r>
+                        <a:rPr lang="ru-RU" sz="1100" b="1" u="none" strike="noStrike">
+                          <a:solidFill>
+                            <a:srgbClr val="FF0000"/>
+                          </a:solidFill>
+                          <a:effectLst/>
+                        </a:rPr>
+                        <a:t>7,1%</a:t>
+                      </a:r>
+                      <a:endParaRPr lang="ru-RU" sz="1100" b="1" i="0" u="none" strike="noStrike">
+                        <a:solidFill>
+                          <a:srgbClr val="FF0000"/>
+                        </a:solidFill>
+                        <a:effectLst/>
+                        <a:latin typeface="Calibri" panose="020F0502020204030204" pitchFamily="34" charset="0"/>
+                      </a:endParaRPr>
+                    </a:p>
+                  </a:txBody>
+                  <a:tcPr marL="9525" marR="9525" marT="9525" marB="0" anchor="b"/>
+                </a:tc>
+                <a:tc>
+                  <a:txBody>
+                    <a:bodyPr/>
+                    <a:lstStyle/>
+                    <a:p>
+                      <a:pPr algn="ctr" fontAlgn="b"/>
+                      <a:r>
+                        <a:rPr lang="ru-RU" sz="1100" b="1" u="none" strike="noStrike">
+                          <a:solidFill>
+                            <a:srgbClr val="FF0000"/>
+                          </a:solidFill>
+                          <a:effectLst/>
+                        </a:rPr>
+                        <a:t>14,5%</a:t>
+                      </a:r>
+                      <a:endParaRPr lang="ru-RU" sz="1100" b="1" i="0" u="none" strike="noStrike">
+                        <a:solidFill>
+                          <a:srgbClr val="FF0000"/>
+                        </a:solidFill>
+                        <a:effectLst/>
+                        <a:latin typeface="Calibri" panose="020F0502020204030204" pitchFamily="34" charset="0"/>
+                      </a:endParaRPr>
+                    </a:p>
+                  </a:txBody>
+                  <a:tcPr marL="9525" marR="9525" marT="9525" marB="0" anchor="b"/>
+                </a:tc>
+                <a:tc>
+                  <a:txBody>
+                    <a:bodyPr/>
+                    <a:lstStyle/>
+                    <a:p>
+                      <a:pPr algn="ctr" fontAlgn="b"/>
+                      <a:r>
+                        <a:rPr lang="ru-RU" sz="1100" b="1" u="none" strike="noStrike" dirty="0">
+                          <a:solidFill>
+                            <a:srgbClr val="FF0000"/>
+                          </a:solidFill>
+                          <a:effectLst/>
+                        </a:rPr>
+                        <a:t>0,04</a:t>
+                      </a:r>
+                      <a:endParaRPr lang="ru-RU" sz="1100" b="1" i="0" u="none" strike="noStrike" dirty="0">
+                        <a:solidFill>
+                          <a:srgbClr val="FF0000"/>
+                        </a:solidFill>
+                        <a:effectLst/>
+                        <a:latin typeface="Calibri" panose="020F0502020204030204" pitchFamily="34" charset="0"/>
+                      </a:endParaRPr>
+                    </a:p>
+                  </a:txBody>
+                  <a:tcPr marL="9525" marR="9525" marT="9525" marB="0" anchor="b"/>
+                </a:tc>
+                <a:extLst>
+                  <a:ext uri="{0D108BD9-81ED-4DB2-BD59-A6C34878D82A}">
+                    <a16:rowId xmlns:a16="http://schemas.microsoft.com/office/drawing/2014/main" val="1057701842"/>
+                  </a:ext>
+                </a:extLst>
+              </a:tr>
+              <a:tr h="177248">
+                <a:tc>
+                  <a:txBody>
+                    <a:bodyPr/>
+                    <a:lstStyle/>
+                    <a:p>
+                      <a:pPr algn="ctr" fontAlgn="ctr"/>
+                      <a:r>
+                        <a:rPr lang="ru-RU" sz="1200" b="1" u="none" strike="noStrike" dirty="0">
+                          <a:solidFill>
+                            <a:srgbClr val="FF0000"/>
+                          </a:solidFill>
+                          <a:effectLst/>
+                        </a:rPr>
+                        <a:t>373</a:t>
+                      </a:r>
+                      <a:endParaRPr lang="ru-RU" sz="1200" b="1" i="0" u="none" strike="noStrike" dirty="0">
+                        <a:solidFill>
+                          <a:srgbClr val="FF0000"/>
+                        </a:solidFill>
+                        <a:effectLst/>
+                        <a:latin typeface="Calibri" panose="020F0502020204030204" pitchFamily="34" charset="0"/>
+                      </a:endParaRPr>
+                    </a:p>
+                  </a:txBody>
+                  <a:tcPr marL="9525" marR="9525" marT="9525" marB="0" anchor="ctr"/>
+                </a:tc>
+                <a:tc>
+                  <a:txBody>
+                    <a:bodyPr/>
+                    <a:lstStyle/>
+                    <a:p>
+                      <a:pPr algn="ctr" fontAlgn="b"/>
+                      <a:r>
+                        <a:rPr lang="ru-RU" sz="1100" b="1" u="none" strike="noStrike" dirty="0">
+                          <a:solidFill>
+                            <a:srgbClr val="FF0000"/>
+                          </a:solidFill>
+                          <a:effectLst/>
+                        </a:rPr>
+                        <a:t>27,1%</a:t>
+                      </a:r>
+                      <a:endParaRPr lang="ru-RU" sz="1100" b="1" i="0" u="none" strike="noStrike" dirty="0">
+                        <a:solidFill>
+                          <a:srgbClr val="FF0000"/>
+                        </a:solidFill>
+                        <a:effectLst/>
+                        <a:latin typeface="Calibri" panose="020F0502020204030204" pitchFamily="34" charset="0"/>
+                      </a:endParaRPr>
+                    </a:p>
+                  </a:txBody>
+                  <a:tcPr marL="9525" marR="9525" marT="9525" marB="0" anchor="b"/>
+                </a:tc>
+                <a:tc>
+                  <a:txBody>
+                    <a:bodyPr/>
+                    <a:lstStyle/>
+                    <a:p>
+                      <a:pPr algn="ctr" fontAlgn="b"/>
+                      <a:r>
+                        <a:rPr lang="ru-RU" sz="1100" b="1" u="none" strike="noStrike" dirty="0">
+                          <a:solidFill>
+                            <a:srgbClr val="FF0000"/>
+                          </a:solidFill>
+                          <a:effectLst/>
+                        </a:rPr>
+                        <a:t>22,2%</a:t>
+                      </a:r>
+                      <a:endParaRPr lang="ru-RU" sz="1100" b="1" i="0" u="none" strike="noStrike" dirty="0">
+                        <a:solidFill>
+                          <a:srgbClr val="FF0000"/>
+                        </a:solidFill>
+                        <a:effectLst/>
+                        <a:latin typeface="Calibri" panose="020F0502020204030204" pitchFamily="34" charset="0"/>
+                      </a:endParaRPr>
+                    </a:p>
+                  </a:txBody>
+                  <a:tcPr marL="9525" marR="9525" marT="9525" marB="0" anchor="b"/>
+                </a:tc>
+                <a:tc>
+                  <a:txBody>
+                    <a:bodyPr/>
+                    <a:lstStyle/>
+                    <a:p>
+                      <a:pPr algn="ctr" fontAlgn="b"/>
+                      <a:r>
+                        <a:rPr lang="ru-RU" sz="1100" b="1" u="none" strike="noStrike" dirty="0">
+                          <a:solidFill>
+                            <a:srgbClr val="FF0000"/>
+                          </a:solidFill>
+                          <a:effectLst/>
+                        </a:rPr>
+                        <a:t>9,6%</a:t>
+                      </a:r>
+                      <a:endParaRPr lang="ru-RU" sz="1100" b="1" i="0" u="none" strike="noStrike" dirty="0">
+                        <a:solidFill>
+                          <a:srgbClr val="FF0000"/>
+                        </a:solidFill>
+                        <a:effectLst/>
+                        <a:latin typeface="Calibri" panose="020F0502020204030204" pitchFamily="34" charset="0"/>
+                      </a:endParaRPr>
+                    </a:p>
+                  </a:txBody>
+                  <a:tcPr marL="9525" marR="9525" marT="9525" marB="0" anchor="b"/>
+                </a:tc>
+                <a:tc>
+                  <a:txBody>
+                    <a:bodyPr/>
+                    <a:lstStyle/>
+                    <a:p>
+                      <a:pPr algn="ctr" fontAlgn="b"/>
+                      <a:r>
+                        <a:rPr lang="ru-RU" sz="1100" b="1" u="none" strike="noStrike" dirty="0">
+                          <a:solidFill>
+                            <a:srgbClr val="FF0000"/>
+                          </a:solidFill>
+                          <a:effectLst/>
+                        </a:rPr>
+                        <a:t>9,2%</a:t>
+                      </a:r>
+                      <a:endParaRPr lang="ru-RU" sz="1100" b="1" i="0" u="none" strike="noStrike" dirty="0">
+                        <a:solidFill>
+                          <a:srgbClr val="FF0000"/>
+                        </a:solidFill>
+                        <a:effectLst/>
+                        <a:latin typeface="Calibri" panose="020F0502020204030204" pitchFamily="34" charset="0"/>
+                      </a:endParaRPr>
+                    </a:p>
+                  </a:txBody>
+                  <a:tcPr marL="9525" marR="9525" marT="9525" marB="0" anchor="b"/>
+                </a:tc>
+                <a:tc>
+                  <a:txBody>
+                    <a:bodyPr/>
+                    <a:lstStyle/>
+                    <a:p>
+                      <a:pPr algn="ctr" fontAlgn="b"/>
+                      <a:r>
+                        <a:rPr lang="ru-RU" sz="1100" b="1" u="none" strike="noStrike" dirty="0">
+                          <a:solidFill>
+                            <a:srgbClr val="FF0000"/>
+                          </a:solidFill>
+                          <a:effectLst/>
+                        </a:rPr>
+                        <a:t>0,09</a:t>
+                      </a:r>
+                      <a:endParaRPr lang="ru-RU" sz="1100" b="1" i="0" u="none" strike="noStrike" dirty="0">
+                        <a:solidFill>
+                          <a:srgbClr val="FF0000"/>
+                        </a:solidFill>
+                        <a:effectLst/>
+                        <a:latin typeface="Calibri" panose="020F0502020204030204" pitchFamily="34" charset="0"/>
+                      </a:endParaRPr>
+                    </a:p>
+                  </a:txBody>
+                  <a:tcPr marL="9525" marR="9525" marT="9525" marB="0" anchor="b"/>
+                </a:tc>
+                <a:extLst>
+                  <a:ext uri="{0D108BD9-81ED-4DB2-BD59-A6C34878D82A}">
+                    <a16:rowId xmlns:a16="http://schemas.microsoft.com/office/drawing/2014/main" val="4064557168"/>
+                  </a:ext>
+                </a:extLst>
+              </a:tr>
+            </a:tbl>
+          </a:graphicData>
+        </a:graphic>
+      </p:graphicFrame>
+      <p:sp>
+        <p:nvSpPr>
+          <p:cNvPr id="7" name="Объект 4"/>
+          <p:cNvSpPr txBox="1">
+            <a:spLocks/>
+          </p:cNvSpPr>
+          <p:nvPr/>
+        </p:nvSpPr>
+        <p:spPr>
+          <a:xfrm>
+            <a:off x="906089" y="1333154"/>
             <a:ext cx="2177935" cy="364910"/>
           </a:xfrm>
           <a:prstGeom prst="rect">
@@ -4990,21 +6262,21 @@
       </p:sp>
       <p:graphicFrame>
         <p:nvGraphicFramePr>
-          <p:cNvPr id="4" name="Таблица 3"/>
+          <p:cNvPr id="8" name="Таблица 7"/>
           <p:cNvGraphicFramePr>
             <a:graphicFrameLocks noGrp="1"/>
           </p:cNvGraphicFramePr>
           <p:nvPr>
             <p:extLst>
               <p:ext uri="{D42A27DB-BD31-4B8C-83A1-F6EECF244321}">
-                <p14:modId xmlns:p14="http://schemas.microsoft.com/office/powerpoint/2010/main" val="4047783762"/>
+                <p14:modId xmlns:p14="http://schemas.microsoft.com/office/powerpoint/2010/main" val="2161459104"/>
               </p:ext>
             </p:extLst>
           </p:nvPr>
         </p:nvGraphicFramePr>
         <p:xfrm>
-          <a:off x="989215" y="1596103"/>
-          <a:ext cx="8171409" cy="1298788"/>
+          <a:off x="940038" y="3852406"/>
+          <a:ext cx="8133504" cy="1104653"/>
         </p:xfrm>
         <a:graphic>
           <a:graphicData uri="http://schemas.openxmlformats.org/drawingml/2006/table">
@@ -5013,63 +6285,1496 @@
                 <a:tableStyleId>{8A107856-5554-42FB-B03E-39F5DBC370BA}</a:tableStyleId>
               </a:tblPr>
               <a:tblGrid>
-                <a:gridCol w="864523">
+                <a:gridCol w="876236">
+                  <a:extLst>
+                    <a:ext uri="{9D8B030D-6E8A-4147-A177-3AD203B41FA5}">
+                      <a16:colId xmlns:a16="http://schemas.microsoft.com/office/drawing/2014/main" val="2648907033"/>
+                    </a:ext>
+                  </a:extLst>
+                </a:gridCol>
+                <a:gridCol w="1412064">
+                  <a:extLst>
+                    <a:ext uri="{9D8B030D-6E8A-4147-A177-3AD203B41FA5}">
+                      <a16:colId xmlns:a16="http://schemas.microsoft.com/office/drawing/2014/main" val="3933250765"/>
+                    </a:ext>
+                  </a:extLst>
+                </a:gridCol>
+                <a:gridCol w="1731278">
+                  <a:extLst>
+                    <a:ext uri="{9D8B030D-6E8A-4147-A177-3AD203B41FA5}">
+                      <a16:colId xmlns:a16="http://schemas.microsoft.com/office/drawing/2014/main" val="2992452003"/>
+                    </a:ext>
+                  </a:extLst>
+                </a:gridCol>
+                <a:gridCol w="1388450">
+                  <a:extLst>
+                    <a:ext uri="{9D8B030D-6E8A-4147-A177-3AD203B41FA5}">
+                      <a16:colId xmlns:a16="http://schemas.microsoft.com/office/drawing/2014/main" val="3965870187"/>
+                    </a:ext>
+                  </a:extLst>
+                </a:gridCol>
+                <a:gridCol w="1688425">
+                  <a:extLst>
+                    <a:ext uri="{9D8B030D-6E8A-4147-A177-3AD203B41FA5}">
+                      <a16:colId xmlns:a16="http://schemas.microsoft.com/office/drawing/2014/main" val="2033533074"/>
+                    </a:ext>
+                  </a:extLst>
+                </a:gridCol>
+                <a:gridCol w="1037051">
+                  <a:extLst>
+                    <a:ext uri="{9D8B030D-6E8A-4147-A177-3AD203B41FA5}">
+                      <a16:colId xmlns:a16="http://schemas.microsoft.com/office/drawing/2014/main" val="4184256437"/>
+                    </a:ext>
+                  </a:extLst>
+                </a:gridCol>
+              </a:tblGrid>
+              <a:tr h="335033">
+                <a:tc>
+                  <a:txBody>
+                    <a:bodyPr/>
+                    <a:lstStyle/>
+                    <a:p>
+                      <a:pPr algn="ctr" fontAlgn="ctr"/>
+                      <a:r>
+                        <a:rPr lang="ru-RU" sz="1100" u="none" strike="noStrike" dirty="0" smtClean="0">
+                          <a:effectLst/>
+                        </a:rPr>
+                        <a:t>Издательство</a:t>
+                      </a:r>
+                      <a:endParaRPr lang="en-US" sz="1100" b="1" i="0" u="none" strike="noStrike" dirty="0">
+                        <a:solidFill>
+                          <a:srgbClr val="000000"/>
+                        </a:solidFill>
+                        <a:effectLst/>
+                        <a:latin typeface="Calibri" panose="020F0502020204030204" pitchFamily="34" charset="0"/>
+                      </a:endParaRPr>
+                    </a:p>
+                  </a:txBody>
+                  <a:tcPr marL="9525" marR="9525" marT="9525" marB="0" anchor="ctr"/>
+                </a:tc>
+                <a:tc>
+                  <a:txBody>
+                    <a:bodyPr/>
+                    <a:lstStyle/>
+                    <a:p>
+                      <a:pPr algn="ctr" fontAlgn="ctr"/>
+                      <a:r>
+                        <a:rPr lang="en-US" sz="1100" u="none" strike="noStrike" dirty="0" err="1" smtClean="0">
+                          <a:effectLst/>
+                        </a:rPr>
+                        <a:t>pageviews</a:t>
+                      </a:r>
+                      <a:r>
+                        <a:rPr lang="en-US" sz="1100" u="none" strike="noStrike" dirty="0" smtClean="0">
+                          <a:effectLst/>
+                        </a:rPr>
+                        <a:t>, </a:t>
+                      </a:r>
+                      <a:r>
+                        <a:rPr lang="en-US" sz="1100" u="none" strike="noStrike" dirty="0">
+                          <a:effectLst/>
+                        </a:rPr>
+                        <a:t>% </a:t>
+                      </a:r>
+                      <a:r>
+                        <a:rPr lang="ru-RU" sz="1100" u="none" strike="noStrike" dirty="0">
+                          <a:effectLst/>
+                        </a:rPr>
+                        <a:t>от </a:t>
+                      </a:r>
+                      <a:r>
+                        <a:rPr lang="ru-RU" sz="1100" u="none" strike="noStrike" dirty="0" err="1" smtClean="0">
+                          <a:effectLst/>
+                        </a:rPr>
+                        <a:t>тотал</a:t>
+                      </a:r>
+                      <a:endParaRPr lang="ru-RU" sz="1100" b="1" i="0" u="none" strike="noStrike" dirty="0">
+                        <a:solidFill>
+                          <a:srgbClr val="000000"/>
+                        </a:solidFill>
+                        <a:effectLst/>
+                        <a:latin typeface="Calibri" panose="020F0502020204030204" pitchFamily="34" charset="0"/>
+                      </a:endParaRPr>
+                    </a:p>
+                  </a:txBody>
+                  <a:tcPr marL="9525" marR="9525" marT="9525" marB="0" anchor="ctr"/>
+                </a:tc>
+                <a:tc>
+                  <a:txBody>
+                    <a:bodyPr/>
+                    <a:lstStyle/>
+                    <a:p>
+                      <a:pPr algn="ctr" fontAlgn="ctr"/>
+                      <a:r>
+                        <a:rPr lang="en-US" sz="1100" u="none" strike="noStrike" dirty="0" err="1" smtClean="0">
+                          <a:effectLst/>
+                        </a:rPr>
+                        <a:t>visible_pageviews</a:t>
+                      </a:r>
+                      <a:r>
+                        <a:rPr lang="en-US" sz="1100" u="none" strike="noStrike" dirty="0" smtClean="0">
+                          <a:effectLst/>
+                        </a:rPr>
+                        <a:t> </a:t>
+                      </a:r>
+                      <a:r>
+                        <a:rPr lang="en-US" sz="1100" u="none" strike="noStrike" dirty="0">
+                          <a:effectLst/>
+                        </a:rPr>
+                        <a:t>% </a:t>
+                      </a:r>
+                      <a:r>
+                        <a:rPr lang="ru-RU" sz="1100" u="none" strike="noStrike" dirty="0">
+                          <a:effectLst/>
+                        </a:rPr>
+                        <a:t>от </a:t>
+                      </a:r>
+                      <a:r>
+                        <a:rPr lang="ru-RU" sz="1100" u="none" strike="noStrike" dirty="0" err="1">
+                          <a:effectLst/>
+                        </a:rPr>
+                        <a:t>тотал</a:t>
+                      </a:r>
+                      <a:endParaRPr lang="ru-RU" sz="1100" b="1" i="0" u="none" strike="noStrike" dirty="0">
+                        <a:solidFill>
+                          <a:srgbClr val="000000"/>
+                        </a:solidFill>
+                        <a:effectLst/>
+                        <a:latin typeface="Calibri" panose="020F0502020204030204" pitchFamily="34" charset="0"/>
+                      </a:endParaRPr>
+                    </a:p>
+                  </a:txBody>
+                  <a:tcPr marL="9525" marR="9525" marT="9525" marB="0" anchor="ctr"/>
+                </a:tc>
+                <a:tc>
+                  <a:txBody>
+                    <a:bodyPr/>
+                    <a:lstStyle/>
+                    <a:p>
+                      <a:pPr algn="ctr" fontAlgn="ctr"/>
+                      <a:r>
+                        <a:rPr lang="en-US" sz="1100" u="none" strike="noStrike" dirty="0" smtClean="0">
+                          <a:effectLst/>
+                        </a:rPr>
+                        <a:t>Revenue</a:t>
+                      </a:r>
+                      <a:r>
+                        <a:rPr lang="ru-RU" sz="1100" u="none" strike="noStrike" baseline="0" dirty="0" smtClean="0">
+                          <a:effectLst/>
+                        </a:rPr>
+                        <a:t> </a:t>
+                      </a:r>
+                      <a:r>
+                        <a:rPr lang="ru-RU" sz="1100" u="none" strike="noStrike" dirty="0" smtClean="0">
+                          <a:effectLst/>
+                        </a:rPr>
+                        <a:t>% </a:t>
+                      </a:r>
+                      <a:r>
+                        <a:rPr lang="ru-RU" sz="1100" u="none" strike="noStrike" dirty="0">
+                          <a:effectLst/>
+                        </a:rPr>
+                        <a:t>от </a:t>
+                      </a:r>
+                      <a:r>
+                        <a:rPr lang="ru-RU" sz="1100" u="none" strike="noStrike" dirty="0" err="1" smtClean="0">
+                          <a:effectLst/>
+                        </a:rPr>
+                        <a:t>тотал</a:t>
+                      </a:r>
+                      <a:endParaRPr lang="ru-RU" sz="1100" b="1" i="0" u="none" strike="noStrike" dirty="0">
+                        <a:solidFill>
+                          <a:srgbClr val="000000"/>
+                        </a:solidFill>
+                        <a:effectLst/>
+                        <a:latin typeface="Calibri" panose="020F0502020204030204" pitchFamily="34" charset="0"/>
+                      </a:endParaRPr>
+                    </a:p>
+                  </a:txBody>
+                  <a:tcPr marL="9525" marR="9525" marT="9525" marB="0" anchor="ctr"/>
+                </a:tc>
+                <a:tc>
+                  <a:txBody>
+                    <a:bodyPr/>
+                    <a:lstStyle/>
+                    <a:p>
+                      <a:pPr algn="ctr" fontAlgn="ctr"/>
+                      <a:r>
+                        <a:rPr lang="en-US" sz="1100" u="none" strike="noStrike" dirty="0" err="1" smtClean="0">
+                          <a:effectLst/>
+                        </a:rPr>
+                        <a:t>sponsord_clicks</a:t>
+                      </a:r>
+                      <a:r>
+                        <a:rPr lang="en-US" sz="1100" u="none" strike="noStrike" dirty="0" smtClean="0">
+                          <a:effectLst/>
+                        </a:rPr>
+                        <a:t>, </a:t>
+                      </a:r>
+                      <a:r>
+                        <a:rPr lang="en-US" sz="1100" u="none" strike="noStrike" dirty="0">
+                          <a:effectLst/>
+                        </a:rPr>
+                        <a:t>% </a:t>
+                      </a:r>
+                      <a:r>
+                        <a:rPr lang="ru-RU" sz="1100" u="none" strike="noStrike" dirty="0">
+                          <a:effectLst/>
+                        </a:rPr>
+                        <a:t>от </a:t>
+                      </a:r>
+                      <a:r>
+                        <a:rPr lang="ru-RU" sz="1100" u="none" strike="noStrike" dirty="0" err="1" smtClean="0">
+                          <a:effectLst/>
+                        </a:rPr>
+                        <a:t>тотал</a:t>
+                      </a:r>
+                      <a:endParaRPr lang="ru-RU" sz="1100" b="1" i="0" u="none" strike="noStrike" dirty="0">
+                        <a:solidFill>
+                          <a:srgbClr val="000000"/>
+                        </a:solidFill>
+                        <a:effectLst/>
+                        <a:latin typeface="Calibri" panose="020F0502020204030204" pitchFamily="34" charset="0"/>
+                      </a:endParaRPr>
+                    </a:p>
+                  </a:txBody>
+                  <a:tcPr marL="9525" marR="9525" marT="9525" marB="0" anchor="ctr"/>
+                </a:tc>
+                <a:tc>
+                  <a:txBody>
+                    <a:bodyPr/>
+                    <a:lstStyle/>
+                    <a:p>
+                      <a:pPr algn="ctr" fontAlgn="ctr"/>
+                      <a:r>
+                        <a:rPr lang="en-US" sz="1100" u="none" strike="noStrike" dirty="0">
+                          <a:effectLst/>
+                        </a:rPr>
+                        <a:t>CPC,A</a:t>
+                      </a:r>
+                      <a:endParaRPr lang="en-US" sz="1100" b="1" i="0" u="none" strike="noStrike" dirty="0">
+                        <a:solidFill>
+                          <a:srgbClr val="000000"/>
+                        </a:solidFill>
+                        <a:effectLst/>
+                        <a:latin typeface="Calibri" panose="020F0502020204030204" pitchFamily="34" charset="0"/>
+                      </a:endParaRPr>
+                    </a:p>
+                  </a:txBody>
+                  <a:tcPr marL="9525" marR="9525" marT="9525" marB="0" anchor="ctr"/>
+                </a:tc>
+                <a:extLst>
+                  <a:ext uri="{0D108BD9-81ED-4DB2-BD59-A6C34878D82A}">
+                    <a16:rowId xmlns:a16="http://schemas.microsoft.com/office/drawing/2014/main" val="3225280426"/>
+                  </a:ext>
+                </a:extLst>
+              </a:tr>
+              <a:tr h="177248">
+                <a:tc>
+                  <a:txBody>
+                    <a:bodyPr/>
+                    <a:lstStyle/>
+                    <a:p>
+                      <a:pPr algn="ctr" fontAlgn="ctr"/>
+                      <a:r>
+                        <a:rPr lang="ru-RU" sz="1200" b="1" u="none" strike="noStrike" kern="1200" dirty="0">
+                          <a:solidFill>
+                            <a:srgbClr val="00B050"/>
+                          </a:solidFill>
+                          <a:effectLst/>
+                          <a:latin typeface="+mn-lt"/>
+                          <a:ea typeface="+mn-ea"/>
+                          <a:cs typeface="+mn-cs"/>
+                        </a:rPr>
+                        <a:t>106</a:t>
+                      </a:r>
+                    </a:p>
+                  </a:txBody>
+                  <a:tcPr marL="9525" marR="9525" marT="9525" marB="0" anchor="ctr"/>
+                </a:tc>
+                <a:tc>
+                  <a:txBody>
+                    <a:bodyPr/>
+                    <a:lstStyle/>
+                    <a:p>
+                      <a:pPr algn="ctr" fontAlgn="b"/>
+                      <a:r>
+                        <a:rPr lang="ru-RU" sz="1100" b="1" u="none" strike="noStrike" kern="1200" dirty="0">
+                          <a:solidFill>
+                            <a:srgbClr val="00B050"/>
+                          </a:solidFill>
+                          <a:effectLst/>
+                          <a:latin typeface="+mn-lt"/>
+                          <a:ea typeface="+mn-ea"/>
+                          <a:cs typeface="+mn-cs"/>
+                        </a:rPr>
+                        <a:t>16%</a:t>
+                      </a:r>
+                    </a:p>
+                  </a:txBody>
+                  <a:tcPr marL="9525" marR="9525" marT="9525" marB="0" anchor="b"/>
+                </a:tc>
+                <a:tc>
+                  <a:txBody>
+                    <a:bodyPr/>
+                    <a:lstStyle/>
+                    <a:p>
+                      <a:pPr algn="ctr" fontAlgn="b"/>
+                      <a:r>
+                        <a:rPr lang="ru-RU" sz="1100" b="1" u="none" strike="noStrike" kern="1200" dirty="0">
+                          <a:solidFill>
+                            <a:srgbClr val="00B050"/>
+                          </a:solidFill>
+                          <a:effectLst/>
+                          <a:latin typeface="+mn-lt"/>
+                          <a:ea typeface="+mn-ea"/>
+                          <a:cs typeface="+mn-cs"/>
+                        </a:rPr>
+                        <a:t>22,5%</a:t>
+                      </a:r>
+                    </a:p>
+                  </a:txBody>
+                  <a:tcPr marL="9525" marR="9525" marT="9525" marB="0" anchor="b"/>
+                </a:tc>
+                <a:tc>
+                  <a:txBody>
+                    <a:bodyPr/>
+                    <a:lstStyle/>
+                    <a:p>
+                      <a:pPr algn="ctr" fontAlgn="b"/>
+                      <a:r>
+                        <a:rPr lang="ru-RU" sz="1100" b="1" u="none" strike="noStrike" kern="1200" dirty="0">
+                          <a:solidFill>
+                            <a:srgbClr val="00B050"/>
+                          </a:solidFill>
+                          <a:effectLst/>
+                          <a:latin typeface="+mn-lt"/>
+                          <a:ea typeface="+mn-ea"/>
+                          <a:cs typeface="+mn-cs"/>
+                        </a:rPr>
+                        <a:t>41,4%</a:t>
+                      </a:r>
+                    </a:p>
+                  </a:txBody>
+                  <a:tcPr marL="9525" marR="9525" marT="9525" marB="0" anchor="b"/>
+                </a:tc>
+                <a:tc>
+                  <a:txBody>
+                    <a:bodyPr/>
+                    <a:lstStyle/>
+                    <a:p>
+                      <a:pPr algn="ctr" fontAlgn="b"/>
+                      <a:r>
+                        <a:rPr lang="ru-RU" sz="1100" b="1" u="none" strike="noStrike" kern="1200" dirty="0">
+                          <a:solidFill>
+                            <a:srgbClr val="00B050"/>
+                          </a:solidFill>
+                          <a:effectLst/>
+                          <a:latin typeface="+mn-lt"/>
+                          <a:ea typeface="+mn-ea"/>
+                          <a:cs typeface="+mn-cs"/>
+                        </a:rPr>
+                        <a:t>22,6%</a:t>
+                      </a:r>
+                    </a:p>
+                  </a:txBody>
+                  <a:tcPr marL="9525" marR="9525" marT="9525" marB="0" anchor="b"/>
+                </a:tc>
+                <a:tc>
+                  <a:txBody>
+                    <a:bodyPr/>
+                    <a:lstStyle/>
+                    <a:p>
+                      <a:pPr algn="ctr" fontAlgn="b"/>
+                      <a:r>
+                        <a:rPr lang="ru-RU" sz="1100" b="1" u="none" strike="noStrike" kern="1200" dirty="0">
+                          <a:solidFill>
+                            <a:srgbClr val="00B050"/>
+                          </a:solidFill>
+                          <a:effectLst/>
+                          <a:latin typeface="+mn-lt"/>
+                          <a:ea typeface="+mn-ea"/>
+                          <a:cs typeface="+mn-cs"/>
+                        </a:rPr>
+                        <a:t>0,17</a:t>
+                      </a:r>
+                    </a:p>
+                  </a:txBody>
+                  <a:tcPr marL="9525" marR="9525" marT="9525" marB="0" anchor="b"/>
+                </a:tc>
+                <a:extLst>
+                  <a:ext uri="{0D108BD9-81ED-4DB2-BD59-A6C34878D82A}">
+                    <a16:rowId xmlns:a16="http://schemas.microsoft.com/office/drawing/2014/main" val="4268263604"/>
+                  </a:ext>
+                </a:extLst>
+              </a:tr>
+              <a:tr h="177248">
+                <a:tc>
+                  <a:txBody>
+                    <a:bodyPr/>
+                    <a:lstStyle/>
+                    <a:p>
+                      <a:pPr algn="ctr" fontAlgn="ctr"/>
+                      <a:r>
+                        <a:rPr lang="ru-RU" sz="1200" b="1" u="none" strike="noStrike" kern="1200" dirty="0">
+                          <a:solidFill>
+                            <a:srgbClr val="FF0000"/>
+                          </a:solidFill>
+                          <a:effectLst/>
+                          <a:latin typeface="+mn-lt"/>
+                          <a:ea typeface="+mn-ea"/>
+                          <a:cs typeface="+mn-cs"/>
+                        </a:rPr>
+                        <a:t>259</a:t>
+                      </a:r>
+                    </a:p>
+                  </a:txBody>
+                  <a:tcPr marL="9525" marR="9525" marT="9525" marB="0" anchor="ctr"/>
+                </a:tc>
+                <a:tc>
+                  <a:txBody>
+                    <a:bodyPr/>
+                    <a:lstStyle/>
+                    <a:p>
+                      <a:pPr algn="ctr" fontAlgn="b"/>
+                      <a:r>
+                        <a:rPr lang="ru-RU" sz="1100" b="1" u="none" strike="noStrike" kern="1200" dirty="0">
+                          <a:solidFill>
+                            <a:srgbClr val="FF0000"/>
+                          </a:solidFill>
+                          <a:effectLst/>
+                          <a:latin typeface="+mn-lt"/>
+                          <a:ea typeface="+mn-ea"/>
+                          <a:cs typeface="+mn-cs"/>
+                        </a:rPr>
+                        <a:t>42%</a:t>
+                      </a:r>
+                    </a:p>
+                  </a:txBody>
+                  <a:tcPr marL="9525" marR="9525" marT="9525" marB="0" anchor="b"/>
+                </a:tc>
+                <a:tc>
+                  <a:txBody>
+                    <a:bodyPr/>
+                    <a:lstStyle/>
+                    <a:p>
+                      <a:pPr algn="ctr" fontAlgn="b"/>
+                      <a:r>
+                        <a:rPr lang="ru-RU" sz="1100" b="1" u="none" strike="noStrike" kern="1200" dirty="0">
+                          <a:solidFill>
+                            <a:srgbClr val="FF0000"/>
+                          </a:solidFill>
+                          <a:effectLst/>
+                          <a:latin typeface="+mn-lt"/>
+                          <a:ea typeface="+mn-ea"/>
+                          <a:cs typeface="+mn-cs"/>
+                        </a:rPr>
+                        <a:t>36,1%</a:t>
+                      </a:r>
+                    </a:p>
+                  </a:txBody>
+                  <a:tcPr marL="9525" marR="9525" marT="9525" marB="0" anchor="b"/>
+                </a:tc>
+                <a:tc>
+                  <a:txBody>
+                    <a:bodyPr/>
+                    <a:lstStyle/>
+                    <a:p>
+                      <a:pPr algn="ctr" fontAlgn="b"/>
+                      <a:r>
+                        <a:rPr lang="ru-RU" sz="1100" b="1" u="none" strike="noStrike" kern="1200" dirty="0">
+                          <a:solidFill>
+                            <a:srgbClr val="FF0000"/>
+                          </a:solidFill>
+                          <a:effectLst/>
+                          <a:latin typeface="+mn-lt"/>
+                          <a:ea typeface="+mn-ea"/>
+                          <a:cs typeface="+mn-cs"/>
+                        </a:rPr>
+                        <a:t>4,4%</a:t>
+                      </a:r>
+                    </a:p>
+                  </a:txBody>
+                  <a:tcPr marL="9525" marR="9525" marT="9525" marB="0" anchor="b"/>
+                </a:tc>
+                <a:tc>
+                  <a:txBody>
+                    <a:bodyPr/>
+                    <a:lstStyle/>
+                    <a:p>
+                      <a:pPr algn="ctr" fontAlgn="b"/>
+                      <a:r>
+                        <a:rPr lang="ru-RU" sz="1100" b="1" u="none" strike="noStrike" kern="1200" dirty="0">
+                          <a:solidFill>
+                            <a:srgbClr val="FF0000"/>
+                          </a:solidFill>
+                          <a:effectLst/>
+                          <a:latin typeface="+mn-lt"/>
+                          <a:ea typeface="+mn-ea"/>
+                          <a:cs typeface="+mn-cs"/>
+                        </a:rPr>
+                        <a:t>12,9%</a:t>
+                      </a:r>
+                    </a:p>
+                  </a:txBody>
+                  <a:tcPr marL="9525" marR="9525" marT="9525" marB="0" anchor="b"/>
+                </a:tc>
+                <a:tc>
+                  <a:txBody>
+                    <a:bodyPr/>
+                    <a:lstStyle/>
+                    <a:p>
+                      <a:pPr algn="ctr" fontAlgn="b"/>
+                      <a:r>
+                        <a:rPr lang="ru-RU" sz="1100" b="1" u="none" strike="noStrike" kern="1200" dirty="0">
+                          <a:solidFill>
+                            <a:srgbClr val="FF0000"/>
+                          </a:solidFill>
+                          <a:effectLst/>
+                          <a:latin typeface="+mn-lt"/>
+                          <a:ea typeface="+mn-ea"/>
+                          <a:cs typeface="+mn-cs"/>
+                        </a:rPr>
+                        <a:t>0,03</a:t>
+                      </a:r>
+                    </a:p>
+                  </a:txBody>
+                  <a:tcPr marL="9525" marR="9525" marT="9525" marB="0" anchor="b"/>
+                </a:tc>
+                <a:extLst>
+                  <a:ext uri="{0D108BD9-81ED-4DB2-BD59-A6C34878D82A}">
+                    <a16:rowId xmlns:a16="http://schemas.microsoft.com/office/drawing/2014/main" val="2771539292"/>
+                  </a:ext>
+                </a:extLst>
+              </a:tr>
+              <a:tr h="177248">
+                <a:tc>
+                  <a:txBody>
+                    <a:bodyPr/>
+                    <a:lstStyle/>
+                    <a:p>
+                      <a:pPr algn="ctr" fontAlgn="ctr"/>
+                      <a:r>
+                        <a:rPr lang="ru-RU" sz="1200" b="1" u="none" strike="noStrike" kern="1200">
+                          <a:solidFill>
+                            <a:schemeClr val="dk1"/>
+                          </a:solidFill>
+                          <a:effectLst/>
+                          <a:latin typeface="+mn-lt"/>
+                          <a:ea typeface="+mn-ea"/>
+                          <a:cs typeface="+mn-cs"/>
+                        </a:rPr>
+                        <a:t>574</a:t>
+                      </a:r>
+                    </a:p>
+                  </a:txBody>
+                  <a:tcPr marL="9525" marR="9525" marT="9525" marB="0" anchor="ctr"/>
+                </a:tc>
+                <a:tc>
+                  <a:txBody>
+                    <a:bodyPr/>
+                    <a:lstStyle/>
+                    <a:p>
+                      <a:pPr algn="ctr" fontAlgn="b"/>
+                      <a:r>
+                        <a:rPr lang="ru-RU" sz="1100" b="1" u="none" strike="noStrike" kern="1200" dirty="0">
+                          <a:solidFill>
+                            <a:schemeClr val="dk1"/>
+                          </a:solidFill>
+                          <a:effectLst/>
+                          <a:latin typeface="+mn-lt"/>
+                          <a:ea typeface="+mn-ea"/>
+                          <a:cs typeface="+mn-cs"/>
+                        </a:rPr>
+                        <a:t>35%</a:t>
+                      </a:r>
+                    </a:p>
+                  </a:txBody>
+                  <a:tcPr marL="9525" marR="9525" marT="9525" marB="0" anchor="b"/>
+                </a:tc>
+                <a:tc>
+                  <a:txBody>
+                    <a:bodyPr/>
+                    <a:lstStyle/>
+                    <a:p>
+                      <a:pPr algn="ctr" fontAlgn="b"/>
+                      <a:r>
+                        <a:rPr lang="ru-RU" sz="1100" b="1" u="none" strike="noStrike" kern="1200" dirty="0">
+                          <a:solidFill>
+                            <a:schemeClr val="dk1"/>
+                          </a:solidFill>
+                          <a:effectLst/>
+                          <a:latin typeface="+mn-lt"/>
+                          <a:ea typeface="+mn-ea"/>
+                          <a:cs typeface="+mn-cs"/>
+                        </a:rPr>
+                        <a:t>28,2%</a:t>
+                      </a:r>
+                    </a:p>
+                  </a:txBody>
+                  <a:tcPr marL="9525" marR="9525" marT="9525" marB="0" anchor="b"/>
+                </a:tc>
+                <a:tc>
+                  <a:txBody>
+                    <a:bodyPr/>
+                    <a:lstStyle/>
+                    <a:p>
+                      <a:pPr algn="ctr" fontAlgn="b"/>
+                      <a:r>
+                        <a:rPr lang="ru-RU" sz="1100" b="1" u="none" strike="noStrike" kern="1200" dirty="0">
+                          <a:solidFill>
+                            <a:schemeClr val="dk1"/>
+                          </a:solidFill>
+                          <a:effectLst/>
+                          <a:latin typeface="+mn-lt"/>
+                          <a:ea typeface="+mn-ea"/>
+                          <a:cs typeface="+mn-cs"/>
+                        </a:rPr>
+                        <a:t>20,6%</a:t>
+                      </a:r>
+                    </a:p>
+                  </a:txBody>
+                  <a:tcPr marL="9525" marR="9525" marT="9525" marB="0" anchor="b"/>
+                </a:tc>
+                <a:tc>
+                  <a:txBody>
+                    <a:bodyPr/>
+                    <a:lstStyle/>
+                    <a:p>
+                      <a:pPr algn="ctr" fontAlgn="b"/>
+                      <a:r>
+                        <a:rPr lang="ru-RU" sz="1100" b="1" u="none" strike="noStrike" kern="1200" dirty="0">
+                          <a:solidFill>
+                            <a:schemeClr val="dk1"/>
+                          </a:solidFill>
+                          <a:effectLst/>
+                          <a:latin typeface="+mn-lt"/>
+                          <a:ea typeface="+mn-ea"/>
+                          <a:cs typeface="+mn-cs"/>
+                        </a:rPr>
+                        <a:t>51,6%</a:t>
+                      </a:r>
+                    </a:p>
+                  </a:txBody>
+                  <a:tcPr marL="9525" marR="9525" marT="9525" marB="0" anchor="b"/>
+                </a:tc>
+                <a:tc>
+                  <a:txBody>
+                    <a:bodyPr/>
+                    <a:lstStyle/>
+                    <a:p>
+                      <a:pPr algn="ctr" fontAlgn="b"/>
+                      <a:r>
+                        <a:rPr lang="ru-RU" sz="1100" b="1" u="none" strike="noStrike" kern="1200">
+                          <a:solidFill>
+                            <a:schemeClr val="dk1"/>
+                          </a:solidFill>
+                          <a:effectLst/>
+                          <a:latin typeface="+mn-lt"/>
+                          <a:ea typeface="+mn-ea"/>
+                          <a:cs typeface="+mn-cs"/>
+                        </a:rPr>
+                        <a:t>0,04</a:t>
+                      </a:r>
+                    </a:p>
+                  </a:txBody>
+                  <a:tcPr marL="9525" marR="9525" marT="9525" marB="0" anchor="b"/>
+                </a:tc>
+                <a:extLst>
+                  <a:ext uri="{0D108BD9-81ED-4DB2-BD59-A6C34878D82A}">
+                    <a16:rowId xmlns:a16="http://schemas.microsoft.com/office/drawing/2014/main" val="2768880754"/>
+                  </a:ext>
+                </a:extLst>
+              </a:tr>
+              <a:tr h="177248">
+                <a:tc>
+                  <a:txBody>
+                    <a:bodyPr/>
+                    <a:lstStyle/>
+                    <a:p>
+                      <a:pPr algn="ctr" fontAlgn="ctr"/>
+                      <a:r>
+                        <a:rPr lang="ru-RU" sz="1200" b="1" u="none" strike="noStrike" kern="1200" dirty="0">
+                          <a:solidFill>
+                            <a:srgbClr val="00B050"/>
+                          </a:solidFill>
+                          <a:effectLst/>
+                          <a:latin typeface="+mn-lt"/>
+                          <a:ea typeface="+mn-ea"/>
+                          <a:cs typeface="+mn-cs"/>
+                        </a:rPr>
+                        <a:t>700</a:t>
+                      </a:r>
+                    </a:p>
+                  </a:txBody>
+                  <a:tcPr marL="9525" marR="9525" marT="9525" marB="0" anchor="ctr"/>
+                </a:tc>
+                <a:tc>
+                  <a:txBody>
+                    <a:bodyPr/>
+                    <a:lstStyle/>
+                    <a:p>
+                      <a:pPr algn="ctr" fontAlgn="b"/>
+                      <a:r>
+                        <a:rPr lang="ru-RU" sz="1100" b="1" u="none" strike="noStrike" kern="1200" dirty="0">
+                          <a:solidFill>
+                            <a:srgbClr val="00B050"/>
+                          </a:solidFill>
+                          <a:effectLst/>
+                          <a:latin typeface="+mn-lt"/>
+                          <a:ea typeface="+mn-ea"/>
+                          <a:cs typeface="+mn-cs"/>
+                        </a:rPr>
+                        <a:t>7%</a:t>
+                      </a:r>
+                    </a:p>
+                  </a:txBody>
+                  <a:tcPr marL="9525" marR="9525" marT="9525" marB="0" anchor="b"/>
+                </a:tc>
+                <a:tc>
+                  <a:txBody>
+                    <a:bodyPr/>
+                    <a:lstStyle/>
+                    <a:p>
+                      <a:pPr algn="ctr" fontAlgn="b"/>
+                      <a:r>
+                        <a:rPr lang="ru-RU" sz="1100" b="1" u="none" strike="noStrike" kern="1200" dirty="0">
+                          <a:solidFill>
+                            <a:srgbClr val="00B050"/>
+                          </a:solidFill>
+                          <a:effectLst/>
+                          <a:latin typeface="+mn-lt"/>
+                          <a:ea typeface="+mn-ea"/>
+                          <a:cs typeface="+mn-cs"/>
+                        </a:rPr>
+                        <a:t>13,3%</a:t>
+                      </a:r>
+                    </a:p>
+                  </a:txBody>
+                  <a:tcPr marL="9525" marR="9525" marT="9525" marB="0" anchor="b"/>
+                </a:tc>
+                <a:tc>
+                  <a:txBody>
+                    <a:bodyPr/>
+                    <a:lstStyle/>
+                    <a:p>
+                      <a:pPr algn="ctr" fontAlgn="b"/>
+                      <a:r>
+                        <a:rPr lang="ru-RU" sz="1100" b="1" u="none" strike="noStrike" kern="1200" dirty="0">
+                          <a:solidFill>
+                            <a:srgbClr val="00B050"/>
+                          </a:solidFill>
+                          <a:effectLst/>
+                          <a:latin typeface="+mn-lt"/>
+                          <a:ea typeface="+mn-ea"/>
+                          <a:cs typeface="+mn-cs"/>
+                        </a:rPr>
+                        <a:t>33,5%</a:t>
+                      </a:r>
+                    </a:p>
+                  </a:txBody>
+                  <a:tcPr marL="9525" marR="9525" marT="9525" marB="0" anchor="b"/>
+                </a:tc>
+                <a:tc>
+                  <a:txBody>
+                    <a:bodyPr/>
+                    <a:lstStyle/>
+                    <a:p>
+                      <a:pPr algn="ctr" fontAlgn="b"/>
+                      <a:r>
+                        <a:rPr lang="ru-RU" sz="1100" b="1" u="none" strike="noStrike" kern="1200" dirty="0">
+                          <a:solidFill>
+                            <a:srgbClr val="00B050"/>
+                          </a:solidFill>
+                          <a:effectLst/>
+                          <a:latin typeface="+mn-lt"/>
+                          <a:ea typeface="+mn-ea"/>
+                          <a:cs typeface="+mn-cs"/>
+                        </a:rPr>
+                        <a:t>12,9%</a:t>
+                      </a:r>
+                    </a:p>
+                  </a:txBody>
+                  <a:tcPr marL="9525" marR="9525" marT="9525" marB="0" anchor="b"/>
+                </a:tc>
+                <a:tc>
+                  <a:txBody>
+                    <a:bodyPr/>
+                    <a:lstStyle/>
+                    <a:p>
+                      <a:pPr algn="ctr" fontAlgn="b"/>
+                      <a:r>
+                        <a:rPr lang="ru-RU" sz="1100" b="1" u="none" strike="noStrike" kern="1200" dirty="0">
+                          <a:solidFill>
+                            <a:srgbClr val="00B050"/>
+                          </a:solidFill>
+                          <a:effectLst/>
+                          <a:latin typeface="+mn-lt"/>
+                          <a:ea typeface="+mn-ea"/>
+                          <a:cs typeface="+mn-cs"/>
+                        </a:rPr>
+                        <a:t>0,24</a:t>
+                      </a:r>
+                    </a:p>
+                  </a:txBody>
+                  <a:tcPr marL="9525" marR="9525" marT="9525" marB="0" anchor="b"/>
+                </a:tc>
+                <a:extLst>
+                  <a:ext uri="{0D108BD9-81ED-4DB2-BD59-A6C34878D82A}">
+                    <a16:rowId xmlns:a16="http://schemas.microsoft.com/office/drawing/2014/main" val="1057701842"/>
+                  </a:ext>
+                </a:extLst>
+              </a:tr>
+            </a:tbl>
+          </a:graphicData>
+        </a:graphic>
+      </p:graphicFrame>
+      <p:sp>
+        <p:nvSpPr>
+          <p:cNvPr id="10" name="Объект 4"/>
+          <p:cNvSpPr txBox="1">
+            <a:spLocks/>
+          </p:cNvSpPr>
+          <p:nvPr/>
+        </p:nvSpPr>
+        <p:spPr>
+          <a:xfrm>
+            <a:off x="906088" y="3487140"/>
+            <a:ext cx="2177935" cy="365266"/>
+          </a:xfrm>
+          <a:prstGeom prst="rect">
+            <a:avLst/>
+          </a:prstGeom>
+        </p:spPr>
+        <p:txBody>
+          <a:bodyPr vert="horz" lIns="91440" tIns="45720" rIns="91440" bIns="45720" rtlCol="0">
+            <a:normAutofit/>
+          </a:bodyPr>
+          <a:lstStyle>
+            <a:lvl1pPr marL="228600" indent="-228600" algn="l" defTabSz="914400" rtl="0" eaLnBrk="1" latinLnBrk="0" hangingPunct="1">
+              <a:lnSpc>
+                <a:spcPct val="90000"/>
+              </a:lnSpc>
+              <a:spcBef>
+                <a:spcPts val="1000"/>
+              </a:spcBef>
+              <a:buFont typeface="Arial" panose="020B0604020202020204" pitchFamily="34" charset="0"/>
+              <a:buChar char="•"/>
+              <a:defRPr sz="2800" kern="1200">
+                <a:solidFill>
+                  <a:schemeClr val="tx1"/>
+                </a:solidFill>
+                <a:latin typeface="+mn-lt"/>
+                <a:ea typeface="+mn-ea"/>
+                <a:cs typeface="+mn-cs"/>
+              </a:defRPr>
+            </a:lvl1pPr>
+            <a:lvl2pPr marL="685800" indent="-228600" algn="l" defTabSz="914400" rtl="0" eaLnBrk="1" latinLnBrk="0" hangingPunct="1">
+              <a:lnSpc>
+                <a:spcPct val="90000"/>
+              </a:lnSpc>
+              <a:spcBef>
+                <a:spcPts val="500"/>
+              </a:spcBef>
+              <a:buFont typeface="Arial" panose="020B0604020202020204" pitchFamily="34" charset="0"/>
+              <a:buChar char="•"/>
+              <a:defRPr sz="2400" kern="1200">
+                <a:solidFill>
+                  <a:schemeClr val="tx1"/>
+                </a:solidFill>
+                <a:latin typeface="+mn-lt"/>
+                <a:ea typeface="+mn-ea"/>
+                <a:cs typeface="+mn-cs"/>
+              </a:defRPr>
+            </a:lvl2pPr>
+            <a:lvl3pPr marL="1143000" indent="-228600" algn="l" defTabSz="914400" rtl="0" eaLnBrk="1" latinLnBrk="0" hangingPunct="1">
+              <a:lnSpc>
+                <a:spcPct val="90000"/>
+              </a:lnSpc>
+              <a:spcBef>
+                <a:spcPts val="500"/>
+              </a:spcBef>
+              <a:buFont typeface="Arial" panose="020B0604020202020204" pitchFamily="34" charset="0"/>
+              <a:buChar char="•"/>
+              <a:defRPr sz="2000" kern="1200">
+                <a:solidFill>
+                  <a:schemeClr val="tx1"/>
+                </a:solidFill>
+                <a:latin typeface="+mn-lt"/>
+                <a:ea typeface="+mn-ea"/>
+                <a:cs typeface="+mn-cs"/>
+              </a:defRPr>
+            </a:lvl3pPr>
+            <a:lvl4pPr marL="1600200" indent="-228600" algn="l" defTabSz="914400" rtl="0" eaLnBrk="1" latinLnBrk="0" hangingPunct="1">
+              <a:lnSpc>
+                <a:spcPct val="90000"/>
+              </a:lnSpc>
+              <a:spcBef>
+                <a:spcPts val="500"/>
+              </a:spcBef>
+              <a:buFont typeface="Arial" panose="020B0604020202020204" pitchFamily="34" charset="0"/>
+              <a:buChar char="•"/>
+              <a:defRPr sz="1800" kern="1200">
+                <a:solidFill>
+                  <a:schemeClr val="tx1"/>
+                </a:solidFill>
+                <a:latin typeface="+mn-lt"/>
+                <a:ea typeface="+mn-ea"/>
+                <a:cs typeface="+mn-cs"/>
+              </a:defRPr>
+            </a:lvl4pPr>
+            <a:lvl5pPr marL="2057400" indent="-228600" algn="l" defTabSz="914400" rtl="0" eaLnBrk="1" latinLnBrk="0" hangingPunct="1">
+              <a:lnSpc>
+                <a:spcPct val="90000"/>
+              </a:lnSpc>
+              <a:spcBef>
+                <a:spcPts val="500"/>
+              </a:spcBef>
+              <a:buFont typeface="Arial" panose="020B0604020202020204" pitchFamily="34" charset="0"/>
+              <a:buChar char="•"/>
+              <a:defRPr sz="1800" kern="1200">
+                <a:solidFill>
+                  <a:schemeClr val="tx1"/>
+                </a:solidFill>
+                <a:latin typeface="+mn-lt"/>
+                <a:ea typeface="+mn-ea"/>
+                <a:cs typeface="+mn-cs"/>
+              </a:defRPr>
+            </a:lvl5pPr>
+            <a:lvl6pPr marL="2514600" indent="-228600" algn="l" defTabSz="914400" rtl="0" eaLnBrk="1" latinLnBrk="0" hangingPunct="1">
+              <a:lnSpc>
+                <a:spcPct val="90000"/>
+              </a:lnSpc>
+              <a:spcBef>
+                <a:spcPts val="500"/>
+              </a:spcBef>
+              <a:buFont typeface="Arial" panose="020B0604020202020204" pitchFamily="34" charset="0"/>
+              <a:buChar char="•"/>
+              <a:defRPr sz="1800" kern="1200">
+                <a:solidFill>
+                  <a:schemeClr val="tx1"/>
+                </a:solidFill>
+                <a:latin typeface="+mn-lt"/>
+                <a:ea typeface="+mn-ea"/>
+                <a:cs typeface="+mn-cs"/>
+              </a:defRPr>
+            </a:lvl6pPr>
+            <a:lvl7pPr marL="2971800" indent="-228600" algn="l" defTabSz="914400" rtl="0" eaLnBrk="1" latinLnBrk="0" hangingPunct="1">
+              <a:lnSpc>
+                <a:spcPct val="90000"/>
+              </a:lnSpc>
+              <a:spcBef>
+                <a:spcPts val="500"/>
+              </a:spcBef>
+              <a:buFont typeface="Arial" panose="020B0604020202020204" pitchFamily="34" charset="0"/>
+              <a:buChar char="•"/>
+              <a:defRPr sz="1800" kern="1200">
+                <a:solidFill>
+                  <a:schemeClr val="tx1"/>
+                </a:solidFill>
+                <a:latin typeface="+mn-lt"/>
+                <a:ea typeface="+mn-ea"/>
+                <a:cs typeface="+mn-cs"/>
+              </a:defRPr>
+            </a:lvl7pPr>
+            <a:lvl8pPr marL="3429000" indent="-228600" algn="l" defTabSz="914400" rtl="0" eaLnBrk="1" latinLnBrk="0" hangingPunct="1">
+              <a:lnSpc>
+                <a:spcPct val="90000"/>
+              </a:lnSpc>
+              <a:spcBef>
+                <a:spcPts val="500"/>
+              </a:spcBef>
+              <a:buFont typeface="Arial" panose="020B0604020202020204" pitchFamily="34" charset="0"/>
+              <a:buChar char="•"/>
+              <a:defRPr sz="1800" kern="1200">
+                <a:solidFill>
+                  <a:schemeClr val="tx1"/>
+                </a:solidFill>
+                <a:latin typeface="+mn-lt"/>
+                <a:ea typeface="+mn-ea"/>
+                <a:cs typeface="+mn-cs"/>
+              </a:defRPr>
+            </a:lvl8pPr>
+            <a:lvl9pPr marL="3886200" indent="-228600" algn="l" defTabSz="914400" rtl="0" eaLnBrk="1" latinLnBrk="0" hangingPunct="1">
+              <a:lnSpc>
+                <a:spcPct val="90000"/>
+              </a:lnSpc>
+              <a:spcBef>
+                <a:spcPts val="500"/>
+              </a:spcBef>
+              <a:buFont typeface="Arial" panose="020B0604020202020204" pitchFamily="34" charset="0"/>
+              <a:buChar char="•"/>
+              <a:defRPr sz="1800" kern="1200">
+                <a:solidFill>
+                  <a:schemeClr val="tx1"/>
+                </a:solidFill>
+                <a:latin typeface="+mn-lt"/>
+                <a:ea typeface="+mn-ea"/>
+                <a:cs typeface="+mn-cs"/>
+              </a:defRPr>
+            </a:lvl9pPr>
+          </a:lstStyle>
+          <a:p>
+            <a:pPr marL="0" indent="0">
+              <a:buFont typeface="Arial" panose="020B0604020202020204" pitchFamily="34" charset="0"/>
+              <a:buNone/>
+            </a:pPr>
+            <a:r>
+              <a:rPr lang="en-US" sz="1800" dirty="0" smtClean="0"/>
+              <a:t>Mobile</a:t>
+            </a:r>
+            <a:endParaRPr lang="ru-RU" sz="1800" dirty="0"/>
+          </a:p>
+        </p:txBody>
+      </p:sp>
+    </p:spTree>
+    <p:extLst>
+      <p:ext uri="{BB962C8B-B14F-4D97-AF65-F5344CB8AC3E}">
+        <p14:creationId xmlns:p14="http://schemas.microsoft.com/office/powerpoint/2010/main" val="132676662"/>
+      </p:ext>
+    </p:extLst>
+  </p:cSld>
+  <p:clrMapOvr>
+    <a:masterClrMapping/>
+  </p:clrMapOvr>
+  <p:timing>
+    <p:tnLst>
+      <p:par>
+        <p:cTn id="1" dur="indefinite" restart="never" nodeType="tmRoot"/>
+      </p:par>
+    </p:tnLst>
+  </p:timing>
+</p:sld>
+</file>
+
+<file path=ppt/slides/slide6.xml><?xml version="1.0" encoding="utf-8"?>
+<p:sld xmlns:a="http://schemas.openxmlformats.org/drawingml/2006/main" xmlns:r="http://schemas.openxmlformats.org/officeDocument/2006/relationships" xmlns:p="http://schemas.openxmlformats.org/presentationml/2006/main">
+  <p:cSld>
+    <p:spTree>
+      <p:nvGrpSpPr>
+        <p:cNvPr id="1" name=""/>
+        <p:cNvGrpSpPr/>
+        <p:nvPr/>
+      </p:nvGrpSpPr>
+      <p:grpSpPr>
+        <a:xfrm>
+          <a:off x="0" y="0"/>
+          <a:ext cx="0" cy="0"/>
+          <a:chOff x="0" y="0"/>
+          <a:chExt cx="0" cy="0"/>
+        </a:xfrm>
+      </p:grpSpPr>
+      <p:sp>
+        <p:nvSpPr>
+          <p:cNvPr id="2" name="Заголовок 1"/>
+          <p:cNvSpPr>
+            <a:spLocks noGrp="1"/>
+          </p:cNvSpPr>
+          <p:nvPr>
+            <p:ph type="title"/>
+          </p:nvPr>
+        </p:nvSpPr>
+        <p:spPr>
+          <a:xfrm>
+            <a:off x="838200" y="365125"/>
+            <a:ext cx="10515600" cy="1161361"/>
+          </a:xfrm>
+        </p:spPr>
+        <p:txBody>
+          <a:bodyPr>
+            <a:normAutofit/>
+          </a:bodyPr>
+          <a:lstStyle/>
+          <a:p>
+            <a:r>
+              <a:rPr lang="ru-RU" sz="4000" b="1" dirty="0" smtClean="0"/>
+              <a:t>Анализ влияния теста на издательства</a:t>
+            </a:r>
+            <a:endParaRPr lang="ru-RU" sz="4000" b="1" dirty="0"/>
+          </a:p>
+        </p:txBody>
+      </p:sp>
+      <p:sp>
+        <p:nvSpPr>
+          <p:cNvPr id="5" name="Объект 4"/>
+          <p:cNvSpPr>
+            <a:spLocks noGrp="1"/>
+          </p:cNvSpPr>
+          <p:nvPr>
+            <p:ph idx="1"/>
+          </p:nvPr>
+        </p:nvSpPr>
+        <p:spPr>
+          <a:xfrm>
+            <a:off x="906089" y="5155318"/>
+            <a:ext cx="9825642" cy="1546167"/>
+          </a:xfrm>
+        </p:spPr>
+        <p:txBody>
+          <a:bodyPr>
+            <a:noAutofit/>
+          </a:bodyPr>
+          <a:lstStyle/>
+          <a:p>
+            <a:pPr marL="0" indent="0">
+              <a:buNone/>
+            </a:pPr>
+            <a:r>
+              <a:rPr lang="ru-RU" sz="1600" dirty="0"/>
+              <a:t>И</a:t>
+            </a:r>
+            <a:r>
+              <a:rPr lang="ru-RU" sz="1600" dirty="0" smtClean="0"/>
+              <a:t>зменение формата ленты вызвало:</a:t>
+            </a:r>
+            <a:br>
+              <a:rPr lang="ru-RU" sz="1600" dirty="0" smtClean="0"/>
+            </a:br>
+            <a:r>
+              <a:rPr lang="ru-RU" sz="1600" dirty="0" smtClean="0"/>
+              <a:t>- </a:t>
+            </a:r>
+            <a:r>
+              <a:rPr lang="ru-RU" sz="1600" b="1" dirty="0" smtClean="0"/>
+              <a:t>не зависимо от платформы, снижение количества просматриваемых страниц</a:t>
+            </a:r>
+            <a:r>
+              <a:rPr lang="ru-RU" sz="1600" dirty="0" smtClean="0"/>
+              <a:t>, что повышает риски снижения лояльности пользователей к нашей платформе и ухудшению партнерских отношений с издательствами.</a:t>
+            </a:r>
+            <a:br>
+              <a:rPr lang="ru-RU" sz="1600" dirty="0" smtClean="0"/>
+            </a:br>
+            <a:r>
+              <a:rPr lang="ru-RU" sz="1600" dirty="0" smtClean="0"/>
+              <a:t>- </a:t>
+            </a:r>
+            <a:r>
+              <a:rPr lang="ru-RU" sz="1600" b="1" dirty="0" smtClean="0"/>
+              <a:t>на </a:t>
+            </a:r>
+            <a:r>
+              <a:rPr lang="en-US" sz="1600" b="1" dirty="0" smtClean="0"/>
+              <a:t>Mobile </a:t>
+            </a:r>
+            <a:r>
+              <a:rPr lang="ru-RU" sz="1600" b="1" dirty="0" smtClean="0"/>
+              <a:t>единый эффект в виде роста</a:t>
+            </a:r>
+            <a:r>
+              <a:rPr lang="ru-RU" sz="1600" dirty="0" smtClean="0"/>
+              <a:t> перехода по рекламным ссылкам и роста выручки по всем издательством</a:t>
+            </a:r>
+            <a:r>
+              <a:rPr lang="en-US" sz="1600" dirty="0" smtClean="0"/>
+              <a:t/>
+            </a:r>
+            <a:br>
+              <a:rPr lang="en-US" sz="1600" dirty="0" smtClean="0"/>
+            </a:br>
+            <a:r>
+              <a:rPr lang="en-US" sz="1600" dirty="0" smtClean="0"/>
+              <a:t>- </a:t>
+            </a:r>
+            <a:r>
+              <a:rPr lang="ru-RU" sz="1600" b="1" dirty="0" smtClean="0"/>
+              <a:t>на </a:t>
+            </a:r>
+            <a:r>
+              <a:rPr lang="en-US" sz="1600" b="1" dirty="0" smtClean="0"/>
+              <a:t>Desktop</a:t>
+            </a:r>
+            <a:r>
+              <a:rPr lang="ru-RU" sz="1600" b="1" dirty="0" smtClean="0"/>
+              <a:t> разнонаправленный эффект </a:t>
+            </a:r>
+            <a:r>
+              <a:rPr lang="ru-RU" sz="1600" dirty="0" smtClean="0"/>
+              <a:t>перехода по рекламам, но в большинстве с уменьшением выручки</a:t>
+            </a:r>
+          </a:p>
+        </p:txBody>
+      </p:sp>
+      <p:sp>
+        <p:nvSpPr>
+          <p:cNvPr id="9" name="Объект 4"/>
+          <p:cNvSpPr txBox="1">
+            <a:spLocks/>
+          </p:cNvSpPr>
+          <p:nvPr/>
+        </p:nvSpPr>
+        <p:spPr>
+          <a:xfrm>
+            <a:off x="906089" y="1314728"/>
+            <a:ext cx="2177935" cy="364910"/>
+          </a:xfrm>
+          <a:prstGeom prst="rect">
+            <a:avLst/>
+          </a:prstGeom>
+        </p:spPr>
+        <p:txBody>
+          <a:bodyPr vert="horz" lIns="91440" tIns="45720" rIns="91440" bIns="45720" rtlCol="0">
+            <a:normAutofit/>
+          </a:bodyPr>
+          <a:lstStyle>
+            <a:lvl1pPr marL="228600" indent="-228600" algn="l" defTabSz="914400" rtl="0" eaLnBrk="1" latinLnBrk="0" hangingPunct="1">
+              <a:lnSpc>
+                <a:spcPct val="90000"/>
+              </a:lnSpc>
+              <a:spcBef>
+                <a:spcPts val="1000"/>
+              </a:spcBef>
+              <a:buFont typeface="Arial" panose="020B0604020202020204" pitchFamily="34" charset="0"/>
+              <a:buChar char="•"/>
+              <a:defRPr sz="2800" kern="1200">
+                <a:solidFill>
+                  <a:schemeClr val="tx1"/>
+                </a:solidFill>
+                <a:latin typeface="+mn-lt"/>
+                <a:ea typeface="+mn-ea"/>
+                <a:cs typeface="+mn-cs"/>
+              </a:defRPr>
+            </a:lvl1pPr>
+            <a:lvl2pPr marL="685800" indent="-228600" algn="l" defTabSz="914400" rtl="0" eaLnBrk="1" latinLnBrk="0" hangingPunct="1">
+              <a:lnSpc>
+                <a:spcPct val="90000"/>
+              </a:lnSpc>
+              <a:spcBef>
+                <a:spcPts val="500"/>
+              </a:spcBef>
+              <a:buFont typeface="Arial" panose="020B0604020202020204" pitchFamily="34" charset="0"/>
+              <a:buChar char="•"/>
+              <a:defRPr sz="2400" kern="1200">
+                <a:solidFill>
+                  <a:schemeClr val="tx1"/>
+                </a:solidFill>
+                <a:latin typeface="+mn-lt"/>
+                <a:ea typeface="+mn-ea"/>
+                <a:cs typeface="+mn-cs"/>
+              </a:defRPr>
+            </a:lvl2pPr>
+            <a:lvl3pPr marL="1143000" indent="-228600" algn="l" defTabSz="914400" rtl="0" eaLnBrk="1" latinLnBrk="0" hangingPunct="1">
+              <a:lnSpc>
+                <a:spcPct val="90000"/>
+              </a:lnSpc>
+              <a:spcBef>
+                <a:spcPts val="500"/>
+              </a:spcBef>
+              <a:buFont typeface="Arial" panose="020B0604020202020204" pitchFamily="34" charset="0"/>
+              <a:buChar char="•"/>
+              <a:defRPr sz="2000" kern="1200">
+                <a:solidFill>
+                  <a:schemeClr val="tx1"/>
+                </a:solidFill>
+                <a:latin typeface="+mn-lt"/>
+                <a:ea typeface="+mn-ea"/>
+                <a:cs typeface="+mn-cs"/>
+              </a:defRPr>
+            </a:lvl3pPr>
+            <a:lvl4pPr marL="1600200" indent="-228600" algn="l" defTabSz="914400" rtl="0" eaLnBrk="1" latinLnBrk="0" hangingPunct="1">
+              <a:lnSpc>
+                <a:spcPct val="90000"/>
+              </a:lnSpc>
+              <a:spcBef>
+                <a:spcPts val="500"/>
+              </a:spcBef>
+              <a:buFont typeface="Arial" panose="020B0604020202020204" pitchFamily="34" charset="0"/>
+              <a:buChar char="•"/>
+              <a:defRPr sz="1800" kern="1200">
+                <a:solidFill>
+                  <a:schemeClr val="tx1"/>
+                </a:solidFill>
+                <a:latin typeface="+mn-lt"/>
+                <a:ea typeface="+mn-ea"/>
+                <a:cs typeface="+mn-cs"/>
+              </a:defRPr>
+            </a:lvl4pPr>
+            <a:lvl5pPr marL="2057400" indent="-228600" algn="l" defTabSz="914400" rtl="0" eaLnBrk="1" latinLnBrk="0" hangingPunct="1">
+              <a:lnSpc>
+                <a:spcPct val="90000"/>
+              </a:lnSpc>
+              <a:spcBef>
+                <a:spcPts val="500"/>
+              </a:spcBef>
+              <a:buFont typeface="Arial" panose="020B0604020202020204" pitchFamily="34" charset="0"/>
+              <a:buChar char="•"/>
+              <a:defRPr sz="1800" kern="1200">
+                <a:solidFill>
+                  <a:schemeClr val="tx1"/>
+                </a:solidFill>
+                <a:latin typeface="+mn-lt"/>
+                <a:ea typeface="+mn-ea"/>
+                <a:cs typeface="+mn-cs"/>
+              </a:defRPr>
+            </a:lvl5pPr>
+            <a:lvl6pPr marL="2514600" indent="-228600" algn="l" defTabSz="914400" rtl="0" eaLnBrk="1" latinLnBrk="0" hangingPunct="1">
+              <a:lnSpc>
+                <a:spcPct val="90000"/>
+              </a:lnSpc>
+              <a:spcBef>
+                <a:spcPts val="500"/>
+              </a:spcBef>
+              <a:buFont typeface="Arial" panose="020B0604020202020204" pitchFamily="34" charset="0"/>
+              <a:buChar char="•"/>
+              <a:defRPr sz="1800" kern="1200">
+                <a:solidFill>
+                  <a:schemeClr val="tx1"/>
+                </a:solidFill>
+                <a:latin typeface="+mn-lt"/>
+                <a:ea typeface="+mn-ea"/>
+                <a:cs typeface="+mn-cs"/>
+              </a:defRPr>
+            </a:lvl6pPr>
+            <a:lvl7pPr marL="2971800" indent="-228600" algn="l" defTabSz="914400" rtl="0" eaLnBrk="1" latinLnBrk="0" hangingPunct="1">
+              <a:lnSpc>
+                <a:spcPct val="90000"/>
+              </a:lnSpc>
+              <a:spcBef>
+                <a:spcPts val="500"/>
+              </a:spcBef>
+              <a:buFont typeface="Arial" panose="020B0604020202020204" pitchFamily="34" charset="0"/>
+              <a:buChar char="•"/>
+              <a:defRPr sz="1800" kern="1200">
+                <a:solidFill>
+                  <a:schemeClr val="tx1"/>
+                </a:solidFill>
+                <a:latin typeface="+mn-lt"/>
+                <a:ea typeface="+mn-ea"/>
+                <a:cs typeface="+mn-cs"/>
+              </a:defRPr>
+            </a:lvl7pPr>
+            <a:lvl8pPr marL="3429000" indent="-228600" algn="l" defTabSz="914400" rtl="0" eaLnBrk="1" latinLnBrk="0" hangingPunct="1">
+              <a:lnSpc>
+                <a:spcPct val="90000"/>
+              </a:lnSpc>
+              <a:spcBef>
+                <a:spcPts val="500"/>
+              </a:spcBef>
+              <a:buFont typeface="Arial" panose="020B0604020202020204" pitchFamily="34" charset="0"/>
+              <a:buChar char="•"/>
+              <a:defRPr sz="1800" kern="1200">
+                <a:solidFill>
+                  <a:schemeClr val="tx1"/>
+                </a:solidFill>
+                <a:latin typeface="+mn-lt"/>
+                <a:ea typeface="+mn-ea"/>
+                <a:cs typeface="+mn-cs"/>
+              </a:defRPr>
+            </a:lvl8pPr>
+            <a:lvl9pPr marL="3886200" indent="-228600" algn="l" defTabSz="914400" rtl="0" eaLnBrk="1" latinLnBrk="0" hangingPunct="1">
+              <a:lnSpc>
+                <a:spcPct val="90000"/>
+              </a:lnSpc>
+              <a:spcBef>
+                <a:spcPts val="500"/>
+              </a:spcBef>
+              <a:buFont typeface="Arial" panose="020B0604020202020204" pitchFamily="34" charset="0"/>
+              <a:buChar char="•"/>
+              <a:defRPr sz="1800" kern="1200">
+                <a:solidFill>
+                  <a:schemeClr val="tx1"/>
+                </a:solidFill>
+                <a:latin typeface="+mn-lt"/>
+                <a:ea typeface="+mn-ea"/>
+                <a:cs typeface="+mn-cs"/>
+              </a:defRPr>
+            </a:lvl9pPr>
+          </a:lstStyle>
+          <a:p>
+            <a:pPr marL="0" indent="0">
+              <a:buFont typeface="Arial" panose="020B0604020202020204" pitchFamily="34" charset="0"/>
+              <a:buNone/>
+            </a:pPr>
+            <a:r>
+              <a:rPr lang="en-US" sz="1800" dirty="0" smtClean="0"/>
+              <a:t>Desktop</a:t>
+            </a:r>
+            <a:endParaRPr lang="ru-RU" sz="1800" dirty="0"/>
+          </a:p>
+        </p:txBody>
+      </p:sp>
+      <p:graphicFrame>
+        <p:nvGraphicFramePr>
+          <p:cNvPr id="4" name="Таблица 3"/>
+          <p:cNvGraphicFramePr>
+            <a:graphicFrameLocks noGrp="1"/>
+          </p:cNvGraphicFramePr>
+          <p:nvPr>
+            <p:extLst>
+              <p:ext uri="{D42A27DB-BD31-4B8C-83A1-F6EECF244321}">
+                <p14:modId xmlns:p14="http://schemas.microsoft.com/office/powerpoint/2010/main" val="208681766"/>
+              </p:ext>
+            </p:extLst>
+          </p:nvPr>
+        </p:nvGraphicFramePr>
+        <p:xfrm>
+          <a:off x="982766" y="1709158"/>
+          <a:ext cx="8129370" cy="1297168"/>
+        </p:xfrm>
+        <a:graphic>
+          <a:graphicData uri="http://schemas.openxmlformats.org/drawingml/2006/table">
+            <a:tbl>
+              <a:tblPr firstRow="1" bandRow="1">
+                <a:tableStyleId>{8A107856-5554-42FB-B03E-39F5DBC370BA}</a:tableStyleId>
+              </a:tblPr>
+              <a:tblGrid>
+                <a:gridCol w="844793">
                   <a:extLst>
                     <a:ext uri="{9D8B030D-6E8A-4147-A177-3AD203B41FA5}">
                       <a16:colId xmlns:a16="http://schemas.microsoft.com/office/drawing/2014/main" val="3073684535"/>
                     </a:ext>
                   </a:extLst>
                 </a:gridCol>
-                <a:gridCol w="914400">
+                <a:gridCol w="911608">
                   <a:extLst>
                     <a:ext uri="{9D8B030D-6E8A-4147-A177-3AD203B41FA5}">
                       <a16:colId xmlns:a16="http://schemas.microsoft.com/office/drawing/2014/main" val="2367231213"/>
                     </a:ext>
                   </a:extLst>
                 </a:gridCol>
-                <a:gridCol w="1155469">
+                <a:gridCol w="1151941">
                   <a:extLst>
                     <a:ext uri="{9D8B030D-6E8A-4147-A177-3AD203B41FA5}">
                       <a16:colId xmlns:a16="http://schemas.microsoft.com/office/drawing/2014/main" val="157669674"/>
                     </a:ext>
                   </a:extLst>
                 </a:gridCol>
-                <a:gridCol w="1072342">
+                <a:gridCol w="1069068">
                   <a:extLst>
                     <a:ext uri="{9D8B030D-6E8A-4147-A177-3AD203B41FA5}">
                       <a16:colId xmlns:a16="http://schemas.microsoft.com/office/drawing/2014/main" val="984069144"/>
                     </a:ext>
                   </a:extLst>
                 </a:gridCol>
-                <a:gridCol w="756458">
+                <a:gridCol w="754148">
                   <a:extLst>
                     <a:ext uri="{9D8B030D-6E8A-4147-A177-3AD203B41FA5}">
                       <a16:colId xmlns:a16="http://schemas.microsoft.com/office/drawing/2014/main" val="1180036178"/>
                     </a:ext>
                   </a:extLst>
                 </a:gridCol>
-                <a:gridCol w="989215">
+                <a:gridCol w="986195">
                   <a:extLst>
                     <a:ext uri="{9D8B030D-6E8A-4147-A177-3AD203B41FA5}">
                       <a16:colId xmlns:a16="http://schemas.microsoft.com/office/drawing/2014/main" val="1029428207"/>
                     </a:ext>
                   </a:extLst>
                 </a:gridCol>
-                <a:gridCol w="702470">
+                <a:gridCol w="700325">
                   <a:extLst>
                     <a:ext uri="{9D8B030D-6E8A-4147-A177-3AD203B41FA5}">
                       <a16:colId xmlns:a16="http://schemas.microsoft.com/office/drawing/2014/main" val="1309030349"/>
                     </a:ext>
                   </a:extLst>
                 </a:gridCol>
-                <a:gridCol w="858266">
+                <a:gridCol w="855646">
                   <a:extLst>
                     <a:ext uri="{9D8B030D-6E8A-4147-A177-3AD203B41FA5}">
                       <a16:colId xmlns:a16="http://schemas.microsoft.com/office/drawing/2014/main" val="3651040037"/>
                     </a:ext>
                   </a:extLst>
                 </a:gridCol>
-                <a:gridCol w="858266">
+                <a:gridCol w="855646">
                   <a:extLst>
                     <a:ext uri="{9D8B030D-6E8A-4147-A177-3AD203B41FA5}">
                       <a16:colId xmlns:a16="http://schemas.microsoft.com/office/drawing/2014/main" val="3677480611"/>
@@ -5077,7 +7782,7 @@
                   </a:extLst>
                 </a:gridCol>
               </a:tblGrid>
-              <a:tr h="336763">
+              <a:tr h="335143">
                 <a:tc>
                   <a:txBody>
                     <a:bodyPr/>
@@ -5308,7 +8013,7 @@
                   </a:ext>
                 </a:extLst>
               </a:tr>
-              <a:tr h="187917">
+              <a:tr h="191479">
                 <a:tc>
                   <a:txBody>
                     <a:bodyPr/>
@@ -5532,7 +8237,7 @@
                   </a:ext>
                 </a:extLst>
               </a:tr>
-              <a:tr h="187917">
+              <a:tr h="191479">
                 <a:tc>
                   <a:txBody>
                     <a:bodyPr/>
@@ -5617,7 +8322,7 @@
                       <a:r>
                         <a:rPr lang="ru-RU" sz="1100" b="1" u="none" strike="noStrike" dirty="0">
                           <a:solidFill>
-                            <a:schemeClr val="accent6"/>
+                            <a:srgbClr val="00B050"/>
                           </a:solidFill>
                           <a:effectLst/>
                         </a:rPr>
@@ -5625,7 +8330,7 @@
                       </a:r>
                       <a:endParaRPr lang="ru-RU" sz="1100" b="1" i="0" u="none" strike="noStrike" dirty="0">
                         <a:solidFill>
-                          <a:schemeClr val="accent6"/>
+                          <a:srgbClr val="00B050"/>
                         </a:solidFill>
                         <a:effectLst/>
                         <a:latin typeface="Calibri" panose="020F0502020204030204" pitchFamily="34" charset="0"/>
@@ -5756,7 +8461,7 @@
                   </a:ext>
                 </a:extLst>
               </a:tr>
-              <a:tr h="187917">
+              <a:tr h="191479">
                 <a:tc>
                   <a:txBody>
                     <a:bodyPr/>
@@ -5976,7 +8681,7 @@
                   </a:ext>
                 </a:extLst>
               </a:tr>
-              <a:tr h="187917">
+              <a:tr h="191479">
                 <a:tc>
                   <a:txBody>
                     <a:bodyPr/>
@@ -6061,7 +8766,7 @@
                       <a:r>
                         <a:rPr lang="ru-RU" sz="1100" b="1" u="none" strike="noStrike" dirty="0">
                           <a:solidFill>
-                            <a:schemeClr val="accent6"/>
+                            <a:srgbClr val="00B050"/>
                           </a:solidFill>
                           <a:effectLst/>
                         </a:rPr>
@@ -6069,7 +8774,7 @@
                       </a:r>
                       <a:endParaRPr lang="ru-RU" sz="1100" b="1" i="0" u="none" strike="noStrike" dirty="0">
                         <a:solidFill>
-                          <a:schemeClr val="accent6"/>
+                          <a:srgbClr val="00B050"/>
                         </a:solidFill>
                         <a:effectLst/>
                         <a:latin typeface="Calibri" panose="020F0502020204030204" pitchFamily="34" charset="0"/>
@@ -6087,7 +8792,7 @@
                       <a:r>
                         <a:rPr lang="ru-RU" sz="1100" b="1" u="none" strike="noStrike" dirty="0">
                           <a:solidFill>
-                            <a:schemeClr val="accent6"/>
+                            <a:srgbClr val="00B050"/>
                           </a:solidFill>
                           <a:effectLst/>
                         </a:rPr>
@@ -6095,7 +8800,7 @@
                       </a:r>
                       <a:endParaRPr lang="ru-RU" sz="1100" b="1" i="0" u="none" strike="noStrike" dirty="0">
                         <a:solidFill>
-                          <a:schemeClr val="accent6"/>
+                          <a:srgbClr val="00B050"/>
                         </a:solidFill>
                         <a:effectLst/>
                         <a:latin typeface="Calibri" panose="020F0502020204030204" pitchFamily="34" charset="0"/>
@@ -6200,7 +8905,7 @@
                   </a:ext>
                 </a:extLst>
               </a:tr>
-              <a:tr h="187917">
+              <a:tr h="191479">
                 <a:tc>
                   <a:txBody>
                     <a:bodyPr/>
@@ -6285,7 +8990,7 @@
                       <a:r>
                         <a:rPr lang="ru-RU" sz="1100" b="1" u="none" strike="noStrike" dirty="0">
                           <a:solidFill>
-                            <a:schemeClr val="accent6"/>
+                            <a:srgbClr val="00B050"/>
                           </a:solidFill>
                           <a:effectLst/>
                         </a:rPr>
@@ -6293,7 +8998,7 @@
                       </a:r>
                       <a:endParaRPr lang="ru-RU" sz="1100" b="1" i="0" u="none" strike="noStrike" dirty="0">
                         <a:solidFill>
-                          <a:schemeClr val="accent6"/>
+                          <a:srgbClr val="00B050"/>
                         </a:solidFill>
                         <a:effectLst/>
                         <a:latin typeface="Calibri" panose="020F0502020204030204" pitchFamily="34" charset="0"/>
@@ -6437,13 +9142,13 @@
           <p:nvPr>
             <p:extLst>
               <p:ext uri="{D42A27DB-BD31-4B8C-83A1-F6EECF244321}">
-                <p14:modId xmlns:p14="http://schemas.microsoft.com/office/powerpoint/2010/main" val="2598013358"/>
+                <p14:modId xmlns:p14="http://schemas.microsoft.com/office/powerpoint/2010/main" val="684111494"/>
               </p:ext>
             </p:extLst>
           </p:nvPr>
         </p:nvGraphicFramePr>
         <p:xfrm>
-          <a:off x="989215" y="3528782"/>
+          <a:off x="940727" y="3836960"/>
           <a:ext cx="8171409" cy="1106383"/>
         </p:xfrm>
         <a:graphic>
@@ -6824,7 +9529,7 @@
                       <a:r>
                         <a:rPr lang="ru-RU" sz="1200" b="1" u="none" strike="noStrike" kern="1200" dirty="0">
                           <a:solidFill>
-                            <a:schemeClr val="accent6"/>
+                            <a:srgbClr val="00B050"/>
                           </a:solidFill>
                           <a:effectLst/>
                           <a:latin typeface="+mn-lt"/>
@@ -6846,7 +9551,7 @@
                       <a:r>
                         <a:rPr lang="ru-RU" sz="1200" b="1" u="none" strike="noStrike" kern="1200" dirty="0">
                           <a:solidFill>
-                            <a:schemeClr val="accent6"/>
+                            <a:srgbClr val="00B050"/>
                           </a:solidFill>
                           <a:effectLst/>
                           <a:latin typeface="+mn-lt"/>
@@ -7029,7 +9734,7 @@
                       <a:r>
                         <a:rPr lang="ru-RU" sz="1200" b="1" u="none" strike="noStrike" kern="1200" dirty="0">
                           <a:solidFill>
-                            <a:schemeClr val="accent6"/>
+                            <a:srgbClr val="00B050"/>
                           </a:solidFill>
                           <a:effectLst/>
                           <a:latin typeface="+mn-lt"/>
@@ -7051,7 +9756,7 @@
                       <a:r>
                         <a:rPr lang="ru-RU" sz="1200" b="1" u="none" strike="noStrike" kern="1200" dirty="0">
                           <a:solidFill>
-                            <a:schemeClr val="accent6"/>
+                            <a:srgbClr val="00B050"/>
                           </a:solidFill>
                           <a:effectLst/>
                           <a:latin typeface="+mn-lt"/>
@@ -7234,7 +9939,7 @@
                       <a:r>
                         <a:rPr lang="ru-RU" sz="1200" b="1" u="none" strike="noStrike" kern="1200" dirty="0">
                           <a:solidFill>
-                            <a:schemeClr val="accent6"/>
+                            <a:srgbClr val="00B050"/>
                           </a:solidFill>
                           <a:effectLst/>
                           <a:latin typeface="+mn-lt"/>
@@ -7256,7 +9961,7 @@
                       <a:r>
                         <a:rPr lang="ru-RU" sz="1200" b="1" u="none" strike="noStrike" kern="1200" dirty="0">
                           <a:solidFill>
-                            <a:schemeClr val="accent6"/>
+                            <a:srgbClr val="00B050"/>
                           </a:solidFill>
                           <a:effectLst/>
                           <a:latin typeface="+mn-lt"/>
@@ -7439,7 +10144,7 @@
                       <a:r>
                         <a:rPr lang="ru-RU" sz="1200" b="1" u="none" strike="noStrike" kern="1200" dirty="0">
                           <a:solidFill>
-                            <a:schemeClr val="accent6"/>
+                            <a:srgbClr val="00B050"/>
                           </a:solidFill>
                           <a:effectLst/>
                           <a:latin typeface="+mn-lt"/>
@@ -7461,7 +10166,7 @@
                       <a:r>
                         <a:rPr lang="ru-RU" sz="1200" b="1" u="none" strike="noStrike" kern="1200" dirty="0">
                           <a:solidFill>
-                            <a:schemeClr val="accent6"/>
+                            <a:srgbClr val="00B050"/>
                           </a:solidFill>
                           <a:effectLst/>
                           <a:latin typeface="+mn-lt"/>
@@ -7582,7 +10287,7 @@
         </p:nvSpPr>
         <p:spPr>
           <a:xfrm>
-            <a:off x="9410005" y="3995544"/>
+            <a:off x="906089" y="3482749"/>
             <a:ext cx="2177935" cy="365266"/>
           </a:xfrm>
           <a:prstGeom prst="rect">
@@ -7770,187 +10475,9 @@
           </a:p>
         </p:txBody>
       </p:sp>
-    </p:spTree>
-    <p:extLst>
-      <p:ext uri="{BB962C8B-B14F-4D97-AF65-F5344CB8AC3E}">
-        <p14:creationId xmlns:p14="http://schemas.microsoft.com/office/powerpoint/2010/main" val="2138135669"/>
-      </p:ext>
-    </p:extLst>
-  </p:cSld>
-  <p:clrMapOvr>
-    <a:masterClrMapping/>
-  </p:clrMapOvr>
-  <p:timing>
-    <p:tnLst>
-      <p:par>
-        <p:cTn id="1" dur="indefinite" restart="never" nodeType="tmRoot"/>
-      </p:par>
-    </p:tnLst>
-  </p:timing>
-</p:sld>
-</file>
-
-<file path=ppt/slides/slide6.xml><?xml version="1.0" encoding="utf-8"?>
-<p:sld xmlns:a="http://schemas.openxmlformats.org/drawingml/2006/main" xmlns:r="http://schemas.openxmlformats.org/officeDocument/2006/relationships" xmlns:p="http://schemas.openxmlformats.org/presentationml/2006/main">
-  <p:cSld>
-    <p:spTree>
-      <p:nvGrpSpPr>
-        <p:cNvPr id="1" name=""/>
-        <p:cNvGrpSpPr/>
-        <p:nvPr/>
-      </p:nvGrpSpPr>
-      <p:grpSpPr>
-        <a:xfrm>
-          <a:off x="0" y="0"/>
-          <a:ext cx="0" cy="0"/>
-          <a:chOff x="0" y="0"/>
-          <a:chExt cx="0" cy="0"/>
-        </a:xfrm>
-      </p:grpSpPr>
       <p:sp>
         <p:nvSpPr>
-          <p:cNvPr id="2" name="Заголовок 1"/>
-          <p:cNvSpPr>
-            <a:spLocks noGrp="1"/>
-          </p:cNvSpPr>
-          <p:nvPr>
-            <p:ph type="title"/>
-          </p:nvPr>
-        </p:nvSpPr>
-        <p:spPr>
-          <a:xfrm>
-            <a:off x="838200" y="365125"/>
-            <a:ext cx="10515600" cy="1161361"/>
-          </a:xfrm>
-        </p:spPr>
-        <p:txBody>
-          <a:bodyPr>
-            <a:normAutofit/>
-          </a:bodyPr>
-          <a:lstStyle/>
-          <a:p>
-            <a:r>
-              <a:rPr lang="ru-RU" sz="4000" b="1" dirty="0" smtClean="0"/>
-              <a:t>Анализ поведения пользователей</a:t>
-            </a:r>
-            <a:endParaRPr lang="ru-RU" sz="4000" b="1" dirty="0"/>
-          </a:p>
-        </p:txBody>
-      </p:sp>
-      <p:sp>
-        <p:nvSpPr>
-          <p:cNvPr id="5" name="Объект 4"/>
-          <p:cNvSpPr>
-            <a:spLocks noGrp="1"/>
-          </p:cNvSpPr>
-          <p:nvPr>
-            <p:ph idx="1"/>
-          </p:nvPr>
-        </p:nvSpPr>
-        <p:spPr>
-          <a:xfrm>
-            <a:off x="989217" y="5461462"/>
-            <a:ext cx="9651074" cy="1304145"/>
-          </a:xfrm>
-        </p:spPr>
-        <p:txBody>
-          <a:bodyPr>
-            <a:normAutofit fontScale="92500" lnSpcReduction="20000"/>
-          </a:bodyPr>
-          <a:lstStyle/>
-          <a:p>
-            <a:pPr marL="0" indent="0" algn="just">
-              <a:buNone/>
-            </a:pPr>
-            <a:r>
-              <a:rPr lang="ru-RU" sz="1700" b="1" dirty="0" smtClean="0"/>
-              <a:t>Важно</a:t>
-            </a:r>
-            <a:r>
-              <a:rPr lang="ru-RU" sz="1700" dirty="0" smtClean="0"/>
-              <a:t>: количество </a:t>
-            </a:r>
-            <a:r>
-              <a:rPr lang="ru-RU" sz="1700" dirty="0" smtClean="0"/>
-              <a:t>сессий практически не изменилось (пользователи возвращаются), но снизилось общее количество загруженных страниц и резко упало количество страниц, где пользователь видел нашу ленту.</a:t>
-            </a:r>
-          </a:p>
-          <a:p>
-            <a:pPr marL="0" indent="0">
-              <a:buNone/>
-            </a:pPr>
-            <a:r>
-              <a:rPr lang="ru-RU" sz="1700" b="1" dirty="0" smtClean="0"/>
-              <a:t>Вывод</a:t>
-            </a:r>
-            <a:r>
-              <a:rPr lang="ru-RU" sz="1700" dirty="0" smtClean="0"/>
-              <a:t>: </a:t>
-            </a:r>
-            <a:br>
-              <a:rPr lang="ru-RU" sz="1700" dirty="0" smtClean="0"/>
-            </a:br>
-            <a:r>
-              <a:rPr lang="ru-RU" sz="1700" dirty="0" smtClean="0"/>
-              <a:t> - пользователи стали чаще кликать на рекламный контент и не возвращаться обратно на сайт. </a:t>
-            </a:r>
-            <a:r>
-              <a:rPr lang="ru-RU" sz="1700" dirty="0" smtClean="0"/>
-              <a:t>Это </a:t>
-            </a:r>
-            <a:r>
-              <a:rPr lang="ru-RU" sz="1700" dirty="0" smtClean="0"/>
-              <a:t>подтверждается снижением глубины просмотра.</a:t>
-            </a:r>
-            <a:r>
-              <a:rPr lang="ru-RU" sz="1700" dirty="0"/>
-              <a:t> </a:t>
-            </a:r>
-            <a:r>
-              <a:rPr lang="ru-RU" sz="1700" dirty="0" smtClean="0"/>
-              <a:t/>
-            </a:r>
-            <a:br>
-              <a:rPr lang="ru-RU" sz="1700" dirty="0" smtClean="0"/>
-            </a:br>
-            <a:r>
-              <a:rPr lang="ru-RU" sz="1700" dirty="0"/>
-              <a:t> </a:t>
-            </a:r>
-            <a:r>
-              <a:rPr lang="ru-RU" sz="1700" dirty="0" smtClean="0"/>
-              <a:t>-</a:t>
-            </a:r>
-            <a:r>
-              <a:rPr lang="ru-RU" sz="1700" dirty="0" smtClean="0"/>
-              <a:t> </a:t>
-            </a:r>
-            <a:r>
-              <a:rPr lang="ru-RU" sz="1700" dirty="0" smtClean="0"/>
-              <a:t>снижение </a:t>
-            </a:r>
-            <a:r>
-              <a:rPr lang="en-US" sz="1700" dirty="0" smtClean="0"/>
-              <a:t>CPC</a:t>
-            </a:r>
-            <a:r>
-              <a:rPr lang="ru-RU" sz="1700" dirty="0" smtClean="0"/>
-              <a:t> на </a:t>
-            </a:r>
-            <a:r>
-              <a:rPr lang="en-US" sz="1700" dirty="0" smtClean="0"/>
-              <a:t>Desktop</a:t>
-            </a:r>
-            <a:r>
-              <a:rPr lang="ru-RU" sz="1700" dirty="0" smtClean="0"/>
-              <a:t> усугубило результат и привело к падению прибыли </a:t>
-            </a:r>
-          </a:p>
-        </p:txBody>
-      </p:sp>
-      <p:sp>
-        <p:nvSpPr>
-          <p:cNvPr id="9" name="Объект 4"/>
+          <p:cNvPr id="12" name="Объект 4"/>
           <p:cNvSpPr txBox="1">
             <a:spLocks/>
           </p:cNvSpPr>
@@ -7958,8 +10485,8 @@
         </p:nvSpPr>
         <p:spPr>
           <a:xfrm>
-            <a:off x="9293629" y="2872453"/>
-            <a:ext cx="2177935" cy="1242578"/>
+            <a:off x="9437409" y="2985013"/>
+            <a:ext cx="1791765" cy="1005873"/>
           </a:xfrm>
           <a:prstGeom prst="rect">
             <a:avLst/>
@@ -7967,7 +10494,7 @@
         </p:spPr>
         <p:txBody>
           <a:bodyPr vert="horz" lIns="91440" tIns="45720" rIns="91440" bIns="45720" rtlCol="0">
-            <a:normAutofit fontScale="92500" lnSpcReduction="10000"/>
+            <a:noAutofit/>
           </a:bodyPr>
           <a:lstStyle>
             <a:lvl1pPr marL="228600" indent="-228600" algn="l" defTabSz="914400" rtl="0" eaLnBrk="1" latinLnBrk="0" hangingPunct="1">
@@ -8139,41 +10666,24 @@
               <a:buNone/>
             </a:pPr>
             <a:r>
+              <a:rPr lang="ru-RU" sz="1600" dirty="0" smtClean="0"/>
+              <a:t>Показатели группы В </a:t>
+            </a:r>
+            <a:r>
               <a:rPr lang="ru-RU" sz="1800" dirty="0" smtClean="0"/>
-              <a:t>Относительный прирост/падение показателей группы В к группе А по каждой платформе</a:t>
-            </a:r>
-            <a:endParaRPr lang="ru-RU" sz="1800" dirty="0"/>
+              <a:t>относительно</a:t>
+            </a:r>
+            <a:r>
+              <a:rPr lang="ru-RU" sz="1600" dirty="0" smtClean="0"/>
+              <a:t> группы А</a:t>
+            </a:r>
           </a:p>
         </p:txBody>
       </p:sp>
-      <p:pic>
-        <p:nvPicPr>
-          <p:cNvPr id="3" name="Рисунок 2"/>
-          <p:cNvPicPr>
-            <a:picLocks noChangeAspect="1"/>
-          </p:cNvPicPr>
-          <p:nvPr/>
-        </p:nvPicPr>
-        <p:blipFill>
-          <a:blip r:embed="rId2"/>
-          <a:stretch>
-            <a:fillRect/>
-          </a:stretch>
-        </p:blipFill>
-        <p:spPr>
-          <a:xfrm>
-            <a:off x="838200" y="1526023"/>
-            <a:ext cx="8372301" cy="3935439"/>
-          </a:xfrm>
-          <a:prstGeom prst="rect">
-            <a:avLst/>
-          </a:prstGeom>
-        </p:spPr>
-      </p:pic>
     </p:spTree>
     <p:extLst>
       <p:ext uri="{BB962C8B-B14F-4D97-AF65-F5344CB8AC3E}">
-        <p14:creationId xmlns:p14="http://schemas.microsoft.com/office/powerpoint/2010/main" val="132676662"/>
+        <p14:creationId xmlns:p14="http://schemas.microsoft.com/office/powerpoint/2010/main" val="2138135669"/>
       </p:ext>
     </p:extLst>
   </p:cSld>
@@ -8217,18 +10727,29 @@
             <p:ph type="title"/>
           </p:nvPr>
         </p:nvSpPr>
-        <p:spPr/>
+        <p:spPr>
+          <a:xfrm>
+            <a:off x="838200" y="365125"/>
+            <a:ext cx="10515600" cy="1147152"/>
+          </a:xfrm>
+        </p:spPr>
         <p:txBody>
-          <a:bodyPr/>
+          <a:bodyPr>
+            <a:normAutofit/>
+          </a:bodyPr>
           <a:lstStyle/>
           <a:p>
-            <a:endParaRPr lang="ru-RU"/>
+            <a:r>
+              <a:rPr lang="ru-RU" sz="4000" b="1" dirty="0" smtClean="0"/>
+              <a:t>Анализ поведения пользователей</a:t>
+            </a:r>
+            <a:endParaRPr lang="ru-RU" sz="4000" b="1" dirty="0"/>
           </a:p>
         </p:txBody>
       </p:sp>
       <p:sp>
         <p:nvSpPr>
-          <p:cNvPr id="3" name="Объект 2"/>
+          <p:cNvPr id="5" name="Объект 4"/>
           <p:cNvSpPr>
             <a:spLocks noGrp="1"/>
           </p:cNvSpPr>
@@ -8236,25 +10757,535 @@
             <p:ph idx="1"/>
           </p:nvPr>
         </p:nvSpPr>
-        <p:spPr/>
+        <p:spPr>
+          <a:xfrm>
+            <a:off x="908538" y="5125915"/>
+            <a:ext cx="9580736" cy="1652954"/>
+          </a:xfrm>
+        </p:spPr>
         <p:txBody>
-          <a:bodyPr/>
+          <a:bodyPr>
+            <a:normAutofit/>
+          </a:bodyPr>
           <a:lstStyle/>
           <a:p>
-            <a:endParaRPr lang="ru-RU"/>
+            <a:pPr marL="0" indent="0" algn="just">
+              <a:buNone/>
+            </a:pPr>
+            <a:r>
+              <a:rPr lang="ru-RU" sz="1700" dirty="0" smtClean="0"/>
+              <a:t>На протяжении проведения теста (7 дней) мы увидели противоположные результаты на </a:t>
+            </a:r>
+            <a:r>
+              <a:rPr lang="en-US" sz="1700" dirty="0" smtClean="0"/>
+              <a:t>Desktop </a:t>
+            </a:r>
+            <a:r>
+              <a:rPr lang="ru-RU" sz="1700" dirty="0" smtClean="0"/>
+              <a:t>и </a:t>
+            </a:r>
+            <a:r>
+              <a:rPr lang="en-US" sz="1700" dirty="0" smtClean="0"/>
+              <a:t>Mobile</a:t>
+            </a:r>
+            <a:r>
+              <a:rPr lang="ru-RU" sz="1700" dirty="0" smtClean="0"/>
+              <a:t>. По окончанию теста группа А на </a:t>
+            </a:r>
+            <a:r>
+              <a:rPr lang="en-US" sz="1700" dirty="0" smtClean="0"/>
+              <a:t>Desktop </a:t>
+            </a:r>
+            <a:r>
+              <a:rPr lang="ru-RU" sz="1700" dirty="0" smtClean="0"/>
+              <a:t>показала себя лучше, чем В, в то время как на </a:t>
+            </a:r>
+            <a:r>
+              <a:rPr lang="en-US" sz="1700" dirty="0" smtClean="0"/>
+              <a:t>Mobile</a:t>
+            </a:r>
+            <a:r>
+              <a:rPr lang="ru-RU" sz="1700" dirty="0" smtClean="0"/>
+              <a:t> группа В показала лучшие показатели по финансовым метрикам</a:t>
+            </a:r>
+          </a:p>
+          <a:p>
+            <a:pPr marL="0" indent="0" algn="just">
+              <a:buNone/>
+            </a:pPr>
+            <a:r>
+              <a:rPr lang="ru-RU" sz="1700" b="1" dirty="0" smtClean="0"/>
+              <a:t>Однако:</a:t>
+            </a:r>
+            <a:r>
+              <a:rPr lang="ru-RU" sz="1700" dirty="0" smtClean="0"/>
+              <a:t> анализ поведения пользователей (прогноз и линия тренда) показывают, что текущее поведение пользователей вполне могут быть временным и иметь затухающих характер. Поэтому рекомендуется дальнейшее наблюдение за изменениями</a:t>
+            </a:r>
+            <a:endParaRPr lang="ru-RU" sz="1700" dirty="0" smtClean="0"/>
           </a:p>
         </p:txBody>
       </p:sp>
+      <p:sp>
+        <p:nvSpPr>
+          <p:cNvPr id="8" name="Объект 4"/>
+          <p:cNvSpPr txBox="1">
+            <a:spLocks/>
+          </p:cNvSpPr>
+          <p:nvPr/>
+        </p:nvSpPr>
+        <p:spPr>
+          <a:xfrm>
+            <a:off x="908538" y="1316436"/>
+            <a:ext cx="2177935" cy="364910"/>
+          </a:xfrm>
+          <a:prstGeom prst="rect">
+            <a:avLst/>
+          </a:prstGeom>
+        </p:spPr>
+        <p:txBody>
+          <a:bodyPr vert="horz" lIns="91440" tIns="45720" rIns="91440" bIns="45720" rtlCol="0">
+            <a:normAutofit/>
+          </a:bodyPr>
+          <a:lstStyle>
+            <a:lvl1pPr marL="228600" indent="-228600" algn="l" defTabSz="914400" rtl="0" eaLnBrk="1" latinLnBrk="0" hangingPunct="1">
+              <a:lnSpc>
+                <a:spcPct val="90000"/>
+              </a:lnSpc>
+              <a:spcBef>
+                <a:spcPts val="1000"/>
+              </a:spcBef>
+              <a:buFont typeface="Arial" panose="020B0604020202020204" pitchFamily="34" charset="0"/>
+              <a:buChar char="•"/>
+              <a:defRPr sz="2800" kern="1200">
+                <a:solidFill>
+                  <a:schemeClr val="tx1"/>
+                </a:solidFill>
+                <a:latin typeface="+mn-lt"/>
+                <a:ea typeface="+mn-ea"/>
+                <a:cs typeface="+mn-cs"/>
+              </a:defRPr>
+            </a:lvl1pPr>
+            <a:lvl2pPr marL="685800" indent="-228600" algn="l" defTabSz="914400" rtl="0" eaLnBrk="1" latinLnBrk="0" hangingPunct="1">
+              <a:lnSpc>
+                <a:spcPct val="90000"/>
+              </a:lnSpc>
+              <a:spcBef>
+                <a:spcPts val="500"/>
+              </a:spcBef>
+              <a:buFont typeface="Arial" panose="020B0604020202020204" pitchFamily="34" charset="0"/>
+              <a:buChar char="•"/>
+              <a:defRPr sz="2400" kern="1200">
+                <a:solidFill>
+                  <a:schemeClr val="tx1"/>
+                </a:solidFill>
+                <a:latin typeface="+mn-lt"/>
+                <a:ea typeface="+mn-ea"/>
+                <a:cs typeface="+mn-cs"/>
+              </a:defRPr>
+            </a:lvl2pPr>
+            <a:lvl3pPr marL="1143000" indent="-228600" algn="l" defTabSz="914400" rtl="0" eaLnBrk="1" latinLnBrk="0" hangingPunct="1">
+              <a:lnSpc>
+                <a:spcPct val="90000"/>
+              </a:lnSpc>
+              <a:spcBef>
+                <a:spcPts val="500"/>
+              </a:spcBef>
+              <a:buFont typeface="Arial" panose="020B0604020202020204" pitchFamily="34" charset="0"/>
+              <a:buChar char="•"/>
+              <a:defRPr sz="2000" kern="1200">
+                <a:solidFill>
+                  <a:schemeClr val="tx1"/>
+                </a:solidFill>
+                <a:latin typeface="+mn-lt"/>
+                <a:ea typeface="+mn-ea"/>
+                <a:cs typeface="+mn-cs"/>
+              </a:defRPr>
+            </a:lvl3pPr>
+            <a:lvl4pPr marL="1600200" indent="-228600" algn="l" defTabSz="914400" rtl="0" eaLnBrk="1" latinLnBrk="0" hangingPunct="1">
+              <a:lnSpc>
+                <a:spcPct val="90000"/>
+              </a:lnSpc>
+              <a:spcBef>
+                <a:spcPts val="500"/>
+              </a:spcBef>
+              <a:buFont typeface="Arial" panose="020B0604020202020204" pitchFamily="34" charset="0"/>
+              <a:buChar char="•"/>
+              <a:defRPr sz="1800" kern="1200">
+                <a:solidFill>
+                  <a:schemeClr val="tx1"/>
+                </a:solidFill>
+                <a:latin typeface="+mn-lt"/>
+                <a:ea typeface="+mn-ea"/>
+                <a:cs typeface="+mn-cs"/>
+              </a:defRPr>
+            </a:lvl4pPr>
+            <a:lvl5pPr marL="2057400" indent="-228600" algn="l" defTabSz="914400" rtl="0" eaLnBrk="1" latinLnBrk="0" hangingPunct="1">
+              <a:lnSpc>
+                <a:spcPct val="90000"/>
+              </a:lnSpc>
+              <a:spcBef>
+                <a:spcPts val="500"/>
+              </a:spcBef>
+              <a:buFont typeface="Arial" panose="020B0604020202020204" pitchFamily="34" charset="0"/>
+              <a:buChar char="•"/>
+              <a:defRPr sz="1800" kern="1200">
+                <a:solidFill>
+                  <a:schemeClr val="tx1"/>
+                </a:solidFill>
+                <a:latin typeface="+mn-lt"/>
+                <a:ea typeface="+mn-ea"/>
+                <a:cs typeface="+mn-cs"/>
+              </a:defRPr>
+            </a:lvl5pPr>
+            <a:lvl6pPr marL="2514600" indent="-228600" algn="l" defTabSz="914400" rtl="0" eaLnBrk="1" latinLnBrk="0" hangingPunct="1">
+              <a:lnSpc>
+                <a:spcPct val="90000"/>
+              </a:lnSpc>
+              <a:spcBef>
+                <a:spcPts val="500"/>
+              </a:spcBef>
+              <a:buFont typeface="Arial" panose="020B0604020202020204" pitchFamily="34" charset="0"/>
+              <a:buChar char="•"/>
+              <a:defRPr sz="1800" kern="1200">
+                <a:solidFill>
+                  <a:schemeClr val="tx1"/>
+                </a:solidFill>
+                <a:latin typeface="+mn-lt"/>
+                <a:ea typeface="+mn-ea"/>
+                <a:cs typeface="+mn-cs"/>
+              </a:defRPr>
+            </a:lvl6pPr>
+            <a:lvl7pPr marL="2971800" indent="-228600" algn="l" defTabSz="914400" rtl="0" eaLnBrk="1" latinLnBrk="0" hangingPunct="1">
+              <a:lnSpc>
+                <a:spcPct val="90000"/>
+              </a:lnSpc>
+              <a:spcBef>
+                <a:spcPts val="500"/>
+              </a:spcBef>
+              <a:buFont typeface="Arial" panose="020B0604020202020204" pitchFamily="34" charset="0"/>
+              <a:buChar char="•"/>
+              <a:defRPr sz="1800" kern="1200">
+                <a:solidFill>
+                  <a:schemeClr val="tx1"/>
+                </a:solidFill>
+                <a:latin typeface="+mn-lt"/>
+                <a:ea typeface="+mn-ea"/>
+                <a:cs typeface="+mn-cs"/>
+              </a:defRPr>
+            </a:lvl7pPr>
+            <a:lvl8pPr marL="3429000" indent="-228600" algn="l" defTabSz="914400" rtl="0" eaLnBrk="1" latinLnBrk="0" hangingPunct="1">
+              <a:lnSpc>
+                <a:spcPct val="90000"/>
+              </a:lnSpc>
+              <a:spcBef>
+                <a:spcPts val="500"/>
+              </a:spcBef>
+              <a:buFont typeface="Arial" panose="020B0604020202020204" pitchFamily="34" charset="0"/>
+              <a:buChar char="•"/>
+              <a:defRPr sz="1800" kern="1200">
+                <a:solidFill>
+                  <a:schemeClr val="tx1"/>
+                </a:solidFill>
+                <a:latin typeface="+mn-lt"/>
+                <a:ea typeface="+mn-ea"/>
+                <a:cs typeface="+mn-cs"/>
+              </a:defRPr>
+            </a:lvl8pPr>
+            <a:lvl9pPr marL="3886200" indent="-228600" algn="l" defTabSz="914400" rtl="0" eaLnBrk="1" latinLnBrk="0" hangingPunct="1">
+              <a:lnSpc>
+                <a:spcPct val="90000"/>
+              </a:lnSpc>
+              <a:spcBef>
+                <a:spcPts val="500"/>
+              </a:spcBef>
+              <a:buFont typeface="Arial" panose="020B0604020202020204" pitchFamily="34" charset="0"/>
+              <a:buChar char="•"/>
+              <a:defRPr sz="1800" kern="1200">
+                <a:solidFill>
+                  <a:schemeClr val="tx1"/>
+                </a:solidFill>
+                <a:latin typeface="+mn-lt"/>
+                <a:ea typeface="+mn-ea"/>
+                <a:cs typeface="+mn-cs"/>
+              </a:defRPr>
+            </a:lvl9pPr>
+          </a:lstStyle>
+          <a:p>
+            <a:pPr marL="0" indent="0">
+              <a:buFont typeface="Arial" panose="020B0604020202020204" pitchFamily="34" charset="0"/>
+              <a:buNone/>
+            </a:pPr>
+            <a:r>
+              <a:rPr lang="en-US" sz="1800" dirty="0" smtClean="0"/>
+              <a:t>Desktop</a:t>
+            </a:r>
+            <a:endParaRPr lang="ru-RU" sz="1800" dirty="0"/>
+          </a:p>
+        </p:txBody>
+      </p:sp>
+      <p:sp>
+        <p:nvSpPr>
+          <p:cNvPr id="10" name="Объект 4"/>
+          <p:cNvSpPr txBox="1">
+            <a:spLocks/>
+          </p:cNvSpPr>
+          <p:nvPr/>
+        </p:nvSpPr>
+        <p:spPr>
+          <a:xfrm>
+            <a:off x="6333393" y="1316436"/>
+            <a:ext cx="2177935" cy="371496"/>
+          </a:xfrm>
+          <a:prstGeom prst="rect">
+            <a:avLst/>
+          </a:prstGeom>
+        </p:spPr>
+        <p:txBody>
+          <a:bodyPr vert="horz" lIns="91440" tIns="45720" rIns="91440" bIns="45720" rtlCol="0">
+            <a:normAutofit/>
+          </a:bodyPr>
+          <a:lstStyle>
+            <a:lvl1pPr marL="228600" indent="-228600" algn="l" defTabSz="914400" rtl="0" eaLnBrk="1" latinLnBrk="0" hangingPunct="1">
+              <a:lnSpc>
+                <a:spcPct val="90000"/>
+              </a:lnSpc>
+              <a:spcBef>
+                <a:spcPts val="1000"/>
+              </a:spcBef>
+              <a:buFont typeface="Arial" panose="020B0604020202020204" pitchFamily="34" charset="0"/>
+              <a:buChar char="•"/>
+              <a:defRPr sz="2800" kern="1200">
+                <a:solidFill>
+                  <a:schemeClr val="tx1"/>
+                </a:solidFill>
+                <a:latin typeface="+mn-lt"/>
+                <a:ea typeface="+mn-ea"/>
+                <a:cs typeface="+mn-cs"/>
+              </a:defRPr>
+            </a:lvl1pPr>
+            <a:lvl2pPr marL="685800" indent="-228600" algn="l" defTabSz="914400" rtl="0" eaLnBrk="1" latinLnBrk="0" hangingPunct="1">
+              <a:lnSpc>
+                <a:spcPct val="90000"/>
+              </a:lnSpc>
+              <a:spcBef>
+                <a:spcPts val="500"/>
+              </a:spcBef>
+              <a:buFont typeface="Arial" panose="020B0604020202020204" pitchFamily="34" charset="0"/>
+              <a:buChar char="•"/>
+              <a:defRPr sz="2400" kern="1200">
+                <a:solidFill>
+                  <a:schemeClr val="tx1"/>
+                </a:solidFill>
+                <a:latin typeface="+mn-lt"/>
+                <a:ea typeface="+mn-ea"/>
+                <a:cs typeface="+mn-cs"/>
+              </a:defRPr>
+            </a:lvl2pPr>
+            <a:lvl3pPr marL="1143000" indent="-228600" algn="l" defTabSz="914400" rtl="0" eaLnBrk="1" latinLnBrk="0" hangingPunct="1">
+              <a:lnSpc>
+                <a:spcPct val="90000"/>
+              </a:lnSpc>
+              <a:spcBef>
+                <a:spcPts val="500"/>
+              </a:spcBef>
+              <a:buFont typeface="Arial" panose="020B0604020202020204" pitchFamily="34" charset="0"/>
+              <a:buChar char="•"/>
+              <a:defRPr sz="2000" kern="1200">
+                <a:solidFill>
+                  <a:schemeClr val="tx1"/>
+                </a:solidFill>
+                <a:latin typeface="+mn-lt"/>
+                <a:ea typeface="+mn-ea"/>
+                <a:cs typeface="+mn-cs"/>
+              </a:defRPr>
+            </a:lvl3pPr>
+            <a:lvl4pPr marL="1600200" indent="-228600" algn="l" defTabSz="914400" rtl="0" eaLnBrk="1" latinLnBrk="0" hangingPunct="1">
+              <a:lnSpc>
+                <a:spcPct val="90000"/>
+              </a:lnSpc>
+              <a:spcBef>
+                <a:spcPts val="500"/>
+              </a:spcBef>
+              <a:buFont typeface="Arial" panose="020B0604020202020204" pitchFamily="34" charset="0"/>
+              <a:buChar char="•"/>
+              <a:defRPr sz="1800" kern="1200">
+                <a:solidFill>
+                  <a:schemeClr val="tx1"/>
+                </a:solidFill>
+                <a:latin typeface="+mn-lt"/>
+                <a:ea typeface="+mn-ea"/>
+                <a:cs typeface="+mn-cs"/>
+              </a:defRPr>
+            </a:lvl4pPr>
+            <a:lvl5pPr marL="2057400" indent="-228600" algn="l" defTabSz="914400" rtl="0" eaLnBrk="1" latinLnBrk="0" hangingPunct="1">
+              <a:lnSpc>
+                <a:spcPct val="90000"/>
+              </a:lnSpc>
+              <a:spcBef>
+                <a:spcPts val="500"/>
+              </a:spcBef>
+              <a:buFont typeface="Arial" panose="020B0604020202020204" pitchFamily="34" charset="0"/>
+              <a:buChar char="•"/>
+              <a:defRPr sz="1800" kern="1200">
+                <a:solidFill>
+                  <a:schemeClr val="tx1"/>
+                </a:solidFill>
+                <a:latin typeface="+mn-lt"/>
+                <a:ea typeface="+mn-ea"/>
+                <a:cs typeface="+mn-cs"/>
+              </a:defRPr>
+            </a:lvl5pPr>
+            <a:lvl6pPr marL="2514600" indent="-228600" algn="l" defTabSz="914400" rtl="0" eaLnBrk="1" latinLnBrk="0" hangingPunct="1">
+              <a:lnSpc>
+                <a:spcPct val="90000"/>
+              </a:lnSpc>
+              <a:spcBef>
+                <a:spcPts val="500"/>
+              </a:spcBef>
+              <a:buFont typeface="Arial" panose="020B0604020202020204" pitchFamily="34" charset="0"/>
+              <a:buChar char="•"/>
+              <a:defRPr sz="1800" kern="1200">
+                <a:solidFill>
+                  <a:schemeClr val="tx1"/>
+                </a:solidFill>
+                <a:latin typeface="+mn-lt"/>
+                <a:ea typeface="+mn-ea"/>
+                <a:cs typeface="+mn-cs"/>
+              </a:defRPr>
+            </a:lvl6pPr>
+            <a:lvl7pPr marL="2971800" indent="-228600" algn="l" defTabSz="914400" rtl="0" eaLnBrk="1" latinLnBrk="0" hangingPunct="1">
+              <a:lnSpc>
+                <a:spcPct val="90000"/>
+              </a:lnSpc>
+              <a:spcBef>
+                <a:spcPts val="500"/>
+              </a:spcBef>
+              <a:buFont typeface="Arial" panose="020B0604020202020204" pitchFamily="34" charset="0"/>
+              <a:buChar char="•"/>
+              <a:defRPr sz="1800" kern="1200">
+                <a:solidFill>
+                  <a:schemeClr val="tx1"/>
+                </a:solidFill>
+                <a:latin typeface="+mn-lt"/>
+                <a:ea typeface="+mn-ea"/>
+                <a:cs typeface="+mn-cs"/>
+              </a:defRPr>
+            </a:lvl7pPr>
+            <a:lvl8pPr marL="3429000" indent="-228600" algn="l" defTabSz="914400" rtl="0" eaLnBrk="1" latinLnBrk="0" hangingPunct="1">
+              <a:lnSpc>
+                <a:spcPct val="90000"/>
+              </a:lnSpc>
+              <a:spcBef>
+                <a:spcPts val="500"/>
+              </a:spcBef>
+              <a:buFont typeface="Arial" panose="020B0604020202020204" pitchFamily="34" charset="0"/>
+              <a:buChar char="•"/>
+              <a:defRPr sz="1800" kern="1200">
+                <a:solidFill>
+                  <a:schemeClr val="tx1"/>
+                </a:solidFill>
+                <a:latin typeface="+mn-lt"/>
+                <a:ea typeface="+mn-ea"/>
+                <a:cs typeface="+mn-cs"/>
+              </a:defRPr>
+            </a:lvl8pPr>
+            <a:lvl9pPr marL="3886200" indent="-228600" algn="l" defTabSz="914400" rtl="0" eaLnBrk="1" latinLnBrk="0" hangingPunct="1">
+              <a:lnSpc>
+                <a:spcPct val="90000"/>
+              </a:lnSpc>
+              <a:spcBef>
+                <a:spcPts val="500"/>
+              </a:spcBef>
+              <a:buFont typeface="Arial" panose="020B0604020202020204" pitchFamily="34" charset="0"/>
+              <a:buChar char="•"/>
+              <a:defRPr sz="1800" kern="1200">
+                <a:solidFill>
+                  <a:schemeClr val="tx1"/>
+                </a:solidFill>
+                <a:latin typeface="+mn-lt"/>
+                <a:ea typeface="+mn-ea"/>
+                <a:cs typeface="+mn-cs"/>
+              </a:defRPr>
+            </a:lvl9pPr>
+          </a:lstStyle>
+          <a:p>
+            <a:pPr marL="0" indent="0">
+              <a:buFont typeface="Arial" panose="020B0604020202020204" pitchFamily="34" charset="0"/>
+              <a:buNone/>
+            </a:pPr>
+            <a:r>
+              <a:rPr lang="en-US" sz="1800" dirty="0" smtClean="0"/>
+              <a:t>Mobile</a:t>
+            </a:r>
+            <a:endParaRPr lang="ru-RU" sz="1800" dirty="0"/>
+          </a:p>
+        </p:txBody>
+      </p:sp>
+      <p:pic>
+        <p:nvPicPr>
+          <p:cNvPr id="7" name="Рисунок 6"/>
+          <p:cNvPicPr>
+            <a:picLocks noChangeAspect="1"/>
+          </p:cNvPicPr>
+          <p:nvPr/>
+        </p:nvPicPr>
+        <p:blipFill>
+          <a:blip r:embed="rId2"/>
+          <a:stretch>
+            <a:fillRect/>
+          </a:stretch>
+        </p:blipFill>
+        <p:spPr>
+          <a:xfrm>
+            <a:off x="6096001" y="1708940"/>
+            <a:ext cx="5163772" cy="3153205"/>
+          </a:xfrm>
+          <a:prstGeom prst="rect">
+            <a:avLst/>
+          </a:prstGeom>
+        </p:spPr>
+      </p:pic>
+      <p:pic>
+        <p:nvPicPr>
+          <p:cNvPr id="11" name="Рисунок 10"/>
+          <p:cNvPicPr>
+            <a:picLocks noChangeAspect="1"/>
+          </p:cNvPicPr>
+          <p:nvPr/>
+        </p:nvPicPr>
+        <p:blipFill>
+          <a:blip r:embed="rId3"/>
+          <a:stretch>
+            <a:fillRect/>
+          </a:stretch>
+        </p:blipFill>
+        <p:spPr>
+          <a:xfrm>
+            <a:off x="642810" y="1698930"/>
+            <a:ext cx="5204074" cy="3163216"/>
+          </a:xfrm>
+          <a:prstGeom prst="rect">
+            <a:avLst/>
+          </a:prstGeom>
+        </p:spPr>
+      </p:pic>
     </p:spTree>
     <p:extLst>
       <p:ext uri="{BB962C8B-B14F-4D97-AF65-F5344CB8AC3E}">
-        <p14:creationId xmlns:p14="http://schemas.microsoft.com/office/powerpoint/2010/main" val="688466209"/>
+        <p14:creationId xmlns:p14="http://schemas.microsoft.com/office/powerpoint/2010/main" val="39762649"/>
       </p:ext>
     </p:extLst>
   </p:cSld>
   <p:clrMapOvr>
     <a:masterClrMapping/>
   </p:clrMapOvr>
+  <p:timing>
+    <p:tnLst>
+      <p:par>
+        <p:cTn id="1" dur="indefinite" restart="never" nodeType="tmRoot"/>
+      </p:par>
+    </p:tnLst>
+  </p:timing>
 </p:sld>
 </file>
 
@@ -8316,7 +11347,7 @@
         </p:spPr>
         <p:txBody>
           <a:bodyPr>
-            <a:normAutofit fontScale="85000" lnSpcReduction="20000"/>
+            <a:normAutofit fontScale="77500" lnSpcReduction="20000"/>
           </a:bodyPr>
           <a:lstStyle/>
           <a:p>
@@ -8347,14 +11378,10 @@
             </a:r>
             <a:r>
               <a:rPr lang="ru-RU" dirty="0"/>
-              <a:t> и поведения </a:t>
-            </a:r>
-            <a:r>
-              <a:rPr lang="ru-RU"/>
-              <a:t>пользователей</a:t>
-            </a:r>
-            <a:r>
-              <a:rPr lang="ru-RU" smtClean="0"/>
+              <a:t> и поведения пользователей</a:t>
+            </a:r>
+            <a:r>
+              <a:rPr lang="ru-RU" dirty="0" smtClean="0"/>
               <a:t>:</a:t>
             </a:r>
           </a:p>
@@ -8383,8 +11410,36 @@
               <a:t>Откатить изменения на платформе </a:t>
             </a:r>
             <a:r>
-              <a:rPr lang="en-US" b="1" dirty="0"/>
+              <a:rPr lang="en-US" b="1" dirty="0" smtClean="0"/>
               <a:t>Desktop</a:t>
+            </a:r>
+            <a:endParaRPr lang="ru-RU" b="1" dirty="0" smtClean="0"/>
+          </a:p>
+          <a:p>
+            <a:pPr lvl="0"/>
+            <a:r>
+              <a:rPr lang="ru-RU" b="1" dirty="0" err="1" smtClean="0"/>
+              <a:t>Мониторить</a:t>
+            </a:r>
+            <a:r>
+              <a:rPr lang="ru-RU" b="1" dirty="0" smtClean="0"/>
+              <a:t> </a:t>
+            </a:r>
+            <a:r>
+              <a:rPr lang="en-US" b="1" dirty="0" smtClean="0"/>
+              <a:t>Retention</a:t>
+            </a:r>
+            <a:r>
+              <a:rPr lang="ru-RU" b="1" dirty="0" smtClean="0"/>
+              <a:t> на </a:t>
+            </a:r>
+            <a:r>
+              <a:rPr lang="en-US" b="1" dirty="0" smtClean="0"/>
+              <a:t>Mobile</a:t>
+            </a:r>
+            <a:r>
+              <a:rPr lang="ru-RU" b="1" smtClean="0"/>
+              <a:t>, следить за трендом</a:t>
             </a:r>
             <a:endParaRPr lang="ru-RU" dirty="0"/>
           </a:p>
